--- a/docs/HealthSense_ML_Slides.pptx
+++ b/docs/HealthSense_ML_Slides.pptx
@@ -23,9 +23,10 @@
     <p:sldId id="271" r:id="rId17"/>
     <p:sldId id="272" r:id="rId18"/>
     <p:sldId id="273" r:id="rId19"/>
+    <p:sldId id="274" r:id="rId20"/>
   </p:sldIdLst>
   <p:notesMasterIdLst>
-    <p:notesMasterId r:id="rId20"/>
+    <p:notesMasterId r:id="rId21"/>
   </p:notesMasterIdLst>
   <p:sldSz cx="12192000" cy="6858000"/>
   <p:notesSz cx="6858000" cy="12192000"/>
@@ -607,7 +608,7 @@
           <a:p>
             <a:r>
               <a:rPr lang="en-US" dirty="0"/>
-              <a:t>Slide quan trọng nhất bộ. Con số 98-99% từng có thật trong repo — và sai theo cách nguy hiểm nhất: trông rất thuyết phục. Bằng chứng nó ảo: khi chia đúng theo bệnh nhân, điểm tụt về 94%. 4-5% chênh lệch đó chính là phần mô hình 'nhận mặt người quen' chứ không phải nhận bệnh. Trong dữ liệu y sinh, leakage kiểu này phổ biến đến mức có cả các bài báo review chỉ để điểm mặt nó.</a:t>
+              <a:t>Đồ thị đắt giá nhất để 'nhìn thấy' AFib — và hiện đã có trong app: bác sĩ mở hồ sơ là thấy đám chấm này của từng phép đo. Cách đọc cho người mới: chỉ cần nhớ CHỤM = khỏe, TẢN = nghi ngờ.</a:t>
             </a:r>
             <a:endParaRPr lang="en-US" dirty="0"/>
           </a:p>
@@ -695,7 +696,7 @@
           <a:p>
             <a:r>
               <a:rPr lang="en-US" dirty="0"/>
-              <a:t>LOSO là chuẩn vàng khi số bệnh nhân ít. Mỗi vòng: giấu 1 người, học 34 người, và mọi thứ 'học được từ dữ liệu' — kể cả cái scaler tầm thường — cũng chỉ học từ 34 người đó. Nested CV nghĩa là ngay cả việc chọn cấu hình mô hình cũng thi đấu nội bộ trong train. Nghe cực đoan nhưng đây là mức tối thiểu để một con số y sinh đáng tin.</a:t>
+              <a:t>Slide quan trọng nhất bộ. Con số 98-99% từng có thật trong repo — và sai theo cách nguy hiểm nhất: trông rất thuyết phục. Bằng chứng nó ảo: khi chia đúng theo bệnh nhân, điểm tụt về 94%. 4-5% chênh lệch đó chính là phần mô hình 'nhận mặt người quen' chứ không phải nhận bệnh. Trong dữ liệu y sinh, leakage kiểu này phổ biến đến mức có cả các bài báo review chỉ để điểm mặt nó.</a:t>
             </a:r>
             <a:endParaRPr lang="en-US" dirty="0"/>
           </a:p>
@@ -783,7 +784,7 @@
           <a:p>
             <a:r>
               <a:rPr lang="en-US" dirty="0"/>
-              <a:t>Ba ma trận nhầm lẫn của 3 mô hình — cả ba đều KHÔNG bỏ sót bệnh nhân AFib nào (hàng dưới bên trái = 0). Với sàng lọc y tế, bỏ sót người bệnh là lỗi đắt nhất nên Recall 100% là con số đáng giá nhất. Còn 2 ca 'Normal bị báo nhầm' — slide sau có một cú twist thú vị về họ.</a:t>
+              <a:t>LOSO là chuẩn vàng khi số bệnh nhân ít. Mỗi vòng: giấu 1 người, học 34 người, và mọi thứ 'học được từ dữ liệu' — kể cả cái scaler tầm thường — cũng chỉ học từ 34 người đó. Nested CV nghĩa là ngay cả việc chọn cấu hình mô hình cũng thi đấu nội bộ trong train. Nghe cực đoan nhưng đây là mức tối thiểu để một con số y sinh đáng tin.</a:t>
             </a:r>
             <a:endParaRPr lang="en-US" dirty="0"/>
           </a:p>
@@ -871,7 +872,7 @@
           <a:p>
             <a:r>
               <a:rPr lang="en-US" dirty="0"/>
-              <a:t>Biểu đồ trái: xác suất AFib trung bình của từng người — đỏ là AFib thật, xanh là Normal. Hai cột xanh vượt ngưỡng 0.5 chính là 2 ca 'nhầm'. Nhờ MIMIC có ECG ghi song song, ta soi được đáp án chuẩn: ca 012 hóa ra nhãn sai chứ không phải mô hình sai; ca 014 là tín hiệu hỏng — và chính ca này khai sinh tính năng SQI đang chạy trong sản phẩm. Bài học: đừng vội tin cả nhãn dataset lẫn mô hình — hãy tìm nguồn sự thật thứ ba.</a:t>
+              <a:t>Ba ma trận nhầm lẫn của 3 mô hình — cả ba đều KHÔNG bỏ sót bệnh nhân AFib nào (hàng dưới bên trái = 0). Với sàng lọc y tế, bỏ sót người bệnh là lỗi đắt nhất nên Recall 100% là con số đáng giá nhất. Còn 2 ca 'Normal bị báo nhầm' — slide sau có một cú twist thú vị về họ.</a:t>
             </a:r>
             <a:endParaRPr lang="en-US" dirty="0"/>
           </a:p>
@@ -959,7 +960,7 @@
           <a:p>
             <a:r>
               <a:rPr lang="en-US" dirty="0"/>
-              <a:t>Đây là bài thi khó hơn cả LOSO: không chỉ người lạ mà cả máy lạ, bệnh viện lạ. AUC đọc thế này: xác suất mô hình xếp một người bệnh cao điểm hơn một người khỏe — 0.5 là đoán mò, 1.0 là hoàn hảo, 0.98 là mức rất mạnh. Giữ 0.976-0.987 hai chiều là bằng chứng tổng quát hóa thuyết phục nhất trong toàn bộ báo cáo.</a:t>
+              <a:t>Biểu đồ trái: xác suất AFib trung bình của từng người — đỏ là AFib thật, xanh là Normal. Hai cột xanh vượt ngưỡng 0.5 chính là 2 ca 'nhầm'. Nhờ MIMIC có ECG ghi song song, ta soi được đáp án chuẩn: ca 012 hóa ra nhãn sai chứ không phải mô hình sai; ca 014 là tín hiệu hỏng — và chính ca này khai sinh tính năng SQI đang chạy trong sản phẩm. Bài học: đừng vội tin cả nhãn dataset lẫn mô hình — hãy tìm nguồn sự thật thứ ba.</a:t>
             </a:r>
             <a:endParaRPr lang="en-US" dirty="0"/>
           </a:p>
@@ -1047,7 +1048,7 @@
           <a:p>
             <a:r>
               <a:rPr lang="en-US" dirty="0"/>
-              <a:t>Thứ tự 3 tầng có logic: tầng 1 chứng minh phương pháp sạch, tầng 2 chứng minh học được bệnh thật, tầng 3 mới dám dùng hết dữ liệu cho model cuối. Chi tiết sample weight: không cân bằng thì AFDB 'đè' MIMIC 7:1, mô hình sẽ thiên về đặc điểm ECG. Model cuối là 1 file .pkl duy nhất gồm cả scaler — backend chỉ cần joblib.load rồi predict_proba.</a:t>
+              <a:t>Đây là bài thi khó hơn cả LOSO: không chỉ người lạ mà cả máy lạ, bệnh viện lạ. AUC đọc thế này: xác suất mô hình xếp một người bệnh cao điểm hơn một người khỏe — 0.5 là đoán mò, 1.0 là hoàn hảo, 0.98 là mức rất mạnh. Giữ 0.976-0.987 hai chiều là bằng chứng tổng quát hóa thuyết phục nhất trong toàn bộ báo cáo.</a:t>
             </a:r>
             <a:endParaRPr lang="en-US" dirty="0"/>
           </a:p>
@@ -1135,7 +1136,7 @@
           <a:p>
             <a:r>
               <a:rPr lang="en-US" dirty="0"/>
-              <a:t>Bước này ít dự án sinh viên nào làm: kiểm chứng chính công cụ đo của mình bằng nguồn sự thật độc lập. Kết quả cũng tái xác nhận một hiện tượng có trong y văn (Schafer &amp; Vagedes 2013): biến thiên nhịp đo từ PPG luôn 'phồng' hơn từ ECG — nhưng không sao với bài phân loại, vì mô hình học trên chính hệ quy chiếu PPG, phồng đều cả hai lớp.</a:t>
+              <a:t>Thứ tự 3 tầng có logic: tầng 1 chứng minh phương pháp sạch, tầng 2 chứng minh học được bệnh thật, tầng 3 mới dám dùng hết dữ liệu cho model cuối. Chi tiết sample weight: không cân bằng thì AFDB 'đè' MIMIC 7:1, mô hình sẽ thiên về đặc điểm ECG. Model cuối là 1 file .pkl duy nhất gồm cả scaler — backend chỉ cần joblib.load rồi predict_proba.</a:t>
             </a:r>
             <a:endParaRPr lang="en-US" dirty="0"/>
           </a:p>
@@ -1223,7 +1224,7 @@
           <a:p>
             <a:r>
               <a:rPr lang="en-US" dirty="0"/>
-              <a:t>Nghiên cứu chỉ có giá trị khi sống được trong sản phẩm. Ba mảnh ghép: SQI sinh ra từ đúng ca non_af_014 ở slide 13; parity test là hợp đồng giữa lab và production; và chuỗi realtime đưa kết quả tới bác sĩ trong ~1 giây. Model đang chạy thật trên server — đây không phải slide 'tương lai'.</a:t>
+              <a:t>Bước này ít dự án sinh viên nào làm: kiểm chứng chính công cụ đo của mình bằng nguồn sự thật độc lập. Kết quả cũng tái xác nhận một hiện tượng có trong y văn (Schafer &amp; Vagedes 2013): biến thiên nhịp đo từ PPG luôn 'phồng' hơn từ ECG — nhưng không sao với bài phân loại, vì mô hình học trên chính hệ quy chiếu PPG, phồng đều cả hai lớp.</a:t>
             </a:r>
             <a:endParaRPr lang="en-US" dirty="0"/>
           </a:p>
@@ -1311,7 +1312,7 @@
           <a:p>
             <a:r>
               <a:rPr lang="en-US" dirty="0"/>
-              <a:t>Kết lại bằng 5 bài học — cái nào cũng dùng lại được cho mọi dự án ML y sinh sau này. Và kết thúc bằng giới hạn: nói thẳng điều mình CHƯA làm được cũng là một phần của khoa học tử tế. Tài liệu sâu hơn: docs/index.html của repo ML có sơ đồ tương tác + giải thích thuật ngữ; notebooks/BaoCao_HealthSense_ML_v4.ipynb chạy được toàn bộ số liệu trong slide này.</a:t>
+              <a:t>Nghiên cứu chỉ có giá trị khi sống được trong sản phẩm. Ba mảnh ghép: SQI sinh ra từ đúng ca non_af_014 ở slide 13; parity test là hợp đồng giữa lab và production; và chuỗi realtime đưa kết quả tới bác sĩ trong ~1 giây. Model đang chạy thật trên server — đây không phải slide 'tương lai'.</a:t>
             </a:r>
             <a:endParaRPr lang="en-US" dirty="0"/>
           </a:p>
@@ -1335,6 +1336,94 @@
             <a:fld id="{F7021451-1387-4CA6-816F-3879F97B5CBC}" type="slidenum">
               <a:rPr lang="en-US"/>
               <a:t>18</a:t>
+            </a:fld>
+            <a:endParaRPr lang="en-US"/>
+          </a:p>
+        </p:txBody>
+      </p:sp>
+    </p:spTree>
+    <p:extLst>
+      <p:ext uri="{BB962C8B-B14F-4D97-AF65-F5344CB8AC3E}">
+        <p14:creationId xmlns:p14="http://schemas.microsoft.com/office/powerpoint/2010/main" val="1024086991"/>
+      </p:ext>
+    </p:extLst>
+  </p:cSld>
+  <p:clrMapOvr>
+    <a:masterClrMapping/>
+  </p:clrMapOvr>
+</p:notes>
+</file>
+
+<file path=ppt/notesSlides/notesSlide19.xml><?xml version="1.0" encoding="utf-8"?>
+<p:notes xmlns:a="http://schemas.openxmlformats.org/drawingml/2006/main" xmlns:r="http://schemas.openxmlformats.org/officeDocument/2006/relationships" xmlns:p="http://schemas.openxmlformats.org/presentationml/2006/main">
+  <p:cSld>
+    <p:spTree>
+      <p:nvGrpSpPr>
+        <p:cNvPr id="1" name=""/>
+        <p:cNvGrpSpPr/>
+        <p:nvPr/>
+      </p:nvGrpSpPr>
+      <p:grpSpPr>
+        <a:xfrm>
+          <a:off x="0" y="0"/>
+          <a:ext cx="0" cy="0"/>
+          <a:chOff x="0" y="0"/>
+          <a:chExt cx="0" cy="0"/>
+        </a:xfrm>
+      </p:grpSpPr>
+      <p:sp>
+        <p:nvSpPr>
+          <p:cNvPr id="2" name="Slide Image Placeholder 1"/>
+          <p:cNvSpPr>
+            <a:spLocks noGrp="1" noRot="1" noChangeAspect="1"/>
+          </p:cNvSpPr>
+          <p:nvPr>
+            <p:ph type="sldImg"/>
+          </p:nvPr>
+        </p:nvSpPr>
+        <p:spPr/>
+      </p:sp>
+      <p:sp>
+        <p:nvSpPr>
+          <p:cNvPr id="3" name="Notes Placeholder 2"/>
+          <p:cNvSpPr>
+            <a:spLocks noGrp="1"/>
+          </p:cNvSpPr>
+          <p:nvPr>
+            <p:ph type="body" idx="1"/>
+          </p:nvPr>
+        </p:nvSpPr>
+        <p:spPr/>
+        <p:txBody>
+          <a:bodyPr/>
+          <a:lstStyle/>
+          <a:p>
+            <a:r>
+              <a:rPr lang="en-US" dirty="0"/>
+              <a:t>Kết lại bằng 5 bài học — cái nào cũng dùng lại được cho mọi dự án ML y sinh sau này. Và kết thúc bằng giới hạn: nói thẳng điều mình CHƯA làm được cũng là một phần của khoa học tử tế. Tài liệu sâu hơn: docs/index.html của repo ML có sơ đồ tương tác + giải thích thuật ngữ; notebooks/BaoCao_HealthSense_ML_v4.ipynb chạy được toàn bộ số liệu trong slide này.</a:t>
+            </a:r>
+            <a:endParaRPr lang="en-US" dirty="0"/>
+          </a:p>
+        </p:txBody>
+      </p:sp>
+      <p:sp>
+        <p:nvSpPr>
+          <p:cNvPr id="4" name="Slide Number Placeholder 3"/>
+          <p:cNvSpPr>
+            <a:spLocks noGrp="1"/>
+          </p:cNvSpPr>
+          <p:nvPr>
+            <p:ph type="sldNum" sz="quarter" idx="10"/>
+          </p:nvPr>
+        </p:nvSpPr>
+        <p:spPr/>
+        <p:txBody>
+          <a:bodyPr/>
+          <a:lstStyle/>
+          <a:p>
+            <a:fld id="{F7021451-1387-4CA6-816F-3879F97B5CBC}" type="slidenum">
+              <a:rPr lang="en-US"/>
+              <a:t>19</a:t>
             </a:fld>
             <a:endParaRPr lang="en-US"/>
           </a:p>
@@ -1927,7 +2016,7 @@
           <a:p>
             <a:r>
               <a:rPr lang="en-US" dirty="0"/>
-              <a:t>Ba 'trường phái' đo cùng một thứ theo ba cách. Điểm đáng khoe về sự trung thực khoa học: chuẩn Task Force 1996 nói LF cần bản ghi 2 phút — cửa sổ của ta 30 giây, nên ta LOẠI nhóm LF khỏi mô hình dù có tính ra được. Thà ít đặc trưng mà sạch còn hơn nhiều mà nhiễu. Mô hình cuối dùng 13/16.</a:t>
+              <a:t>Slide nhịp cầu, trả lời 2 câu hay bị hỏi. Câu 1: chuỗi NN đưa vào đâu? — Không đút thẳng vào mô hình được vì mỗi cửa sổ số nhịp khác nhau, mà XGBoost/RF cần bảng có số cột cố định. Giải pháp giống cách làm HỌC BẠ: cả trăm bài kiểm tra (chuỗi NN) được tóm thành vài con số cố định — điểm trung bình (HR_mean), độ đều (SDNN)... Câu 2: dựa vào đâu ra 16? — Theo chuẩn Task Force 1996 của Hiệp hội Tim mạch châu Âu + Bắc Mỹ, không phải tự chế. Chọn theo chuẩn có 3 cái lợi: có ý nghĩa sinh lý, bác sĩ tin được, và so sánh được với các paper khác. Bảng bên phải là dữ liệu THẬT: 2 hàng đầu của người thường và 1 hàng của bệnh nhân AF — nhìn cột RMSSD là thấy ngay 34.9 vs 295.2.</a:t>
             </a:r>
             <a:endParaRPr lang="en-US" dirty="0"/>
           </a:p>
@@ -2015,7 +2104,7 @@
           <a:p>
             <a:r>
               <a:rPr lang="en-US" dirty="0"/>
-              <a:t>Đồ thị đắt giá nhất để 'nhìn thấy' AFib — và hiện đã có trong app: bác sĩ mở hồ sơ là thấy đám chấm này của từng phép đo. Cách đọc cho người mới: chỉ cần nhớ CHỤM = khỏe, TẢN = nghi ngờ.</a:t>
+              <a:t>Ba 'trường phái' đo cùng một thứ theo ba cách. Điểm đáng khoe về sự trung thực khoa học: chuẩn Task Force 1996 nói LF cần bản ghi 2 phút — cửa sổ của ta 30 giây, nên ta LOẠI nhóm LF khỏi mô hình dù có tính ra được. Thà ít đặc trưng mà sạch còn hơn nhiều mà nhiễu. Mô hình cuối dùng 13/16.</a:t>
             </a:r>
             <a:endParaRPr lang="en-US" dirty="0"/>
           </a:p>
@@ -2560,6 +2649,132 @@
 <file path=ppt/slides/slide10.xml><?xml version="1.0" encoding="utf-8"?>
 <p:sld xmlns:a="http://schemas.openxmlformats.org/drawingml/2006/main" xmlns:r="http://schemas.openxmlformats.org/officeDocument/2006/relationships" xmlns:p="http://schemas.openxmlformats.org/presentationml/2006/main">
   <p:cSld name="Slide 10">
+    <p:spTree>
+      <p:nvGrpSpPr>
+        <p:cNvPr id="1" name=""/>
+        <p:cNvGrpSpPr/>
+        <p:nvPr/>
+      </p:nvGrpSpPr>
+      <p:grpSpPr>
+        <a:xfrm>
+          <a:off x="0" y="0"/>
+          <a:ext cx="0" cy="0"/>
+          <a:chOff x="0" y="0"/>
+          <a:chExt cx="0" cy="0"/>
+        </a:xfrm>
+      </p:grpSpPr>
+      <p:sp>
+        <p:nvSpPr>
+          <p:cNvPr id="2" name="Text 0"/>
+          <p:cNvSpPr txBox="1"/>
+          <p:nvPr/>
+        </p:nvSpPr>
+        <p:spPr>
+          <a:xfrm>
+            <a:off x="502920" y="292608"/>
+            <a:ext cx="11183112" cy="685800"/>
+          </a:xfrm>
+          <a:prstGeom prst="rect">
+            <a:avLst/>
+          </a:prstGeom>
+          <a:noFill/>
+          <a:ln/>
+        </p:spPr>
+        <p:txBody>
+          <a:bodyPr wrap="square" lIns="0" tIns="0" rIns="0" bIns="0" rtlCol="0" anchor="ctr"/>
+          <a:lstStyle/>
+          <a:p>
+            <a:pPr indent="0" marL="0">
+              <a:buNone/>
+            </a:pPr>
+            <a:r>
+              <a:rPr lang="en-US" sz="3000" b="1" dirty="0">
+                <a:solidFill>
+                  <a:srgbClr val="2F3C7E"/>
+                </a:solidFill>
+                <a:latin typeface="Cambria" pitchFamily="34" charset="0"/>
+                <a:ea typeface="Cambria" pitchFamily="34" charset="-122"/>
+                <a:cs typeface="Cambria" pitchFamily="34" charset="-120"/>
+              </a:rPr>
+              <a:t>Poincaré — 'chụp X-quang' cho nhịp tim</a:t>
+            </a:r>
+            <a:endParaRPr lang="en-US" sz="3000" dirty="0"/>
+          </a:p>
+        </p:txBody>
+      </p:sp>
+      <p:pic>
+        <p:nvPicPr>
+          <p:cNvPr id="3" name="Image 0" descr="C:/Users/Admin/AppData/Local/Temp/claude/D--Projects-HealthSense/f9ec15a3-f454-4ee6-860d-29e10e4b7747/scratchpad/slides_figs/poincare_compare.png">    </p:cNvPr>
+          <p:cNvPicPr>
+            <a:picLocks noChangeAspect="1"/>
+          </p:cNvPicPr>
+          <p:nvPr/>
+        </p:nvPicPr>
+        <p:blipFill>
+          <a:blip r:embed="rId1"/>
+          <a:srcRect l="0" r="0" t="0" b="0"/>
+          <a:stretch/>
+        </p:blipFill>
+        <p:spPr>
+          <a:xfrm>
+            <a:off x="1280160" y="1143000"/>
+            <a:ext cx="9628632" cy="4297680"/>
+          </a:xfrm>
+          <a:prstGeom prst="rect">
+            <a:avLst/>
+          </a:prstGeom>
+        </p:spPr>
+      </p:pic>
+      <p:sp>
+        <p:nvSpPr>
+          <p:cNvPr id="4" name="Text 1"/>
+          <p:cNvSpPr txBox="1"/>
+          <p:nvPr/>
+        </p:nvSpPr>
+        <p:spPr>
+          <a:xfrm>
+            <a:off x="731520" y="5577840"/>
+            <a:ext cx="10725912" cy="777240"/>
+          </a:xfrm>
+          <a:prstGeom prst="rect">
+            <a:avLst/>
+          </a:prstGeom>
+          <a:noFill/>
+          <a:ln/>
+        </p:spPr>
+        <p:txBody>
+          <a:bodyPr wrap="square" lIns="0" tIns="0" rIns="0" bIns="0" rtlCol="0" anchor="ctr"/>
+          <a:lstStyle/>
+          <a:p>
+            <a:pPr indent="0" marL="0">
+              <a:buNone/>
+            </a:pPr>
+            <a:r>
+              <a:rPr lang="en-US" sz="1400" dirty="0">
+                <a:solidFill>
+                  <a:srgbClr val="333333"/>
+                </a:solidFill>
+                <a:latin typeface="Calibri" pitchFamily="34" charset="0"/>
+                <a:ea typeface="Calibri" pitchFamily="34" charset="-122"/>
+                <a:cs typeface="Calibri" pitchFamily="34" charset="-120"/>
+              </a:rPr>
+              <a:t>Mỗi chấm = một cặp nhịp liên tiếp (nhịp n, nhịp n+1). Nhịp đều → chấm nào cũng gần chấm nào → chụm. Nhịp loạn → cặp nào cũng khác cặp nào → tản. SD1/SD2 chính là bề ngang/bề dài của đám chấm này.</a:t>
+            </a:r>
+            <a:endParaRPr lang="en-US" sz="1400" dirty="0"/>
+          </a:p>
+        </p:txBody>
+      </p:sp>
+    </p:spTree>
+  </p:cSld>
+  <p:clrMapOvr>
+    <a:masterClrMapping/>
+  </p:clrMapOvr>
+</p:sld>
+</file>
+
+<file path=ppt/slides/slide11.xml><?xml version="1.0" encoding="utf-8"?>
+<p:sld xmlns:a="http://schemas.openxmlformats.org/drawingml/2006/main" xmlns:r="http://schemas.openxmlformats.org/officeDocument/2006/relationships" xmlns:p="http://schemas.openxmlformats.org/presentationml/2006/main">
+  <p:cSld name="Slide 11">
     <p:bg>
       <p:bgPr>
         <a:solidFill>
@@ -2993,778 +3208,6 @@
               <a:t>Kiểm tra nhanh mọi dự án y sinh: dữ liệu có cột 'mã bệnh nhân' không, và có chia theo nó không?</a:t>
             </a:r>
             <a:endParaRPr lang="en-US" sz="1500" dirty="0"/>
-          </a:p>
-        </p:txBody>
-      </p:sp>
-    </p:spTree>
-  </p:cSld>
-  <p:clrMapOvr>
-    <a:masterClrMapping/>
-  </p:clrMapOvr>
-</p:sld>
-</file>
-
-<file path=ppt/slides/slide11.xml><?xml version="1.0" encoding="utf-8"?>
-<p:sld xmlns:a="http://schemas.openxmlformats.org/drawingml/2006/main" xmlns:r="http://schemas.openxmlformats.org/officeDocument/2006/relationships" xmlns:p="http://schemas.openxmlformats.org/presentationml/2006/main">
-  <p:cSld name="Slide 11">
-    <p:spTree>
-      <p:nvGrpSpPr>
-        <p:cNvPr id="1" name=""/>
-        <p:cNvGrpSpPr/>
-        <p:nvPr/>
-      </p:nvGrpSpPr>
-      <p:grpSpPr>
-        <a:xfrm>
-          <a:off x="0" y="0"/>
-          <a:ext cx="0" cy="0"/>
-          <a:chOff x="0" y="0"/>
-          <a:chExt cx="0" cy="0"/>
-        </a:xfrm>
-      </p:grpSpPr>
-      <p:sp>
-        <p:nvSpPr>
-          <p:cNvPr id="2" name="Text 0"/>
-          <p:cNvSpPr txBox="1"/>
-          <p:nvPr/>
-        </p:nvSpPr>
-        <p:spPr>
-          <a:xfrm>
-            <a:off x="502920" y="292608"/>
-            <a:ext cx="11183112" cy="685800"/>
-          </a:xfrm>
-          <a:prstGeom prst="rect">
-            <a:avLst/>
-          </a:prstGeom>
-          <a:noFill/>
-          <a:ln/>
-        </p:spPr>
-        <p:txBody>
-          <a:bodyPr wrap="square" lIns="0" tIns="0" rIns="0" bIns="0" rtlCol="0" anchor="ctr"/>
-          <a:lstStyle/>
-          <a:p>
-            <a:pPr indent="0" marL="0">
-              <a:buNone/>
-            </a:pPr>
-            <a:r>
-              <a:rPr lang="en-US" sz="3000" b="1" dirty="0">
-                <a:solidFill>
-                  <a:srgbClr val="2F3C7E"/>
-                </a:solidFill>
-                <a:latin typeface="Cambria" pitchFamily="34" charset="0"/>
-                <a:ea typeface="Cambria" pitchFamily="34" charset="-122"/>
-                <a:cs typeface="Cambria" pitchFamily="34" charset="-120"/>
-              </a:rPr>
-              <a:t>Thuốc giải: LOSO — giấu trọn một người làm đề thi</a:t>
-            </a:r>
-            <a:endParaRPr lang="en-US" sz="3000" dirty="0"/>
-          </a:p>
-        </p:txBody>
-      </p:sp>
-      <p:sp>
-        <p:nvSpPr>
-          <p:cNvPr id="3" name="Text 1"/>
-          <p:cNvSpPr txBox="1"/>
-          <p:nvPr/>
-        </p:nvSpPr>
-        <p:spPr>
-          <a:xfrm>
-            <a:off x="640080" y="1280160"/>
-            <a:ext cx="6675120" cy="4114800"/>
-          </a:xfrm>
-          <a:prstGeom prst="rect">
-            <a:avLst/>
-          </a:prstGeom>
-          <a:noFill/>
-          <a:ln/>
-        </p:spPr>
-        <p:txBody>
-          <a:bodyPr wrap="square" lIns="0" tIns="0" rIns="0" bIns="0" rtlCol="0" anchor="t"/>
-          <a:lstStyle/>
-          <a:p>
-            <a:pPr marL="342900" indent="-342900">
-              <a:spcAft>
-                <a:spcPts val="800"/>
-              </a:spcAft>
-              <a:buSzPct val="100000"/>
-              <a:buChar char="•"/>
-            </a:pPr>
-            <a:r>
-              <a:rPr lang="en-US" sz="1500" dirty="0">
-                <a:solidFill>
-                  <a:srgbClr val="333333"/>
-                </a:solidFill>
-                <a:latin typeface="Calibri" pitchFamily="34" charset="0"/>
-                <a:ea typeface="Calibri" pitchFamily="34" charset="-122"/>
-                <a:cs typeface="Calibri" pitchFamily="34" charset="-120"/>
-              </a:rPr>
-              <a:t>Leave-One-Subject-Out: có 35 bệnh nhân → thi 35 vòng, mỗi vòng GIẤU TRỌN 1 người làm đề, học trên 34 người còn lại</a:t>
-            </a:r>
-            <a:endParaRPr lang="en-US" sz="1500" dirty="0"/>
-          </a:p>
-          <a:p>
-            <a:pPr marL="342900" indent="-342900">
-              <a:spcAft>
-                <a:spcPts val="800"/>
-              </a:spcAft>
-              <a:buSzPct val="100000"/>
-              <a:buChar char="•"/>
-            </a:pPr>
-            <a:r>
-              <a:rPr lang="en-US" sz="1500" dirty="0">
-                <a:solidFill>
-                  <a:srgbClr val="333333"/>
-                </a:solidFill>
-                <a:latin typeface="Calibri" pitchFamily="34" charset="0"/>
-                <a:ea typeface="Calibri" pitchFamily="34" charset="-122"/>
-                <a:cs typeface="Calibri" pitchFamily="34" charset="-120"/>
-              </a:rPr>
-              <a:t>Điểm số trả lời đúng câu hỏi thực tế: 'gặp NGƯỜI MỚI, mô hình có nhận ra AFib không?'</a:t>
-            </a:r>
-            <a:endParaRPr lang="en-US" sz="1500" dirty="0"/>
-          </a:p>
-          <a:p>
-            <a:pPr marL="342900" indent="-342900">
-              <a:spcAft>
-                <a:spcPts val="800"/>
-              </a:spcAft>
-              <a:buSzPct val="100000"/>
-              <a:buChar char="•"/>
-            </a:pPr>
-            <a:r>
-              <a:rPr lang="en-US" sz="1500" dirty="0">
-                <a:solidFill>
-                  <a:srgbClr val="333333"/>
-                </a:solidFill>
-                <a:latin typeface="Calibri" pitchFamily="34" charset="0"/>
-                <a:ea typeface="Calibri" pitchFamily="34" charset="-122"/>
-                <a:cs typeface="Calibri" pitchFamily="34" charset="-120"/>
-              </a:rPr>
-              <a:t>Chống lỗi 2: Scaler + lọc outlier chỉ được 'học' từ 34 người train của từng vòng</a:t>
-            </a:r>
-            <a:endParaRPr lang="en-US" sz="1500" dirty="0"/>
-          </a:p>
-          <a:p>
-            <a:pPr marL="342900" indent="-342900">
-              <a:spcAft>
-                <a:spcPts val="800"/>
-              </a:spcAft>
-              <a:buSzPct val="100000"/>
-              <a:buChar char="•"/>
-            </a:pPr>
-            <a:r>
-              <a:rPr lang="en-US" sz="1500" dirty="0">
-                <a:solidFill>
-                  <a:srgbClr val="333333"/>
-                </a:solidFill>
-                <a:latin typeface="Calibri" pitchFamily="34" charset="0"/>
-                <a:ea typeface="Calibri" pitchFamily="34" charset="-122"/>
-                <a:cs typeface="Calibri" pitchFamily="34" charset="-120"/>
-              </a:rPr>
-              <a:t>Chọn hyperparameter cũng chỉ trên train (nested GroupKFold) — đề thi không được đụng vào, kể cả gián tiếp</a:t>
-            </a:r>
-            <a:endParaRPr lang="en-US" sz="1500" dirty="0"/>
-          </a:p>
-        </p:txBody>
-      </p:sp>
-      <p:sp>
-        <p:nvSpPr>
-          <p:cNvPr id="4" name="Text 2"/>
-          <p:cNvSpPr txBox="1"/>
-          <p:nvPr/>
-        </p:nvSpPr>
-        <p:spPr>
-          <a:xfrm>
-            <a:off x="7635240" y="1463040"/>
-            <a:ext cx="3657600" cy="365760"/>
-          </a:xfrm>
-          <a:prstGeom prst="rect">
-            <a:avLst/>
-          </a:prstGeom>
-          <a:noFill/>
-          <a:ln/>
-        </p:spPr>
-        <p:txBody>
-          <a:bodyPr wrap="square" lIns="0" tIns="0" rIns="0" bIns="0" rtlCol="0" anchor="ctr"/>
-          <a:lstStyle/>
-          <a:p>
-            <a:pPr indent="0" marL="0">
-              <a:buNone/>
-            </a:pPr>
-            <a:r>
-              <a:rPr lang="en-US" sz="1400" b="1" dirty="0">
-                <a:solidFill>
-                  <a:srgbClr val="2F3C7E"/>
-                </a:solidFill>
-                <a:latin typeface="Calibri" pitchFamily="34" charset="0"/>
-                <a:ea typeface="Calibri" pitchFamily="34" charset="-122"/>
-                <a:cs typeface="Calibri" pitchFamily="34" charset="-120"/>
-              </a:rPr>
-              <a:t>Vòng thi thứ k:</a:t>
-            </a:r>
-            <a:endParaRPr lang="en-US" sz="1400" dirty="0"/>
-          </a:p>
-        </p:txBody>
-      </p:sp>
-      <p:sp>
-        <p:nvSpPr>
-          <p:cNvPr id="5" name="Shape 3"/>
-          <p:cNvSpPr/>
-          <p:nvPr/>
-        </p:nvSpPr>
-        <p:spPr>
-          <a:xfrm>
-            <a:off x="7635240" y="1920240"/>
-            <a:ext cx="841248" cy="841248"/>
-          </a:xfrm>
-          <a:prstGeom prst="roundRect">
-            <a:avLst>
-              <a:gd name="adj" fmla="val 8696"/>
-            </a:avLst>
-          </a:prstGeom>
-          <a:solidFill>
-            <a:srgbClr val="2F3C7E"/>
-          </a:solidFill>
-          <a:ln/>
-        </p:spPr>
-      </p:sp>
-      <p:sp>
-        <p:nvSpPr>
-          <p:cNvPr id="6" name="Text 4"/>
-          <p:cNvSpPr txBox="1"/>
-          <p:nvPr/>
-        </p:nvSpPr>
-        <p:spPr>
-          <a:xfrm>
-            <a:off x="7635240" y="1920240"/>
-            <a:ext cx="841248" cy="841248"/>
-          </a:xfrm>
-          <a:prstGeom prst="rect">
-            <a:avLst/>
-          </a:prstGeom>
-          <a:noFill/>
-          <a:ln/>
-        </p:spPr>
-        <p:txBody>
-          <a:bodyPr wrap="square" lIns="0" tIns="0" rIns="0" bIns="0" rtlCol="0" anchor="ctr"/>
-          <a:lstStyle/>
-          <a:p>
-            <a:pPr algn="ctr" indent="0" marL="0">
-              <a:buNone/>
-            </a:pPr>
-            <a:r>
-              <a:rPr lang="en-US" sz="1100" b="1" dirty="0">
-                <a:solidFill>
-                  <a:srgbClr val="FFFFFF"/>
-                </a:solidFill>
-                <a:latin typeface="Arial" pitchFamily="34" charset="0"/>
-                <a:ea typeface="Arial" pitchFamily="34" charset="-122"/>
-                <a:cs typeface="Arial" pitchFamily="34" charset="-120"/>
-              </a:rPr>
-              <a:t>BN1</a:t>
-            </a:r>
-            <a:endParaRPr lang="en-US" sz="1100" dirty="0"/>
-          </a:p>
-        </p:txBody>
-      </p:sp>
-      <p:sp>
-        <p:nvSpPr>
-          <p:cNvPr id="7" name="Shape 5"/>
-          <p:cNvSpPr/>
-          <p:nvPr/>
-        </p:nvSpPr>
-        <p:spPr>
-          <a:xfrm>
-            <a:off x="8604504" y="1920240"/>
-            <a:ext cx="841248" cy="841248"/>
-          </a:xfrm>
-          <a:prstGeom prst="roundRect">
-            <a:avLst>
-              <a:gd name="adj" fmla="val 8696"/>
-            </a:avLst>
-          </a:prstGeom>
-          <a:solidFill>
-            <a:srgbClr val="2F3C7E"/>
-          </a:solidFill>
-          <a:ln/>
-        </p:spPr>
-      </p:sp>
-      <p:sp>
-        <p:nvSpPr>
-          <p:cNvPr id="8" name="Text 6"/>
-          <p:cNvSpPr txBox="1"/>
-          <p:nvPr/>
-        </p:nvSpPr>
-        <p:spPr>
-          <a:xfrm>
-            <a:off x="8604504" y="1920240"/>
-            <a:ext cx="841248" cy="841248"/>
-          </a:xfrm>
-          <a:prstGeom prst="rect">
-            <a:avLst/>
-          </a:prstGeom>
-          <a:noFill/>
-          <a:ln/>
-        </p:spPr>
-        <p:txBody>
-          <a:bodyPr wrap="square" lIns="0" tIns="0" rIns="0" bIns="0" rtlCol="0" anchor="ctr"/>
-          <a:lstStyle/>
-          <a:p>
-            <a:pPr algn="ctr" indent="0" marL="0">
-              <a:buNone/>
-            </a:pPr>
-            <a:r>
-              <a:rPr lang="en-US" sz="1100" b="1" dirty="0">
-                <a:solidFill>
-                  <a:srgbClr val="FFFFFF"/>
-                </a:solidFill>
-                <a:latin typeface="Arial" pitchFamily="34" charset="0"/>
-                <a:ea typeface="Arial" pitchFamily="34" charset="-122"/>
-                <a:cs typeface="Arial" pitchFamily="34" charset="-120"/>
-              </a:rPr>
-              <a:t>BN2</a:t>
-            </a:r>
-            <a:endParaRPr lang="en-US" sz="1100" dirty="0"/>
-          </a:p>
-        </p:txBody>
-      </p:sp>
-      <p:sp>
-        <p:nvSpPr>
-          <p:cNvPr id="9" name="Shape 7"/>
-          <p:cNvSpPr/>
-          <p:nvPr/>
-        </p:nvSpPr>
-        <p:spPr>
-          <a:xfrm>
-            <a:off x="9573768" y="1920240"/>
-            <a:ext cx="841248" cy="841248"/>
-          </a:xfrm>
-          <a:prstGeom prst="roundRect">
-            <a:avLst>
-              <a:gd name="adj" fmla="val 8696"/>
-            </a:avLst>
-          </a:prstGeom>
-          <a:solidFill>
-            <a:srgbClr val="2F3C7E"/>
-          </a:solidFill>
-          <a:ln/>
-        </p:spPr>
-      </p:sp>
-      <p:sp>
-        <p:nvSpPr>
-          <p:cNvPr id="10" name="Text 8"/>
-          <p:cNvSpPr txBox="1"/>
-          <p:nvPr/>
-        </p:nvSpPr>
-        <p:spPr>
-          <a:xfrm>
-            <a:off x="9573768" y="1920240"/>
-            <a:ext cx="841248" cy="841248"/>
-          </a:xfrm>
-          <a:prstGeom prst="rect">
-            <a:avLst/>
-          </a:prstGeom>
-          <a:noFill/>
-          <a:ln/>
-        </p:spPr>
-        <p:txBody>
-          <a:bodyPr wrap="square" lIns="0" tIns="0" rIns="0" bIns="0" rtlCol="0" anchor="ctr"/>
-          <a:lstStyle/>
-          <a:p>
-            <a:pPr algn="ctr" indent="0" marL="0">
-              <a:buNone/>
-            </a:pPr>
-            <a:r>
-              <a:rPr lang="en-US" sz="1100" b="1" dirty="0">
-                <a:solidFill>
-                  <a:srgbClr val="FFFFFF"/>
-                </a:solidFill>
-                <a:latin typeface="Arial" pitchFamily="34" charset="0"/>
-                <a:ea typeface="Arial" pitchFamily="34" charset="-122"/>
-                <a:cs typeface="Arial" pitchFamily="34" charset="-120"/>
-              </a:rPr>
-              <a:t>BN3</a:t>
-            </a:r>
-            <a:endParaRPr lang="en-US" sz="1100" dirty="0"/>
-          </a:p>
-        </p:txBody>
-      </p:sp>
-      <p:sp>
-        <p:nvSpPr>
-          <p:cNvPr id="11" name="Shape 9"/>
-          <p:cNvSpPr/>
-          <p:nvPr/>
-        </p:nvSpPr>
-        <p:spPr>
-          <a:xfrm>
-            <a:off x="10543032" y="1920240"/>
-            <a:ext cx="841248" cy="841248"/>
-          </a:xfrm>
-          <a:prstGeom prst="roundRect">
-            <a:avLst>
-              <a:gd name="adj" fmla="val 8696"/>
-            </a:avLst>
-          </a:prstGeom>
-          <a:solidFill>
-            <a:srgbClr val="2F3C7E"/>
-          </a:solidFill>
-          <a:ln/>
-        </p:spPr>
-      </p:sp>
-      <p:sp>
-        <p:nvSpPr>
-          <p:cNvPr id="12" name="Text 10"/>
-          <p:cNvSpPr txBox="1"/>
-          <p:nvPr/>
-        </p:nvSpPr>
-        <p:spPr>
-          <a:xfrm>
-            <a:off x="10543032" y="1920240"/>
-            <a:ext cx="841248" cy="841248"/>
-          </a:xfrm>
-          <a:prstGeom prst="rect">
-            <a:avLst/>
-          </a:prstGeom>
-          <a:noFill/>
-          <a:ln/>
-        </p:spPr>
-        <p:txBody>
-          <a:bodyPr wrap="square" lIns="0" tIns="0" rIns="0" bIns="0" rtlCol="0" anchor="ctr"/>
-          <a:lstStyle/>
-          <a:p>
-            <a:pPr algn="ctr" indent="0" marL="0">
-              <a:buNone/>
-            </a:pPr>
-            <a:r>
-              <a:rPr lang="en-US" sz="1100" b="1" dirty="0">
-                <a:solidFill>
-                  <a:srgbClr val="FFFFFF"/>
-                </a:solidFill>
-                <a:latin typeface="Arial" pitchFamily="34" charset="0"/>
-                <a:ea typeface="Arial" pitchFamily="34" charset="-122"/>
-                <a:cs typeface="Arial" pitchFamily="34" charset="-120"/>
-              </a:rPr>
-              <a:t>BN4</a:t>
-            </a:r>
-            <a:endParaRPr lang="en-US" sz="1100" dirty="0"/>
-          </a:p>
-        </p:txBody>
-      </p:sp>
-      <p:sp>
-        <p:nvSpPr>
-          <p:cNvPr id="13" name="Shape 11"/>
-          <p:cNvSpPr/>
-          <p:nvPr/>
-        </p:nvSpPr>
-        <p:spPr>
-          <a:xfrm>
-            <a:off x="7635240" y="2889504"/>
-            <a:ext cx="841248" cy="841248"/>
-          </a:xfrm>
-          <a:prstGeom prst="roundRect">
-            <a:avLst>
-              <a:gd name="adj" fmla="val 8696"/>
-            </a:avLst>
-          </a:prstGeom>
-          <a:solidFill>
-            <a:srgbClr val="990011"/>
-          </a:solidFill>
-          <a:ln/>
-        </p:spPr>
-      </p:sp>
-      <p:sp>
-        <p:nvSpPr>
-          <p:cNvPr id="14" name="Text 12"/>
-          <p:cNvSpPr txBox="1"/>
-          <p:nvPr/>
-        </p:nvSpPr>
-        <p:spPr>
-          <a:xfrm>
-            <a:off x="7635240" y="2889504"/>
-            <a:ext cx="841248" cy="841248"/>
-          </a:xfrm>
-          <a:prstGeom prst="rect">
-            <a:avLst/>
-          </a:prstGeom>
-          <a:noFill/>
-          <a:ln/>
-        </p:spPr>
-        <p:txBody>
-          <a:bodyPr wrap="square" lIns="0" tIns="0" rIns="0" bIns="0" rtlCol="0" anchor="ctr"/>
-          <a:lstStyle/>
-          <a:p>
-            <a:pPr algn="ctr" indent="0" marL="0">
-              <a:buNone/>
-            </a:pPr>
-            <a:r>
-              <a:rPr lang="en-US" sz="1100" b="1" dirty="0">
-                <a:solidFill>
-                  <a:srgbClr val="FFFFFF"/>
-                </a:solidFill>
-                <a:latin typeface="Arial" pitchFamily="34" charset="0"/>
-                <a:ea typeface="Arial" pitchFamily="34" charset="-122"/>
-                <a:cs typeface="Arial" pitchFamily="34" charset="-120"/>
-              </a:rPr>
-              <a:t>THI</a:t>
-            </a:r>
-            <a:endParaRPr lang="en-US" sz="1100" dirty="0"/>
-          </a:p>
-        </p:txBody>
-      </p:sp>
-      <p:sp>
-        <p:nvSpPr>
-          <p:cNvPr id="15" name="Shape 13"/>
-          <p:cNvSpPr/>
-          <p:nvPr/>
-        </p:nvSpPr>
-        <p:spPr>
-          <a:xfrm>
-            <a:off x="8604504" y="2889504"/>
-            <a:ext cx="841248" cy="841248"/>
-          </a:xfrm>
-          <a:prstGeom prst="roundRect">
-            <a:avLst>
-              <a:gd name="adj" fmla="val 8696"/>
-            </a:avLst>
-          </a:prstGeom>
-          <a:solidFill>
-            <a:srgbClr val="2F3C7E"/>
-          </a:solidFill>
-          <a:ln/>
-        </p:spPr>
-      </p:sp>
-      <p:sp>
-        <p:nvSpPr>
-          <p:cNvPr id="16" name="Text 14"/>
-          <p:cNvSpPr txBox="1"/>
-          <p:nvPr/>
-        </p:nvSpPr>
-        <p:spPr>
-          <a:xfrm>
-            <a:off x="8604504" y="2889504"/>
-            <a:ext cx="841248" cy="841248"/>
-          </a:xfrm>
-          <a:prstGeom prst="rect">
-            <a:avLst/>
-          </a:prstGeom>
-          <a:noFill/>
-          <a:ln/>
-        </p:spPr>
-        <p:txBody>
-          <a:bodyPr wrap="square" lIns="0" tIns="0" rIns="0" bIns="0" rtlCol="0" anchor="ctr"/>
-          <a:lstStyle/>
-          <a:p>
-            <a:pPr algn="ctr" indent="0" marL="0">
-              <a:buNone/>
-            </a:pPr>
-            <a:r>
-              <a:rPr lang="en-US" sz="1100" b="1" dirty="0">
-                <a:solidFill>
-                  <a:srgbClr val="FFFFFF"/>
-                </a:solidFill>
-                <a:latin typeface="Arial" pitchFamily="34" charset="0"/>
-                <a:ea typeface="Arial" pitchFamily="34" charset="-122"/>
-                <a:cs typeface="Arial" pitchFamily="34" charset="-120"/>
-              </a:rPr>
-              <a:t>BN6</a:t>
-            </a:r>
-            <a:endParaRPr lang="en-US" sz="1100" dirty="0"/>
-          </a:p>
-        </p:txBody>
-      </p:sp>
-      <p:sp>
-        <p:nvSpPr>
-          <p:cNvPr id="17" name="Shape 15"/>
-          <p:cNvSpPr/>
-          <p:nvPr/>
-        </p:nvSpPr>
-        <p:spPr>
-          <a:xfrm>
-            <a:off x="9573768" y="2889504"/>
-            <a:ext cx="841248" cy="841248"/>
-          </a:xfrm>
-          <a:prstGeom prst="roundRect">
-            <a:avLst>
-              <a:gd name="adj" fmla="val 8696"/>
-            </a:avLst>
-          </a:prstGeom>
-          <a:solidFill>
-            <a:srgbClr val="2F3C7E"/>
-          </a:solidFill>
-          <a:ln/>
-        </p:spPr>
-      </p:sp>
-      <p:sp>
-        <p:nvSpPr>
-          <p:cNvPr id="18" name="Text 16"/>
-          <p:cNvSpPr txBox="1"/>
-          <p:nvPr/>
-        </p:nvSpPr>
-        <p:spPr>
-          <a:xfrm>
-            <a:off x="9573768" y="2889504"/>
-            <a:ext cx="841248" cy="841248"/>
-          </a:xfrm>
-          <a:prstGeom prst="rect">
-            <a:avLst/>
-          </a:prstGeom>
-          <a:noFill/>
-          <a:ln/>
-        </p:spPr>
-        <p:txBody>
-          <a:bodyPr wrap="square" lIns="0" tIns="0" rIns="0" bIns="0" rtlCol="0" anchor="ctr"/>
-          <a:lstStyle/>
-          <a:p>
-            <a:pPr algn="ctr" indent="0" marL="0">
-              <a:buNone/>
-            </a:pPr>
-            <a:r>
-              <a:rPr lang="en-US" sz="1100" b="1" dirty="0">
-                <a:solidFill>
-                  <a:srgbClr val="FFFFFF"/>
-                </a:solidFill>
-                <a:latin typeface="Arial" pitchFamily="34" charset="0"/>
-                <a:ea typeface="Arial" pitchFamily="34" charset="-122"/>
-                <a:cs typeface="Arial" pitchFamily="34" charset="-120"/>
-              </a:rPr>
-              <a:t>BN7</a:t>
-            </a:r>
-            <a:endParaRPr lang="en-US" sz="1100" dirty="0"/>
-          </a:p>
-        </p:txBody>
-      </p:sp>
-      <p:sp>
-        <p:nvSpPr>
-          <p:cNvPr id="19" name="Text 17"/>
-          <p:cNvSpPr txBox="1"/>
-          <p:nvPr/>
-        </p:nvSpPr>
-        <p:spPr>
-          <a:xfrm>
-            <a:off x="7635240" y="3977640"/>
-            <a:ext cx="4023360" cy="731520"/>
-          </a:xfrm>
-          <a:prstGeom prst="rect">
-            <a:avLst/>
-          </a:prstGeom>
-          <a:noFill/>
-          <a:ln/>
-        </p:spPr>
-        <p:txBody>
-          <a:bodyPr wrap="square" lIns="0" tIns="0" rIns="0" bIns="0" rtlCol="0" anchor="ctr"/>
-          <a:lstStyle/>
-          <a:p>
-            <a:pPr indent="0" marL="0">
-              <a:buNone/>
-            </a:pPr>
-            <a:r>
-              <a:rPr lang="en-US" sz="1250" i="1" dirty="0">
-                <a:solidFill>
-                  <a:srgbClr val="64748B"/>
-                </a:solidFill>
-                <a:latin typeface="Calibri" pitchFamily="34" charset="0"/>
-                <a:ea typeface="Calibri" pitchFamily="34" charset="-122"/>
-                <a:cs typeface="Calibri" pitchFamily="34" charset="-120"/>
-              </a:rPr>
-              <a:t>... lặp 35 lần, mỗi người</a:t>
-            </a:r>
-            <a:endParaRPr lang="en-US" sz="1250" dirty="0"/>
-          </a:p>
-          <a:p>
-            <a:pPr indent="0" marL="0">
-              <a:buNone/>
-            </a:pPr>
-            <a:r>
-              <a:rPr lang="en-US" sz="1250" i="1" dirty="0">
-                <a:solidFill>
-                  <a:srgbClr val="64748B"/>
-                </a:solidFill>
-                <a:latin typeface="Calibri" pitchFamily="34" charset="0"/>
-                <a:ea typeface="Calibri" pitchFamily="34" charset="-122"/>
-                <a:cs typeface="Calibri" pitchFamily="34" charset="-120"/>
-              </a:rPr>
-              <a:t>được làm 'đề thi' đúng 1 lần</a:t>
-            </a:r>
-            <a:endParaRPr lang="en-US" sz="1250" dirty="0"/>
-          </a:p>
-        </p:txBody>
-      </p:sp>
-      <p:sp>
-        <p:nvSpPr>
-          <p:cNvPr id="20" name="Shape 18"/>
-          <p:cNvSpPr/>
-          <p:nvPr/>
-        </p:nvSpPr>
-        <p:spPr>
-          <a:xfrm>
-            <a:off x="640080" y="5394960"/>
-            <a:ext cx="10908792" cy="914400"/>
-          </a:xfrm>
-          <a:prstGeom prst="roundRect">
-            <a:avLst>
-              <a:gd name="adj" fmla="val 12000"/>
-            </a:avLst>
-          </a:prstGeom>
-          <a:solidFill>
-            <a:srgbClr val="FCF6F5"/>
-          </a:solidFill>
-          <a:ln w="15875">
-            <a:solidFill>
-              <a:srgbClr val="1B7A43"/>
-            </a:solidFill>
-            <a:prstDash val="solid"/>
-          </a:ln>
-        </p:spPr>
-      </p:sp>
-      <p:sp>
-        <p:nvSpPr>
-          <p:cNvPr id="21" name="Text 19"/>
-          <p:cNvSpPr txBox="1"/>
-          <p:nvPr/>
-        </p:nvSpPr>
-        <p:spPr>
-          <a:xfrm>
-            <a:off x="914400" y="5486400"/>
-            <a:ext cx="10360152" cy="731520"/>
-          </a:xfrm>
-          <a:prstGeom prst="rect">
-            <a:avLst/>
-          </a:prstGeom>
-          <a:noFill/>
-          <a:ln/>
-        </p:spPr>
-        <p:txBody>
-          <a:bodyPr wrap="square" lIns="0" tIns="0" rIns="0" bIns="0" rtlCol="0" anchor="ctr"/>
-          <a:lstStyle/>
-          <a:p>
-            <a:pPr indent="0" marL="0">
-              <a:buNone/>
-            </a:pPr>
-            <a:r>
-              <a:rPr lang="en-US" sz="1400" b="1" dirty="0">
-                <a:solidFill>
-                  <a:srgbClr val="1B7A43"/>
-                </a:solidFill>
-                <a:latin typeface="Calibri" pitchFamily="34" charset="0"/>
-                <a:ea typeface="Calibri" pitchFamily="34" charset="-122"/>
-                <a:cs typeface="Calibri" pitchFamily="34" charset="-120"/>
-              </a:rPr>
-              <a:t>Đánh đổi trung thực: </a:t>
-            </a:r>
-            <a:pPr indent="0" marL="0">
-              <a:buNone/>
-            </a:pPr>
-            <a:r>
-              <a:rPr lang="en-US" sz="1400" dirty="0">
-                <a:solidFill>
-                  <a:srgbClr val="333333"/>
-                </a:solidFill>
-                <a:latin typeface="Calibri" pitchFamily="34" charset="0"/>
-                <a:ea typeface="Calibri" pitchFamily="34" charset="-122"/>
-                <a:cs typeface="Calibri" pitchFamily="34" charset="-120"/>
-              </a:rPr>
-              <a:t>điểm 'tụt' từ 99% ảo xuống 94% thật — nhưng 94% này bảo vệ được trước hội đồng, còn 99% kia thì không.</a:t>
-            </a:r>
-            <a:endParaRPr lang="en-US" sz="1400" dirty="0"/>
           </a:p>
         </p:txBody>
       </p:sp>
@@ -3826,45 +3269,22 @@
                 <a:ea typeface="Cambria" pitchFamily="34" charset="-122"/>
                 <a:cs typeface="Cambria" pitchFamily="34" charset="-120"/>
               </a:rPr>
-              <a:t>Tầng kiểm định 1 — LOSO trên MIMIC</a:t>
+              <a:t>Thuốc giải: LOSO — giấu trọn một người làm đề thi</a:t>
             </a:r>
             <a:endParaRPr lang="en-US" sz="3000" dirty="0"/>
           </a:p>
         </p:txBody>
       </p:sp>
-      <p:pic>
-        <p:nvPicPr>
-          <p:cNvPr id="3" name="Image 0" descr="D:/Projects/HealthSense/HealthSense-MachineLearning-Lab/models/benchmark_v4/confusion_matrices_subject.png">    </p:cNvPr>
-          <p:cNvPicPr>
-            <a:picLocks noChangeAspect="1"/>
-          </p:cNvPicPr>
-          <p:nvPr/>
-        </p:nvPicPr>
-        <p:blipFill>
-          <a:blip r:embed="rId1"/>
-          <a:srcRect l="0" r="0" t="0" b="0"/>
-          <a:stretch/>
-        </p:blipFill>
-        <p:spPr>
-          <a:xfrm>
-            <a:off x="502920" y="1234440"/>
-            <a:ext cx="7589520" cy="4114800"/>
-          </a:xfrm>
-          <a:prstGeom prst="rect">
-            <a:avLst/>
-          </a:prstGeom>
-        </p:spPr>
-      </p:pic>
-      <p:sp>
-        <p:nvSpPr>
-          <p:cNvPr id="4" name="Text 1"/>
+      <p:sp>
+        <p:nvSpPr>
+          <p:cNvPr id="3" name="Text 1"/>
           <p:cNvSpPr txBox="1"/>
           <p:nvPr/>
         </p:nvSpPr>
         <p:spPr>
           <a:xfrm>
-            <a:off x="8321040" y="1554480"/>
-            <a:ext cx="3383280" cy="822960"/>
+            <a:off x="640080" y="1280160"/>
+            <a:ext cx="6675120" cy="4114800"/>
           </a:xfrm>
           <a:prstGeom prst="rect">
             <a:avLst/>
@@ -3873,37 +3293,226 @@
           <a:ln/>
         </p:spPr>
         <p:txBody>
+          <a:bodyPr wrap="square" lIns="0" tIns="0" rIns="0" bIns="0" rtlCol="0" anchor="t"/>
+          <a:lstStyle/>
+          <a:p>
+            <a:pPr marL="342900" indent="-342900">
+              <a:spcAft>
+                <a:spcPts val="800"/>
+              </a:spcAft>
+              <a:buSzPct val="100000"/>
+              <a:buChar char="•"/>
+            </a:pPr>
+            <a:r>
+              <a:rPr lang="en-US" sz="1500" dirty="0">
+                <a:solidFill>
+                  <a:srgbClr val="333333"/>
+                </a:solidFill>
+                <a:latin typeface="Calibri" pitchFamily="34" charset="0"/>
+                <a:ea typeface="Calibri" pitchFamily="34" charset="-122"/>
+                <a:cs typeface="Calibri" pitchFamily="34" charset="-120"/>
+              </a:rPr>
+              <a:t>Leave-One-Subject-Out: có 35 bệnh nhân → thi 35 vòng, mỗi vòng GIẤU TRỌN 1 người làm đề, học trên 34 người còn lại</a:t>
+            </a:r>
+            <a:endParaRPr lang="en-US" sz="1500" dirty="0"/>
+          </a:p>
+          <a:p>
+            <a:pPr marL="342900" indent="-342900">
+              <a:spcAft>
+                <a:spcPts val="800"/>
+              </a:spcAft>
+              <a:buSzPct val="100000"/>
+              <a:buChar char="•"/>
+            </a:pPr>
+            <a:r>
+              <a:rPr lang="en-US" sz="1500" dirty="0">
+                <a:solidFill>
+                  <a:srgbClr val="333333"/>
+                </a:solidFill>
+                <a:latin typeface="Calibri" pitchFamily="34" charset="0"/>
+                <a:ea typeface="Calibri" pitchFamily="34" charset="-122"/>
+                <a:cs typeface="Calibri" pitchFamily="34" charset="-120"/>
+              </a:rPr>
+              <a:t>Điểm số trả lời đúng câu hỏi thực tế: 'gặp NGƯỜI MỚI, mô hình có nhận ra AFib không?'</a:t>
+            </a:r>
+            <a:endParaRPr lang="en-US" sz="1500" dirty="0"/>
+          </a:p>
+          <a:p>
+            <a:pPr marL="342900" indent="-342900">
+              <a:spcAft>
+                <a:spcPts val="800"/>
+              </a:spcAft>
+              <a:buSzPct val="100000"/>
+              <a:buChar char="•"/>
+            </a:pPr>
+            <a:r>
+              <a:rPr lang="en-US" sz="1500" dirty="0">
+                <a:solidFill>
+                  <a:srgbClr val="333333"/>
+                </a:solidFill>
+                <a:latin typeface="Calibri" pitchFamily="34" charset="0"/>
+                <a:ea typeface="Calibri" pitchFamily="34" charset="-122"/>
+                <a:cs typeface="Calibri" pitchFamily="34" charset="-120"/>
+              </a:rPr>
+              <a:t>Chống lỗi 2: Scaler + lọc outlier chỉ được 'học' từ 34 người train của từng vòng</a:t>
+            </a:r>
+            <a:endParaRPr lang="en-US" sz="1500" dirty="0"/>
+          </a:p>
+          <a:p>
+            <a:pPr marL="342900" indent="-342900">
+              <a:spcAft>
+                <a:spcPts val="800"/>
+              </a:spcAft>
+              <a:buSzPct val="100000"/>
+              <a:buChar char="•"/>
+            </a:pPr>
+            <a:r>
+              <a:rPr lang="en-US" sz="1500" dirty="0">
+                <a:solidFill>
+                  <a:srgbClr val="333333"/>
+                </a:solidFill>
+                <a:latin typeface="Calibri" pitchFamily="34" charset="0"/>
+                <a:ea typeface="Calibri" pitchFamily="34" charset="-122"/>
+                <a:cs typeface="Calibri" pitchFamily="34" charset="-120"/>
+              </a:rPr>
+              <a:t>Chọn hyperparameter cũng chỉ trên train (nested GroupKFold) — đề thi không được đụng vào, kể cả gián tiếp</a:t>
+            </a:r>
+            <a:endParaRPr lang="en-US" sz="1500" dirty="0"/>
+          </a:p>
+        </p:txBody>
+      </p:sp>
+      <p:sp>
+        <p:nvSpPr>
+          <p:cNvPr id="4" name="Text 2"/>
+          <p:cNvSpPr txBox="1"/>
+          <p:nvPr/>
+        </p:nvSpPr>
+        <p:spPr>
+          <a:xfrm>
+            <a:off x="7635240" y="1463040"/>
+            <a:ext cx="3657600" cy="365760"/>
+          </a:xfrm>
+          <a:prstGeom prst="rect">
+            <a:avLst/>
+          </a:prstGeom>
+          <a:noFill/>
+          <a:ln/>
+        </p:spPr>
+        <p:txBody>
           <a:bodyPr wrap="square" lIns="0" tIns="0" rIns="0" bIns="0" rtlCol="0" anchor="ctr"/>
           <a:lstStyle/>
           <a:p>
+            <a:pPr indent="0" marL="0">
+              <a:buNone/>
+            </a:pPr>
+            <a:r>
+              <a:rPr lang="en-US" sz="1400" b="1" dirty="0">
+                <a:solidFill>
+                  <a:srgbClr val="2F3C7E"/>
+                </a:solidFill>
+                <a:latin typeface="Calibri" pitchFamily="34" charset="0"/>
+                <a:ea typeface="Calibri" pitchFamily="34" charset="-122"/>
+                <a:cs typeface="Calibri" pitchFamily="34" charset="-120"/>
+              </a:rPr>
+              <a:t>Vòng thi thứ k:</a:t>
+            </a:r>
+            <a:endParaRPr lang="en-US" sz="1400" dirty="0"/>
+          </a:p>
+        </p:txBody>
+      </p:sp>
+      <p:sp>
+        <p:nvSpPr>
+          <p:cNvPr id="5" name="Shape 3"/>
+          <p:cNvSpPr/>
+          <p:nvPr/>
+        </p:nvSpPr>
+        <p:spPr>
+          <a:xfrm>
+            <a:off x="7635240" y="1920240"/>
+            <a:ext cx="841248" cy="841248"/>
+          </a:xfrm>
+          <a:prstGeom prst="roundRect">
+            <a:avLst>
+              <a:gd name="adj" fmla="val 8696"/>
+            </a:avLst>
+          </a:prstGeom>
+          <a:solidFill>
+            <a:srgbClr val="2F3C7E"/>
+          </a:solidFill>
+          <a:ln/>
+        </p:spPr>
+      </p:sp>
+      <p:sp>
+        <p:nvSpPr>
+          <p:cNvPr id="6" name="Text 4"/>
+          <p:cNvSpPr txBox="1"/>
+          <p:nvPr/>
+        </p:nvSpPr>
+        <p:spPr>
+          <a:xfrm>
+            <a:off x="7635240" y="1920240"/>
+            <a:ext cx="841248" cy="841248"/>
+          </a:xfrm>
+          <a:prstGeom prst="rect">
+            <a:avLst/>
+          </a:prstGeom>
+          <a:noFill/>
+          <a:ln/>
+        </p:spPr>
+        <p:txBody>
+          <a:bodyPr wrap="square" lIns="0" tIns="0" rIns="0" bIns="0" rtlCol="0" anchor="ctr"/>
+          <a:lstStyle/>
+          <a:p>
             <a:pPr algn="ctr" indent="0" marL="0">
               <a:buNone/>
             </a:pPr>
             <a:r>
-              <a:rPr lang="en-US" sz="4400" b="1" dirty="0">
-                <a:solidFill>
-                  <a:srgbClr val="1B7A43"/>
+              <a:rPr lang="en-US" sz="1100" b="1" dirty="0">
+                <a:solidFill>
+                  <a:srgbClr val="FFFFFF"/>
                 </a:solidFill>
                 <a:latin typeface="Arial" pitchFamily="34" charset="0"/>
                 <a:ea typeface="Arial" pitchFamily="34" charset="-122"/>
                 <a:cs typeface="Arial" pitchFamily="34" charset="-120"/>
               </a:rPr>
-              <a:t>100%</a:t>
-            </a:r>
-            <a:endParaRPr lang="en-US" sz="4400" dirty="0"/>
-          </a:p>
-        </p:txBody>
-      </p:sp>
-      <p:sp>
-        <p:nvSpPr>
-          <p:cNvPr id="5" name="Text 2"/>
+              <a:t>BN1</a:t>
+            </a:r>
+            <a:endParaRPr lang="en-US" sz="1100" dirty="0"/>
+          </a:p>
+        </p:txBody>
+      </p:sp>
+      <p:sp>
+        <p:nvSpPr>
+          <p:cNvPr id="7" name="Shape 5"/>
+          <p:cNvSpPr/>
+          <p:nvPr/>
+        </p:nvSpPr>
+        <p:spPr>
+          <a:xfrm>
+            <a:off x="8604504" y="1920240"/>
+            <a:ext cx="841248" cy="841248"/>
+          </a:xfrm>
+          <a:prstGeom prst="roundRect">
+            <a:avLst>
+              <a:gd name="adj" fmla="val 8696"/>
+            </a:avLst>
+          </a:prstGeom>
+          <a:solidFill>
+            <a:srgbClr val="2F3C7E"/>
+          </a:solidFill>
+          <a:ln/>
+        </p:spPr>
+      </p:sp>
+      <p:sp>
+        <p:nvSpPr>
+          <p:cNvPr id="8" name="Text 6"/>
           <p:cNvSpPr txBox="1"/>
           <p:nvPr/>
         </p:nvSpPr>
         <p:spPr>
           <a:xfrm>
-            <a:off x="8321040" y="2395728"/>
-            <a:ext cx="3383280" cy="640080"/>
+            <a:off x="8604504" y="1920240"/>
+            <a:ext cx="841248" cy="841248"/>
           </a:xfrm>
           <a:prstGeom prst="rect">
             <a:avLst/>
@@ -3919,7 +3528,351 @@
               <a:buNone/>
             </a:pPr>
             <a:r>
-              <a:rPr lang="en-US" sz="1300" dirty="0">
+              <a:rPr lang="en-US" sz="1100" b="1" dirty="0">
+                <a:solidFill>
+                  <a:srgbClr val="FFFFFF"/>
+                </a:solidFill>
+                <a:latin typeface="Arial" pitchFamily="34" charset="0"/>
+                <a:ea typeface="Arial" pitchFamily="34" charset="-122"/>
+                <a:cs typeface="Arial" pitchFamily="34" charset="-120"/>
+              </a:rPr>
+              <a:t>BN2</a:t>
+            </a:r>
+            <a:endParaRPr lang="en-US" sz="1100" dirty="0"/>
+          </a:p>
+        </p:txBody>
+      </p:sp>
+      <p:sp>
+        <p:nvSpPr>
+          <p:cNvPr id="9" name="Shape 7"/>
+          <p:cNvSpPr/>
+          <p:nvPr/>
+        </p:nvSpPr>
+        <p:spPr>
+          <a:xfrm>
+            <a:off x="9573768" y="1920240"/>
+            <a:ext cx="841248" cy="841248"/>
+          </a:xfrm>
+          <a:prstGeom prst="roundRect">
+            <a:avLst>
+              <a:gd name="adj" fmla="val 8696"/>
+            </a:avLst>
+          </a:prstGeom>
+          <a:solidFill>
+            <a:srgbClr val="2F3C7E"/>
+          </a:solidFill>
+          <a:ln/>
+        </p:spPr>
+      </p:sp>
+      <p:sp>
+        <p:nvSpPr>
+          <p:cNvPr id="10" name="Text 8"/>
+          <p:cNvSpPr txBox="1"/>
+          <p:nvPr/>
+        </p:nvSpPr>
+        <p:spPr>
+          <a:xfrm>
+            <a:off x="9573768" y="1920240"/>
+            <a:ext cx="841248" cy="841248"/>
+          </a:xfrm>
+          <a:prstGeom prst="rect">
+            <a:avLst/>
+          </a:prstGeom>
+          <a:noFill/>
+          <a:ln/>
+        </p:spPr>
+        <p:txBody>
+          <a:bodyPr wrap="square" lIns="0" tIns="0" rIns="0" bIns="0" rtlCol="0" anchor="ctr"/>
+          <a:lstStyle/>
+          <a:p>
+            <a:pPr algn="ctr" indent="0" marL="0">
+              <a:buNone/>
+            </a:pPr>
+            <a:r>
+              <a:rPr lang="en-US" sz="1100" b="1" dirty="0">
+                <a:solidFill>
+                  <a:srgbClr val="FFFFFF"/>
+                </a:solidFill>
+                <a:latin typeface="Arial" pitchFamily="34" charset="0"/>
+                <a:ea typeface="Arial" pitchFamily="34" charset="-122"/>
+                <a:cs typeface="Arial" pitchFamily="34" charset="-120"/>
+              </a:rPr>
+              <a:t>BN3</a:t>
+            </a:r>
+            <a:endParaRPr lang="en-US" sz="1100" dirty="0"/>
+          </a:p>
+        </p:txBody>
+      </p:sp>
+      <p:sp>
+        <p:nvSpPr>
+          <p:cNvPr id="11" name="Shape 9"/>
+          <p:cNvSpPr/>
+          <p:nvPr/>
+        </p:nvSpPr>
+        <p:spPr>
+          <a:xfrm>
+            <a:off x="10543032" y="1920240"/>
+            <a:ext cx="841248" cy="841248"/>
+          </a:xfrm>
+          <a:prstGeom prst="roundRect">
+            <a:avLst>
+              <a:gd name="adj" fmla="val 8696"/>
+            </a:avLst>
+          </a:prstGeom>
+          <a:solidFill>
+            <a:srgbClr val="2F3C7E"/>
+          </a:solidFill>
+          <a:ln/>
+        </p:spPr>
+      </p:sp>
+      <p:sp>
+        <p:nvSpPr>
+          <p:cNvPr id="12" name="Text 10"/>
+          <p:cNvSpPr txBox="1"/>
+          <p:nvPr/>
+        </p:nvSpPr>
+        <p:spPr>
+          <a:xfrm>
+            <a:off x="10543032" y="1920240"/>
+            <a:ext cx="841248" cy="841248"/>
+          </a:xfrm>
+          <a:prstGeom prst="rect">
+            <a:avLst/>
+          </a:prstGeom>
+          <a:noFill/>
+          <a:ln/>
+        </p:spPr>
+        <p:txBody>
+          <a:bodyPr wrap="square" lIns="0" tIns="0" rIns="0" bIns="0" rtlCol="0" anchor="ctr"/>
+          <a:lstStyle/>
+          <a:p>
+            <a:pPr algn="ctr" indent="0" marL="0">
+              <a:buNone/>
+            </a:pPr>
+            <a:r>
+              <a:rPr lang="en-US" sz="1100" b="1" dirty="0">
+                <a:solidFill>
+                  <a:srgbClr val="FFFFFF"/>
+                </a:solidFill>
+                <a:latin typeface="Arial" pitchFamily="34" charset="0"/>
+                <a:ea typeface="Arial" pitchFamily="34" charset="-122"/>
+                <a:cs typeface="Arial" pitchFamily="34" charset="-120"/>
+              </a:rPr>
+              <a:t>BN4</a:t>
+            </a:r>
+            <a:endParaRPr lang="en-US" sz="1100" dirty="0"/>
+          </a:p>
+        </p:txBody>
+      </p:sp>
+      <p:sp>
+        <p:nvSpPr>
+          <p:cNvPr id="13" name="Shape 11"/>
+          <p:cNvSpPr/>
+          <p:nvPr/>
+        </p:nvSpPr>
+        <p:spPr>
+          <a:xfrm>
+            <a:off x="7635240" y="2889504"/>
+            <a:ext cx="841248" cy="841248"/>
+          </a:xfrm>
+          <a:prstGeom prst="roundRect">
+            <a:avLst>
+              <a:gd name="adj" fmla="val 8696"/>
+            </a:avLst>
+          </a:prstGeom>
+          <a:solidFill>
+            <a:srgbClr val="990011"/>
+          </a:solidFill>
+          <a:ln/>
+        </p:spPr>
+      </p:sp>
+      <p:sp>
+        <p:nvSpPr>
+          <p:cNvPr id="14" name="Text 12"/>
+          <p:cNvSpPr txBox="1"/>
+          <p:nvPr/>
+        </p:nvSpPr>
+        <p:spPr>
+          <a:xfrm>
+            <a:off x="7635240" y="2889504"/>
+            <a:ext cx="841248" cy="841248"/>
+          </a:xfrm>
+          <a:prstGeom prst="rect">
+            <a:avLst/>
+          </a:prstGeom>
+          <a:noFill/>
+          <a:ln/>
+        </p:spPr>
+        <p:txBody>
+          <a:bodyPr wrap="square" lIns="0" tIns="0" rIns="0" bIns="0" rtlCol="0" anchor="ctr"/>
+          <a:lstStyle/>
+          <a:p>
+            <a:pPr algn="ctr" indent="0" marL="0">
+              <a:buNone/>
+            </a:pPr>
+            <a:r>
+              <a:rPr lang="en-US" sz="1100" b="1" dirty="0">
+                <a:solidFill>
+                  <a:srgbClr val="FFFFFF"/>
+                </a:solidFill>
+                <a:latin typeface="Arial" pitchFamily="34" charset="0"/>
+                <a:ea typeface="Arial" pitchFamily="34" charset="-122"/>
+                <a:cs typeface="Arial" pitchFamily="34" charset="-120"/>
+              </a:rPr>
+              <a:t>THI</a:t>
+            </a:r>
+            <a:endParaRPr lang="en-US" sz="1100" dirty="0"/>
+          </a:p>
+        </p:txBody>
+      </p:sp>
+      <p:sp>
+        <p:nvSpPr>
+          <p:cNvPr id="15" name="Shape 13"/>
+          <p:cNvSpPr/>
+          <p:nvPr/>
+        </p:nvSpPr>
+        <p:spPr>
+          <a:xfrm>
+            <a:off x="8604504" y="2889504"/>
+            <a:ext cx="841248" cy="841248"/>
+          </a:xfrm>
+          <a:prstGeom prst="roundRect">
+            <a:avLst>
+              <a:gd name="adj" fmla="val 8696"/>
+            </a:avLst>
+          </a:prstGeom>
+          <a:solidFill>
+            <a:srgbClr val="2F3C7E"/>
+          </a:solidFill>
+          <a:ln/>
+        </p:spPr>
+      </p:sp>
+      <p:sp>
+        <p:nvSpPr>
+          <p:cNvPr id="16" name="Text 14"/>
+          <p:cNvSpPr txBox="1"/>
+          <p:nvPr/>
+        </p:nvSpPr>
+        <p:spPr>
+          <a:xfrm>
+            <a:off x="8604504" y="2889504"/>
+            <a:ext cx="841248" cy="841248"/>
+          </a:xfrm>
+          <a:prstGeom prst="rect">
+            <a:avLst/>
+          </a:prstGeom>
+          <a:noFill/>
+          <a:ln/>
+        </p:spPr>
+        <p:txBody>
+          <a:bodyPr wrap="square" lIns="0" tIns="0" rIns="0" bIns="0" rtlCol="0" anchor="ctr"/>
+          <a:lstStyle/>
+          <a:p>
+            <a:pPr algn="ctr" indent="0" marL="0">
+              <a:buNone/>
+            </a:pPr>
+            <a:r>
+              <a:rPr lang="en-US" sz="1100" b="1" dirty="0">
+                <a:solidFill>
+                  <a:srgbClr val="FFFFFF"/>
+                </a:solidFill>
+                <a:latin typeface="Arial" pitchFamily="34" charset="0"/>
+                <a:ea typeface="Arial" pitchFamily="34" charset="-122"/>
+                <a:cs typeface="Arial" pitchFamily="34" charset="-120"/>
+              </a:rPr>
+              <a:t>BN6</a:t>
+            </a:r>
+            <a:endParaRPr lang="en-US" sz="1100" dirty="0"/>
+          </a:p>
+        </p:txBody>
+      </p:sp>
+      <p:sp>
+        <p:nvSpPr>
+          <p:cNvPr id="17" name="Shape 15"/>
+          <p:cNvSpPr/>
+          <p:nvPr/>
+        </p:nvSpPr>
+        <p:spPr>
+          <a:xfrm>
+            <a:off x="9573768" y="2889504"/>
+            <a:ext cx="841248" cy="841248"/>
+          </a:xfrm>
+          <a:prstGeom prst="roundRect">
+            <a:avLst>
+              <a:gd name="adj" fmla="val 8696"/>
+            </a:avLst>
+          </a:prstGeom>
+          <a:solidFill>
+            <a:srgbClr val="2F3C7E"/>
+          </a:solidFill>
+          <a:ln/>
+        </p:spPr>
+      </p:sp>
+      <p:sp>
+        <p:nvSpPr>
+          <p:cNvPr id="18" name="Text 16"/>
+          <p:cNvSpPr txBox="1"/>
+          <p:nvPr/>
+        </p:nvSpPr>
+        <p:spPr>
+          <a:xfrm>
+            <a:off x="9573768" y="2889504"/>
+            <a:ext cx="841248" cy="841248"/>
+          </a:xfrm>
+          <a:prstGeom prst="rect">
+            <a:avLst/>
+          </a:prstGeom>
+          <a:noFill/>
+          <a:ln/>
+        </p:spPr>
+        <p:txBody>
+          <a:bodyPr wrap="square" lIns="0" tIns="0" rIns="0" bIns="0" rtlCol="0" anchor="ctr"/>
+          <a:lstStyle/>
+          <a:p>
+            <a:pPr algn="ctr" indent="0" marL="0">
+              <a:buNone/>
+            </a:pPr>
+            <a:r>
+              <a:rPr lang="en-US" sz="1100" b="1" dirty="0">
+                <a:solidFill>
+                  <a:srgbClr val="FFFFFF"/>
+                </a:solidFill>
+                <a:latin typeface="Arial" pitchFamily="34" charset="0"/>
+                <a:ea typeface="Arial" pitchFamily="34" charset="-122"/>
+                <a:cs typeface="Arial" pitchFamily="34" charset="-120"/>
+              </a:rPr>
+              <a:t>BN7</a:t>
+            </a:r>
+            <a:endParaRPr lang="en-US" sz="1100" dirty="0"/>
+          </a:p>
+        </p:txBody>
+      </p:sp>
+      <p:sp>
+        <p:nvSpPr>
+          <p:cNvPr id="19" name="Text 17"/>
+          <p:cNvSpPr txBox="1"/>
+          <p:nvPr/>
+        </p:nvSpPr>
+        <p:spPr>
+          <a:xfrm>
+            <a:off x="7635240" y="3977640"/>
+            <a:ext cx="4023360" cy="731520"/>
+          </a:xfrm>
+          <a:prstGeom prst="rect">
+            <a:avLst/>
+          </a:prstGeom>
+          <a:noFill/>
+          <a:ln/>
+        </p:spPr>
+        <p:txBody>
+          <a:bodyPr wrap="square" lIns="0" tIns="0" rIns="0" bIns="0" rtlCol="0" anchor="ctr"/>
+          <a:lstStyle/>
+          <a:p>
+            <a:pPr indent="0" marL="0">
+              <a:buNone/>
+            </a:pPr>
+            <a:r>
+              <a:rPr lang="en-US" sz="1250" i="1" dirty="0">
                 <a:solidFill>
                   <a:srgbClr val="64748B"/>
                 </a:solidFill>
@@ -3927,77 +3880,16 @@
                 <a:ea typeface="Calibri" pitchFamily="34" charset="-122"/>
                 <a:cs typeface="Calibri" pitchFamily="34" charset="-120"/>
               </a:rPr>
-              <a:t>Recall — bắt đủ CẢ 19 bệnh nhân AFib, không sót ai</a:t>
-            </a:r>
-            <a:endParaRPr lang="en-US" sz="1300" dirty="0"/>
-          </a:p>
-        </p:txBody>
-      </p:sp>
-      <p:sp>
-        <p:nvSpPr>
-          <p:cNvPr id="6" name="Text 3"/>
-          <p:cNvSpPr txBox="1"/>
-          <p:nvPr/>
-        </p:nvSpPr>
-        <p:spPr>
-          <a:xfrm>
-            <a:off x="8321040" y="3200400"/>
-            <a:ext cx="3383280" cy="822960"/>
-          </a:xfrm>
-          <a:prstGeom prst="rect">
-            <a:avLst/>
-          </a:prstGeom>
-          <a:noFill/>
-          <a:ln/>
-        </p:spPr>
-        <p:txBody>
-          <a:bodyPr wrap="square" lIns="0" tIns="0" rIns="0" bIns="0" rtlCol="0" anchor="ctr"/>
-          <a:lstStyle/>
-          <a:p>
-            <a:pPr algn="ctr" indent="0" marL="0">
-              <a:buNone/>
-            </a:pPr>
-            <a:r>
-              <a:rPr lang="en-US" sz="4400" b="1" dirty="0">
-                <a:solidFill>
-                  <a:srgbClr val="2F3C7E"/>
-                </a:solidFill>
-                <a:latin typeface="Arial" pitchFamily="34" charset="0"/>
-                <a:ea typeface="Arial" pitchFamily="34" charset="-122"/>
-                <a:cs typeface="Arial" pitchFamily="34" charset="-120"/>
-              </a:rPr>
-              <a:t>94.3%</a:t>
-            </a:r>
-            <a:endParaRPr lang="en-US" sz="4400" dirty="0"/>
-          </a:p>
-        </p:txBody>
-      </p:sp>
-      <p:sp>
-        <p:nvSpPr>
-          <p:cNvPr id="7" name="Text 4"/>
-          <p:cNvSpPr txBox="1"/>
-          <p:nvPr/>
-        </p:nvSpPr>
-        <p:spPr>
-          <a:xfrm>
-            <a:off x="8321040" y="4041648"/>
-            <a:ext cx="3383280" cy="640080"/>
-          </a:xfrm>
-          <a:prstGeom prst="rect">
-            <a:avLst/>
-          </a:prstGeom>
-          <a:noFill/>
-          <a:ln/>
-        </p:spPr>
-        <p:txBody>
-          <a:bodyPr wrap="square" lIns="0" tIns="0" rIns="0" bIns="0" rtlCol="0" anchor="ctr"/>
-          <a:lstStyle/>
-          <a:p>
-            <a:pPr algn="ctr" indent="0" marL="0">
-              <a:buNone/>
-            </a:pPr>
-            <a:r>
-              <a:rPr lang="en-US" sz="1300" dirty="0">
+              <a:t>... lặp 35 lần, mỗi người</a:t>
+            </a:r>
+            <a:endParaRPr lang="en-US" sz="1250" dirty="0"/>
+          </a:p>
+          <a:p>
+            <a:pPr indent="0" marL="0">
+              <a:buNone/>
+            </a:pPr>
+            <a:r>
+              <a:rPr lang="en-US" sz="1250" i="1" dirty="0">
                 <a:solidFill>
                   <a:srgbClr val="64748B"/>
                 </a:solidFill>
@@ -4005,22 +3897,49 @@
                 <a:ea typeface="Calibri" pitchFamily="34" charset="-122"/>
                 <a:cs typeface="Calibri" pitchFamily="34" charset="-120"/>
               </a:rPr>
-              <a:t>Accuracy mức bệnh nhân (33/35 người đúng)</a:t>
-            </a:r>
-            <a:endParaRPr lang="en-US" sz="1300" dirty="0"/>
-          </a:p>
-        </p:txBody>
-      </p:sp>
-      <p:sp>
-        <p:nvSpPr>
-          <p:cNvPr id="8" name="Text 5"/>
+              <a:t>được làm 'đề thi' đúng 1 lần</a:t>
+            </a:r>
+            <a:endParaRPr lang="en-US" sz="1250" dirty="0"/>
+          </a:p>
+        </p:txBody>
+      </p:sp>
+      <p:sp>
+        <p:nvSpPr>
+          <p:cNvPr id="20" name="Shape 18"/>
+          <p:cNvSpPr/>
+          <p:nvPr/>
+        </p:nvSpPr>
+        <p:spPr>
+          <a:xfrm>
+            <a:off x="640080" y="5394960"/>
+            <a:ext cx="10908792" cy="914400"/>
+          </a:xfrm>
+          <a:prstGeom prst="roundRect">
+            <a:avLst>
+              <a:gd name="adj" fmla="val 12000"/>
+            </a:avLst>
+          </a:prstGeom>
+          <a:solidFill>
+            <a:srgbClr val="FCF6F5"/>
+          </a:solidFill>
+          <a:ln w="15875">
+            <a:solidFill>
+              <a:srgbClr val="1B7A43"/>
+            </a:solidFill>
+            <a:prstDash val="solid"/>
+          </a:ln>
+        </p:spPr>
+      </p:sp>
+      <p:sp>
+        <p:nvSpPr>
+          <p:cNvPr id="21" name="Text 19"/>
           <p:cNvSpPr txBox="1"/>
           <p:nvPr/>
         </p:nvSpPr>
         <p:spPr>
           <a:xfrm>
-            <a:off x="640080" y="5577840"/>
-            <a:ext cx="10908792" cy="731520"/>
+            <a:off x="914400" y="5486400"/>
+            <a:ext cx="10360152" cy="731520"/>
           </a:xfrm>
           <a:prstGeom prst="rect">
             <a:avLst/>
@@ -4036,17 +3955,31 @@
               <a:buNone/>
             </a:pPr>
             <a:r>
-              <a:rPr lang="en-US" sz="1350" dirty="0">
-                <a:solidFill>
-                  <a:srgbClr val="333333"/>
+              <a:rPr lang="en-US" sz="1400" b="1" dirty="0">
+                <a:solidFill>
+                  <a:srgbClr val="1B7A43"/>
                 </a:solidFill>
                 <a:latin typeface="Calibri" pitchFamily="34" charset="0"/>
                 <a:ea typeface="Calibri" pitchFamily="34" charset="-122"/>
                 <a:cs typeface="Calibri" pitchFamily="34" charset="-120"/>
               </a:rPr>
-              <a:t>Metric báo cáo ở MỨC BỆNH NHÂN: gộp ~118 cửa sổ của mỗi người thành 1 kết luận/người — vì câu hỏi thật là 'người này có bệnh không?', không phải 'đoạn 30 giây này thế nào?'</a:t>
-            </a:r>
-            <a:endParaRPr lang="en-US" sz="1350" dirty="0"/>
+              <a:t>Đánh đổi trung thực: </a:t>
+            </a:r>
+            <a:pPr indent="0" marL="0">
+              <a:buNone/>
+            </a:pPr>
+            <a:r>
+              <a:rPr lang="en-US" sz="1400" dirty="0">
+                <a:solidFill>
+                  <a:srgbClr val="333333"/>
+                </a:solidFill>
+                <a:latin typeface="Calibri" pitchFamily="34" charset="0"/>
+                <a:ea typeface="Calibri" pitchFamily="34" charset="-122"/>
+                <a:cs typeface="Calibri" pitchFamily="34" charset="-120"/>
+              </a:rPr>
+              <a:t>điểm 'tụt' từ 99% ảo xuống 94% thật — nhưng 94% này bảo vệ được trước hội đồng, còn 99% kia thì không.</a:t>
+            </a:r>
+            <a:endParaRPr lang="en-US" sz="1400" dirty="0"/>
           </a:p>
         </p:txBody>
       </p:sp>
@@ -4108,7 +4041,7 @@
                 <a:ea typeface="Cambria" pitchFamily="34" charset="-122"/>
                 <a:cs typeface="Cambria" pitchFamily="34" charset="-120"/>
               </a:rPr>
-              <a:t>Giải mã 2 ca 'báo nhầm' — twist hay nhất dự án</a:t>
+              <a:t>Tầng kiểm định 1 — LOSO trên MIMIC</a:t>
             </a:r>
             <a:endParaRPr lang="en-US" sz="3000" dirty="0"/>
           </a:p>
@@ -4116,7 +4049,7 @@
       </p:sp>
       <p:pic>
         <p:nvPicPr>
-          <p:cNvPr id="3" name="Image 0" descr="D:/Projects/HealthSense/HealthSense-MachineLearning-Lab/models/benchmark_v4/subject_probabilities.png">    </p:cNvPr>
+          <p:cNvPr id="3" name="Image 0" descr="D:/Projects/HealthSense/HealthSense-MachineLearning-Lab/models/benchmark_v4/confusion_matrices_subject.png">    </p:cNvPr>
           <p:cNvPicPr>
             <a:picLocks noChangeAspect="1"/>
           </p:cNvPicPr>
@@ -4129,8 +4062,8 @@
         </p:blipFill>
         <p:spPr>
           <a:xfrm>
-            <a:off x="502920" y="1188720"/>
-            <a:ext cx="6126480" cy="4480560"/>
+            <a:off x="502920" y="1234440"/>
+            <a:ext cx="7589520" cy="4114800"/>
           </a:xfrm>
           <a:prstGeom prst="rect">
             <a:avLst/>
@@ -4139,65 +4072,14 @@
       </p:pic>
       <p:sp>
         <p:nvSpPr>
-          <p:cNvPr id="4" name="Shape 1"/>
-          <p:cNvSpPr/>
-          <p:nvPr/>
-        </p:nvSpPr>
-        <p:spPr>
-          <a:xfrm>
-            <a:off x="6858000" y="1371600"/>
-            <a:ext cx="4846320" cy="2057400"/>
-          </a:xfrm>
-          <a:prstGeom prst="roundRect">
-            <a:avLst>
-              <a:gd name="adj" fmla="val 5333"/>
-            </a:avLst>
-          </a:prstGeom>
-          <a:solidFill>
-            <a:srgbClr val="FCF6F5"/>
-          </a:solidFill>
-          <a:ln w="12700">
-            <a:solidFill>
-              <a:srgbClr val="E3D5D3"/>
-            </a:solidFill>
-            <a:prstDash val="solid"/>
-          </a:ln>
-        </p:spPr>
-      </p:sp>
-      <p:pic>
-        <p:nvPicPr>
-          <p:cNvPr id="5" name="Image 1" descr="preencoded.png">    </p:cNvPr>
-          <p:cNvPicPr>
-            <a:picLocks noChangeAspect="1"/>
-          </p:cNvPicPr>
-          <p:nvPr/>
-        </p:nvPicPr>
-        <p:blipFill>
-          <a:blip r:embed="rId2"/>
-          <a:stretch>
-            <a:fillRect/>
-          </a:stretch>
-        </p:blipFill>
-        <p:spPr>
-          <a:xfrm>
-            <a:off x="7086600" y="1572768"/>
-            <a:ext cx="365760" cy="365760"/>
-          </a:xfrm>
-          <a:prstGeom prst="rect">
-            <a:avLst/>
-          </a:prstGeom>
-        </p:spPr>
-      </p:pic>
-      <p:sp>
-        <p:nvSpPr>
-          <p:cNvPr id="6" name="Text 2"/>
+          <p:cNvPr id="4" name="Text 1"/>
           <p:cNvSpPr txBox="1"/>
           <p:nvPr/>
         </p:nvSpPr>
         <p:spPr>
           <a:xfrm>
-            <a:off x="7589520" y="1536192"/>
-            <a:ext cx="3977640" cy="594360"/>
+            <a:off x="8321040" y="1554480"/>
+            <a:ext cx="3383280" cy="822960"/>
           </a:xfrm>
           <a:prstGeom prst="rect">
             <a:avLst/>
@@ -4209,34 +4091,73 @@
           <a:bodyPr wrap="square" lIns="0" tIns="0" rIns="0" bIns="0" rtlCol="0" anchor="ctr"/>
           <a:lstStyle/>
           <a:p>
-            <a:pPr indent="0" marL="0">
-              <a:buNone/>
-            </a:pPr>
-            <a:r>
-              <a:rPr lang="en-US" sz="1350" b="1" dirty="0">
-                <a:solidFill>
-                  <a:srgbClr val="2F3C7E"/>
+            <a:pPr algn="ctr" indent="0" marL="0">
+              <a:buNone/>
+            </a:pPr>
+            <a:r>
+              <a:rPr lang="en-US" sz="4400" b="1" dirty="0">
+                <a:solidFill>
+                  <a:srgbClr val="1B7A43"/>
+                </a:solidFill>
+                <a:latin typeface="Arial" pitchFamily="34" charset="0"/>
+                <a:ea typeface="Arial" pitchFamily="34" charset="-122"/>
+                <a:cs typeface="Arial" pitchFamily="34" charset="-120"/>
+              </a:rPr>
+              <a:t>100%</a:t>
+            </a:r>
+            <a:endParaRPr lang="en-US" sz="4400" dirty="0"/>
+          </a:p>
+        </p:txBody>
+      </p:sp>
+      <p:sp>
+        <p:nvSpPr>
+          <p:cNvPr id="5" name="Text 2"/>
+          <p:cNvSpPr txBox="1"/>
+          <p:nvPr/>
+        </p:nvSpPr>
+        <p:spPr>
+          <a:xfrm>
+            <a:off x="8321040" y="2395728"/>
+            <a:ext cx="3383280" cy="640080"/>
+          </a:xfrm>
+          <a:prstGeom prst="rect">
+            <a:avLst/>
+          </a:prstGeom>
+          <a:noFill/>
+          <a:ln/>
+        </p:spPr>
+        <p:txBody>
+          <a:bodyPr wrap="square" lIns="0" tIns="0" rIns="0" bIns="0" rtlCol="0" anchor="ctr"/>
+          <a:lstStyle/>
+          <a:p>
+            <a:pPr algn="ctr" indent="0" marL="0">
+              <a:buNone/>
+            </a:pPr>
+            <a:r>
+              <a:rPr lang="en-US" sz="1300" dirty="0">
+                <a:solidFill>
+                  <a:srgbClr val="64748B"/>
                 </a:solidFill>
                 <a:latin typeface="Calibri" pitchFamily="34" charset="0"/>
                 <a:ea typeface="Calibri" pitchFamily="34" charset="-122"/>
                 <a:cs typeface="Calibri" pitchFamily="34" charset="-120"/>
               </a:rPr>
-              <a:t>non_af_012 — nhãn gốc đáng nghi</a:t>
-            </a:r>
-            <a:endParaRPr lang="en-US" sz="1350" dirty="0"/>
-          </a:p>
-        </p:txBody>
-      </p:sp>
-      <p:sp>
-        <p:nvSpPr>
-          <p:cNvPr id="7" name="Text 3"/>
+              <a:t>Recall — bắt đủ CẢ 19 bệnh nhân AFib, không sót ai</a:t>
+            </a:r>
+            <a:endParaRPr lang="en-US" sz="1300" dirty="0"/>
+          </a:p>
+        </p:txBody>
+      </p:sp>
+      <p:sp>
+        <p:nvSpPr>
+          <p:cNvPr id="6" name="Text 3"/>
           <p:cNvSpPr txBox="1"/>
           <p:nvPr/>
         </p:nvSpPr>
         <p:spPr>
           <a:xfrm>
-            <a:off x="7086600" y="2148840"/>
-            <a:ext cx="4480560" cy="1188720"/>
+            <a:off x="8321040" y="3200400"/>
+            <a:ext cx="3383280" cy="822960"/>
           </a:xfrm>
           <a:prstGeom prst="rect">
             <a:avLst/>
@@ -4248,85 +4169,73 @@
           <a:bodyPr wrap="square" lIns="0" tIns="0" rIns="0" bIns="0" rtlCol="0" anchor="ctr"/>
           <a:lstStyle/>
           <a:p>
-            <a:pPr indent="0" marL="0">
-              <a:buNone/>
-            </a:pPr>
-            <a:r>
-              <a:rPr lang="en-US" sz="1200" dirty="0">
-                <a:solidFill>
-                  <a:srgbClr val="444444"/>
+            <a:pPr algn="ctr" indent="0" marL="0">
+              <a:buNone/>
+            </a:pPr>
+            <a:r>
+              <a:rPr lang="en-US" sz="4400" b="1" dirty="0">
+                <a:solidFill>
+                  <a:srgbClr val="2F3C7E"/>
+                </a:solidFill>
+                <a:latin typeface="Arial" pitchFamily="34" charset="0"/>
+                <a:ea typeface="Arial" pitchFamily="34" charset="-122"/>
+                <a:cs typeface="Arial" pitchFamily="34" charset="-120"/>
+              </a:rPr>
+              <a:t>94.3%</a:t>
+            </a:r>
+            <a:endParaRPr lang="en-US" sz="4400" dirty="0"/>
+          </a:p>
+        </p:txBody>
+      </p:sp>
+      <p:sp>
+        <p:nvSpPr>
+          <p:cNvPr id="7" name="Text 4"/>
+          <p:cNvSpPr txBox="1"/>
+          <p:nvPr/>
+        </p:nvSpPr>
+        <p:spPr>
+          <a:xfrm>
+            <a:off x="8321040" y="4041648"/>
+            <a:ext cx="3383280" cy="640080"/>
+          </a:xfrm>
+          <a:prstGeom prst="rect">
+            <a:avLst/>
+          </a:prstGeom>
+          <a:noFill/>
+          <a:ln/>
+        </p:spPr>
+        <p:txBody>
+          <a:bodyPr wrap="square" lIns="0" tIns="0" rIns="0" bIns="0" rtlCol="0" anchor="ctr"/>
+          <a:lstStyle/>
+          <a:p>
+            <a:pPr algn="ctr" indent="0" marL="0">
+              <a:buNone/>
+            </a:pPr>
+            <a:r>
+              <a:rPr lang="en-US" sz="1300" dirty="0">
+                <a:solidFill>
+                  <a:srgbClr val="64748B"/>
                 </a:solidFill>
                 <a:latin typeface="Calibri" pitchFamily="34" charset="0"/>
                 <a:ea typeface="Calibri" pitchFamily="34" charset="-122"/>
                 <a:cs typeface="Calibri" pitchFamily="34" charset="-120"/>
               </a:rPr>
-              <a:t>Soi ECG đối chiếu: RMSSD = 233ms — còn LOẠN HƠN nhóm AFib (170ms). Tim người này loạn thật; mô hình báo đúng, NHÃN của dataset mới đáng ngờ.</a:t>
-            </a:r>
-            <a:endParaRPr lang="en-US" sz="1200" dirty="0"/>
-          </a:p>
-        </p:txBody>
-      </p:sp>
-      <p:sp>
-        <p:nvSpPr>
-          <p:cNvPr id="8" name="Shape 4"/>
-          <p:cNvSpPr/>
-          <p:nvPr/>
-        </p:nvSpPr>
-        <p:spPr>
-          <a:xfrm>
-            <a:off x="6858000" y="3611880"/>
-            <a:ext cx="4846320" cy="2057400"/>
-          </a:xfrm>
-          <a:prstGeom prst="roundRect">
-            <a:avLst>
-              <a:gd name="adj" fmla="val 5333"/>
-            </a:avLst>
-          </a:prstGeom>
-          <a:solidFill>
-            <a:srgbClr val="FCF6F5"/>
-          </a:solidFill>
-          <a:ln w="12700">
-            <a:solidFill>
-              <a:srgbClr val="E3D5D3"/>
-            </a:solidFill>
-            <a:prstDash val="solid"/>
-          </a:ln>
-        </p:spPr>
-      </p:sp>
-      <p:pic>
-        <p:nvPicPr>
-          <p:cNvPr id="9" name="Image 2" descr="preencoded.png">    </p:cNvPr>
-          <p:cNvPicPr>
-            <a:picLocks noChangeAspect="1"/>
-          </p:cNvPicPr>
-          <p:nvPr/>
-        </p:nvPicPr>
-        <p:blipFill>
-          <a:blip r:embed="rId3"/>
-          <a:stretch>
-            <a:fillRect/>
-          </a:stretch>
-        </p:blipFill>
-        <p:spPr>
-          <a:xfrm>
-            <a:off x="7086600" y="3813048"/>
-            <a:ext cx="365760" cy="365760"/>
-          </a:xfrm>
-          <a:prstGeom prst="rect">
-            <a:avLst/>
-          </a:prstGeom>
-        </p:spPr>
-      </p:pic>
-      <p:sp>
-        <p:nvSpPr>
-          <p:cNvPr id="10" name="Text 5"/>
+              <a:t>Accuracy mức bệnh nhân (33/35 người đúng)</a:t>
+            </a:r>
+            <a:endParaRPr lang="en-US" sz="1300" dirty="0"/>
+          </a:p>
+        </p:txBody>
+      </p:sp>
+      <p:sp>
+        <p:nvSpPr>
+          <p:cNvPr id="8" name="Text 5"/>
           <p:cNvSpPr txBox="1"/>
           <p:nvPr/>
         </p:nvSpPr>
         <p:spPr>
           <a:xfrm>
-            <a:off x="7589520" y="3776472"/>
-            <a:ext cx="3977640" cy="594360"/>
+            <a:off x="640080" y="5577840"/>
+            <a:ext cx="10908792" cy="731520"/>
           </a:xfrm>
           <a:prstGeom prst="rect">
             <a:avLst/>
@@ -4342,56 +4251,17 @@
               <a:buNone/>
             </a:pPr>
             <a:r>
-              <a:rPr lang="en-US" sz="1350" b="1" dirty="0">
-                <a:solidFill>
-                  <a:srgbClr val="2F3C7E"/>
+              <a:rPr lang="en-US" sz="1350" dirty="0">
+                <a:solidFill>
+                  <a:srgbClr val="333333"/>
                 </a:solidFill>
                 <a:latin typeface="Calibri" pitchFamily="34" charset="0"/>
                 <a:ea typeface="Calibri" pitchFamily="34" charset="-122"/>
                 <a:cs typeface="Calibri" pitchFamily="34" charset="-120"/>
               </a:rPr>
-              <a:t>non_af_014 — tín hiệu PPG hỏng</a:t>
+              <a:t>Metric báo cáo ở MỨC BỆNH NHÂN: gộp ~118 cửa sổ của mỗi người thành 1 kết luận/người — vì câu hỏi thật là 'người này có bệnh không?', không phải 'đoạn 30 giây này thế nào?'</a:t>
             </a:r>
             <a:endParaRPr lang="en-US" sz="1350" dirty="0"/>
-          </a:p>
-        </p:txBody>
-      </p:sp>
-      <p:sp>
-        <p:nvSpPr>
-          <p:cNvPr id="11" name="Text 6"/>
-          <p:cNvSpPr txBox="1"/>
-          <p:nvPr/>
-        </p:nvSpPr>
-        <p:spPr>
-          <a:xfrm>
-            <a:off x="7086600" y="4389120"/>
-            <a:ext cx="4480560" cy="1188720"/>
-          </a:xfrm>
-          <a:prstGeom prst="rect">
-            <a:avLst/>
-          </a:prstGeom>
-          <a:noFill/>
-          <a:ln/>
-        </p:spPr>
-        <p:txBody>
-          <a:bodyPr wrap="square" lIns="0" tIns="0" rIns="0" bIns="0" rtlCol="0" anchor="ctr"/>
-          <a:lstStyle/>
-          <a:p>
-            <a:pPr indent="0" marL="0">
-              <a:buNone/>
-            </a:pPr>
-            <a:r>
-              <a:rPr lang="en-US" sz="1200" dirty="0">
-                <a:solidFill>
-                  <a:srgbClr val="444444"/>
-                </a:solidFill>
-                <a:latin typeface="Calibri" pitchFamily="34" charset="0"/>
-                <a:ea typeface="Calibri" pitchFamily="34" charset="-122"/>
-                <a:cs typeface="Calibri" pitchFamily="34" charset="-120"/>
-              </a:rPr>
-              <a:t>ECG cho thấy tim hoàn toàn bình thường (31ms), nhưng PPG nhiễu nặng → chuỗi nhịp rác → mô hình bị lừa. Bài học đẻ ra tính năng SQI: tín hiệu xấu thì TỪ CHỐI trả lời.</a:t>
-            </a:r>
-            <a:endParaRPr lang="en-US" sz="1200" dirty="0"/>
           </a:p>
         </p:txBody>
       </p:sp>
@@ -4453,22 +4323,96 @@
                 <a:ea typeface="Cambria" pitchFamily="34" charset="-122"/>
                 <a:cs typeface="Cambria" pitchFamily="34" charset="-120"/>
               </a:rPr>
-              <a:t>Tầng kiểm định 2 — thi đấu 'sân khách'</a:t>
+              <a:t>Giải mã 2 ca 'báo nhầm' — twist hay nhất dự án</a:t>
             </a:r>
             <a:endParaRPr lang="en-US" sz="3000" dirty="0"/>
           </a:p>
         </p:txBody>
       </p:sp>
-      <p:sp>
-        <p:nvSpPr>
-          <p:cNvPr id="3" name="Text 1"/>
+      <p:pic>
+        <p:nvPicPr>
+          <p:cNvPr id="3" name="Image 0" descr="D:/Projects/HealthSense/HealthSense-MachineLearning-Lab/models/benchmark_v4/subject_probabilities.png">    </p:cNvPr>
+          <p:cNvPicPr>
+            <a:picLocks noChangeAspect="1"/>
+          </p:cNvPicPr>
+          <p:nvPr/>
+        </p:nvPicPr>
+        <p:blipFill>
+          <a:blip r:embed="rId1"/>
+          <a:srcRect l="0" r="0" t="0" b="0"/>
+          <a:stretch/>
+        </p:blipFill>
+        <p:spPr>
+          <a:xfrm>
+            <a:off x="502920" y="1188720"/>
+            <a:ext cx="6126480" cy="4480560"/>
+          </a:xfrm>
+          <a:prstGeom prst="rect">
+            <a:avLst/>
+          </a:prstGeom>
+        </p:spPr>
+      </p:pic>
+      <p:sp>
+        <p:nvSpPr>
+          <p:cNvPr id="4" name="Shape 1"/>
+          <p:cNvSpPr/>
+          <p:nvPr/>
+        </p:nvSpPr>
+        <p:spPr>
+          <a:xfrm>
+            <a:off x="6858000" y="1371600"/>
+            <a:ext cx="4846320" cy="2057400"/>
+          </a:xfrm>
+          <a:prstGeom prst="roundRect">
+            <a:avLst>
+              <a:gd name="adj" fmla="val 5333"/>
+            </a:avLst>
+          </a:prstGeom>
+          <a:solidFill>
+            <a:srgbClr val="FCF6F5"/>
+          </a:solidFill>
+          <a:ln w="12700">
+            <a:solidFill>
+              <a:srgbClr val="E3D5D3"/>
+            </a:solidFill>
+            <a:prstDash val="solid"/>
+          </a:ln>
+        </p:spPr>
+      </p:sp>
+      <p:pic>
+        <p:nvPicPr>
+          <p:cNvPr id="5" name="Image 1" descr="preencoded.png">    </p:cNvPr>
+          <p:cNvPicPr>
+            <a:picLocks noChangeAspect="1"/>
+          </p:cNvPicPr>
+          <p:nvPr/>
+        </p:nvPicPr>
+        <p:blipFill>
+          <a:blip r:embed="rId2"/>
+          <a:stretch>
+            <a:fillRect/>
+          </a:stretch>
+        </p:blipFill>
+        <p:spPr>
+          <a:xfrm>
+            <a:off x="7086600" y="1572768"/>
+            <a:ext cx="365760" cy="365760"/>
+          </a:xfrm>
+          <a:prstGeom prst="rect">
+            <a:avLst/>
+          </a:prstGeom>
+        </p:spPr>
+      </p:pic>
+      <p:sp>
+        <p:nvSpPr>
+          <p:cNvPr id="6" name="Text 2"/>
           <p:cNvSpPr txBox="1"/>
           <p:nvPr/>
         </p:nvSpPr>
         <p:spPr>
           <a:xfrm>
-            <a:off x="640080" y="1051560"/>
-            <a:ext cx="10908792" cy="457200"/>
+            <a:off x="7589520" y="1536192"/>
+            <a:ext cx="3977640" cy="594360"/>
           </a:xfrm>
           <a:prstGeom prst="rect">
             <a:avLst/>
@@ -4484,14 +4428,285 @@
               <a:buNone/>
             </a:pPr>
             <a:r>
-              <a:rPr lang="en-US" sz="1450" dirty="0">
-                <a:solidFill>
-                  <a:srgbClr val="333333"/>
+              <a:rPr lang="en-US" sz="1350" b="1" dirty="0">
+                <a:solidFill>
+                  <a:srgbClr val="2F3C7E"/>
                 </a:solidFill>
                 <a:latin typeface="Calibri" pitchFamily="34" charset="0"/>
                 <a:ea typeface="Calibri" pitchFamily="34" charset="-122"/>
                 <a:cs typeface="Calibri" pitchFamily="34" charset="-120"/>
               </a:rPr>
+              <a:t>non_af_012 — nhãn gốc đáng nghi</a:t>
+            </a:r>
+            <a:endParaRPr lang="en-US" sz="1350" dirty="0"/>
+          </a:p>
+        </p:txBody>
+      </p:sp>
+      <p:sp>
+        <p:nvSpPr>
+          <p:cNvPr id="7" name="Text 3"/>
+          <p:cNvSpPr txBox="1"/>
+          <p:nvPr/>
+        </p:nvSpPr>
+        <p:spPr>
+          <a:xfrm>
+            <a:off x="7086600" y="2148840"/>
+            <a:ext cx="4480560" cy="1188720"/>
+          </a:xfrm>
+          <a:prstGeom prst="rect">
+            <a:avLst/>
+          </a:prstGeom>
+          <a:noFill/>
+          <a:ln/>
+        </p:spPr>
+        <p:txBody>
+          <a:bodyPr wrap="square" lIns="0" tIns="0" rIns="0" bIns="0" rtlCol="0" anchor="ctr"/>
+          <a:lstStyle/>
+          <a:p>
+            <a:pPr indent="0" marL="0">
+              <a:buNone/>
+            </a:pPr>
+            <a:r>
+              <a:rPr lang="en-US" sz="1200" dirty="0">
+                <a:solidFill>
+                  <a:srgbClr val="444444"/>
+                </a:solidFill>
+                <a:latin typeface="Calibri" pitchFamily="34" charset="0"/>
+                <a:ea typeface="Calibri" pitchFamily="34" charset="-122"/>
+                <a:cs typeface="Calibri" pitchFamily="34" charset="-120"/>
+              </a:rPr>
+              <a:t>Soi ECG đối chiếu: RMSSD = 233ms — còn LOẠN HƠN nhóm AFib (170ms). Tim người này loạn thật; mô hình báo đúng, NHÃN của dataset mới đáng ngờ.</a:t>
+            </a:r>
+            <a:endParaRPr lang="en-US" sz="1200" dirty="0"/>
+          </a:p>
+        </p:txBody>
+      </p:sp>
+      <p:sp>
+        <p:nvSpPr>
+          <p:cNvPr id="8" name="Shape 4"/>
+          <p:cNvSpPr/>
+          <p:nvPr/>
+        </p:nvSpPr>
+        <p:spPr>
+          <a:xfrm>
+            <a:off x="6858000" y="3611880"/>
+            <a:ext cx="4846320" cy="2057400"/>
+          </a:xfrm>
+          <a:prstGeom prst="roundRect">
+            <a:avLst>
+              <a:gd name="adj" fmla="val 5333"/>
+            </a:avLst>
+          </a:prstGeom>
+          <a:solidFill>
+            <a:srgbClr val="FCF6F5"/>
+          </a:solidFill>
+          <a:ln w="12700">
+            <a:solidFill>
+              <a:srgbClr val="E3D5D3"/>
+            </a:solidFill>
+            <a:prstDash val="solid"/>
+          </a:ln>
+        </p:spPr>
+      </p:sp>
+      <p:pic>
+        <p:nvPicPr>
+          <p:cNvPr id="9" name="Image 2" descr="preencoded.png">    </p:cNvPr>
+          <p:cNvPicPr>
+            <a:picLocks noChangeAspect="1"/>
+          </p:cNvPicPr>
+          <p:nvPr/>
+        </p:nvPicPr>
+        <p:blipFill>
+          <a:blip r:embed="rId3"/>
+          <a:stretch>
+            <a:fillRect/>
+          </a:stretch>
+        </p:blipFill>
+        <p:spPr>
+          <a:xfrm>
+            <a:off x="7086600" y="3813048"/>
+            <a:ext cx="365760" cy="365760"/>
+          </a:xfrm>
+          <a:prstGeom prst="rect">
+            <a:avLst/>
+          </a:prstGeom>
+        </p:spPr>
+      </p:pic>
+      <p:sp>
+        <p:nvSpPr>
+          <p:cNvPr id="10" name="Text 5"/>
+          <p:cNvSpPr txBox="1"/>
+          <p:nvPr/>
+        </p:nvSpPr>
+        <p:spPr>
+          <a:xfrm>
+            <a:off x="7589520" y="3776472"/>
+            <a:ext cx="3977640" cy="594360"/>
+          </a:xfrm>
+          <a:prstGeom prst="rect">
+            <a:avLst/>
+          </a:prstGeom>
+          <a:noFill/>
+          <a:ln/>
+        </p:spPr>
+        <p:txBody>
+          <a:bodyPr wrap="square" lIns="0" tIns="0" rIns="0" bIns="0" rtlCol="0" anchor="ctr"/>
+          <a:lstStyle/>
+          <a:p>
+            <a:pPr indent="0" marL="0">
+              <a:buNone/>
+            </a:pPr>
+            <a:r>
+              <a:rPr lang="en-US" sz="1350" b="1" dirty="0">
+                <a:solidFill>
+                  <a:srgbClr val="2F3C7E"/>
+                </a:solidFill>
+                <a:latin typeface="Calibri" pitchFamily="34" charset="0"/>
+                <a:ea typeface="Calibri" pitchFamily="34" charset="-122"/>
+                <a:cs typeface="Calibri" pitchFamily="34" charset="-120"/>
+              </a:rPr>
+              <a:t>non_af_014 — tín hiệu PPG hỏng</a:t>
+            </a:r>
+            <a:endParaRPr lang="en-US" sz="1350" dirty="0"/>
+          </a:p>
+        </p:txBody>
+      </p:sp>
+      <p:sp>
+        <p:nvSpPr>
+          <p:cNvPr id="11" name="Text 6"/>
+          <p:cNvSpPr txBox="1"/>
+          <p:nvPr/>
+        </p:nvSpPr>
+        <p:spPr>
+          <a:xfrm>
+            <a:off x="7086600" y="4389120"/>
+            <a:ext cx="4480560" cy="1188720"/>
+          </a:xfrm>
+          <a:prstGeom prst="rect">
+            <a:avLst/>
+          </a:prstGeom>
+          <a:noFill/>
+          <a:ln/>
+        </p:spPr>
+        <p:txBody>
+          <a:bodyPr wrap="square" lIns="0" tIns="0" rIns="0" bIns="0" rtlCol="0" anchor="ctr"/>
+          <a:lstStyle/>
+          <a:p>
+            <a:pPr indent="0" marL="0">
+              <a:buNone/>
+            </a:pPr>
+            <a:r>
+              <a:rPr lang="en-US" sz="1200" dirty="0">
+                <a:solidFill>
+                  <a:srgbClr val="444444"/>
+                </a:solidFill>
+                <a:latin typeface="Calibri" pitchFamily="34" charset="0"/>
+                <a:ea typeface="Calibri" pitchFamily="34" charset="-122"/>
+                <a:cs typeface="Calibri" pitchFamily="34" charset="-120"/>
+              </a:rPr>
+              <a:t>ECG cho thấy tim hoàn toàn bình thường (31ms), nhưng PPG nhiễu nặng → chuỗi nhịp rác → mô hình bị lừa. Bài học đẻ ra tính năng SQI: tín hiệu xấu thì TỪ CHỐI trả lời.</a:t>
+            </a:r>
+            <a:endParaRPr lang="en-US" sz="1200" dirty="0"/>
+          </a:p>
+        </p:txBody>
+      </p:sp>
+    </p:spTree>
+  </p:cSld>
+  <p:clrMapOvr>
+    <a:masterClrMapping/>
+  </p:clrMapOvr>
+</p:sld>
+</file>
+
+<file path=ppt/slides/slide15.xml><?xml version="1.0" encoding="utf-8"?>
+<p:sld xmlns:a="http://schemas.openxmlformats.org/drawingml/2006/main" xmlns:r="http://schemas.openxmlformats.org/officeDocument/2006/relationships" xmlns:p="http://schemas.openxmlformats.org/presentationml/2006/main">
+  <p:cSld name="Slide 15">
+    <p:spTree>
+      <p:nvGrpSpPr>
+        <p:cNvPr id="1" name=""/>
+        <p:cNvGrpSpPr/>
+        <p:nvPr/>
+      </p:nvGrpSpPr>
+      <p:grpSpPr>
+        <a:xfrm>
+          <a:off x="0" y="0"/>
+          <a:ext cx="0" cy="0"/>
+          <a:chOff x="0" y="0"/>
+          <a:chExt cx="0" cy="0"/>
+        </a:xfrm>
+      </p:grpSpPr>
+      <p:sp>
+        <p:nvSpPr>
+          <p:cNvPr id="2" name="Text 0"/>
+          <p:cNvSpPr txBox="1"/>
+          <p:nvPr/>
+        </p:nvSpPr>
+        <p:spPr>
+          <a:xfrm>
+            <a:off x="502920" y="292608"/>
+            <a:ext cx="11183112" cy="685800"/>
+          </a:xfrm>
+          <a:prstGeom prst="rect">
+            <a:avLst/>
+          </a:prstGeom>
+          <a:noFill/>
+          <a:ln/>
+        </p:spPr>
+        <p:txBody>
+          <a:bodyPr wrap="square" lIns="0" tIns="0" rIns="0" bIns="0" rtlCol="0" anchor="ctr"/>
+          <a:lstStyle/>
+          <a:p>
+            <a:pPr indent="0" marL="0">
+              <a:buNone/>
+            </a:pPr>
+            <a:r>
+              <a:rPr lang="en-US" sz="3000" b="1" dirty="0">
+                <a:solidFill>
+                  <a:srgbClr val="2F3C7E"/>
+                </a:solidFill>
+                <a:latin typeface="Cambria" pitchFamily="34" charset="0"/>
+                <a:ea typeface="Cambria" pitchFamily="34" charset="-122"/>
+                <a:cs typeface="Cambria" pitchFamily="34" charset="-120"/>
+              </a:rPr>
+              <a:t>Tầng kiểm định 2 — thi đấu 'sân khách'</a:t>
+            </a:r>
+            <a:endParaRPr lang="en-US" sz="3000" dirty="0"/>
+          </a:p>
+        </p:txBody>
+      </p:sp>
+      <p:sp>
+        <p:nvSpPr>
+          <p:cNvPr id="3" name="Text 1"/>
+          <p:cNvSpPr txBox="1"/>
+          <p:nvPr/>
+        </p:nvSpPr>
+        <p:spPr>
+          <a:xfrm>
+            <a:off x="640080" y="1051560"/>
+            <a:ext cx="10908792" cy="457200"/>
+          </a:xfrm>
+          <a:prstGeom prst="rect">
+            <a:avLst/>
+          </a:prstGeom>
+          <a:noFill/>
+          <a:ln/>
+        </p:spPr>
+        <p:txBody>
+          <a:bodyPr wrap="square" lIns="0" tIns="0" rIns="0" bIns="0" rtlCol="0" anchor="ctr"/>
+          <a:lstStyle/>
+          <a:p>
+            <a:pPr indent="0" marL="0">
+              <a:buNone/>
+            </a:pPr>
+            <a:r>
+              <a:rPr lang="en-US" sz="1450" dirty="0">
+                <a:solidFill>
+                  <a:srgbClr val="333333"/>
+                </a:solidFill>
+                <a:latin typeface="Calibri" pitchFamily="34" charset="0"/>
+                <a:ea typeface="Calibri" pitchFamily="34" charset="-122"/>
+                <a:cs typeface="Calibri" pitchFamily="34" charset="-120"/>
+              </a:rPr>
               <a:t>Học ở dataset này, thi TOÀN BỘ dataset kia — khác bệnh viện, khác loại cảm biến (PPG vs ECG), khác quần thể:</a:t>
             </a:r>
             <a:endParaRPr lang="en-US" sz="1450" dirty="0"/>
@@ -4500,7 +4715,7 @@
       </p:sp>
       <p:graphicFrame>
         <p:nvGraphicFramePr>
-          <p:cNvPr id="15" name="Table 0"/>
+          <p:cNvPr id="16" name="Table 0"/>
           <p:cNvGraphicFramePr>
             <a:graphicFrameLocks noGrp="1"/>
           </p:cNvGraphicFramePr>
@@ -5659,527 +5874,6 @@
 </p:sld>
 </file>
 
-<file path=ppt/slides/slide15.xml><?xml version="1.0" encoding="utf-8"?>
-<p:sld xmlns:a="http://schemas.openxmlformats.org/drawingml/2006/main" xmlns:r="http://schemas.openxmlformats.org/officeDocument/2006/relationships" xmlns:p="http://schemas.openxmlformats.org/presentationml/2006/main">
-  <p:cSld name="Slide 15">
-    <p:spTree>
-      <p:nvGrpSpPr>
-        <p:cNvPr id="1" name=""/>
-        <p:cNvGrpSpPr/>
-        <p:nvPr/>
-      </p:nvGrpSpPr>
-      <p:grpSpPr>
-        <a:xfrm>
-          <a:off x="0" y="0"/>
-          <a:ext cx="0" cy="0"/>
-          <a:chOff x="0" y="0"/>
-          <a:chExt cx="0" cy="0"/>
-        </a:xfrm>
-      </p:grpSpPr>
-      <p:sp>
-        <p:nvSpPr>
-          <p:cNvPr id="2" name="Text 0"/>
-          <p:cNvSpPr txBox="1"/>
-          <p:nvPr/>
-        </p:nvSpPr>
-        <p:spPr>
-          <a:xfrm>
-            <a:off x="502920" y="292608"/>
-            <a:ext cx="11183112" cy="685800"/>
-          </a:xfrm>
-          <a:prstGeom prst="rect">
-            <a:avLst/>
-          </a:prstGeom>
-          <a:noFill/>
-          <a:ln/>
-        </p:spPr>
-        <p:txBody>
-          <a:bodyPr wrap="square" lIns="0" tIns="0" rIns="0" bIns="0" rtlCol="0" anchor="ctr"/>
-          <a:lstStyle/>
-          <a:p>
-            <a:pPr indent="0" marL="0">
-              <a:buNone/>
-            </a:pPr>
-            <a:r>
-              <a:rPr lang="en-US" sz="3000" b="1" dirty="0">
-                <a:solidFill>
-                  <a:srgbClr val="2F3C7E"/>
-                </a:solidFill>
-                <a:latin typeface="Cambria" pitchFamily="34" charset="0"/>
-                <a:ea typeface="Cambria" pitchFamily="34" charset="-122"/>
-                <a:cs typeface="Cambria" pitchFamily="34" charset="-120"/>
-              </a:rPr>
-              <a:t>Tầng 3 — gộp 60 bệnh nhân, chốt model triển khai</a:t>
-            </a:r>
-            <a:endParaRPr lang="en-US" sz="3000" dirty="0"/>
-          </a:p>
-        </p:txBody>
-      </p:sp>
-      <p:sp>
-        <p:nvSpPr>
-          <p:cNvPr id="3" name="Text 1"/>
-          <p:cNvSpPr txBox="1"/>
-          <p:nvPr/>
-        </p:nvSpPr>
-        <p:spPr>
-          <a:xfrm>
-            <a:off x="640080" y="1280160"/>
-            <a:ext cx="6309360" cy="4114800"/>
-          </a:xfrm>
-          <a:prstGeom prst="rect">
-            <a:avLst/>
-          </a:prstGeom>
-          <a:noFill/>
-          <a:ln/>
-        </p:spPr>
-        <p:txBody>
-          <a:bodyPr wrap="square" lIns="0" tIns="0" rIns="0" bIns="0" rtlCol="0" anchor="t"/>
-          <a:lstStyle/>
-          <a:p>
-            <a:pPr marL="342900" indent="-342900">
-              <a:spcAft>
-                <a:spcPts val="800"/>
-              </a:spcAft>
-              <a:buSzPct val="100000"/>
-              <a:buChar char="•"/>
-            </a:pPr>
-            <a:r>
-              <a:rPr lang="en-US" sz="1400" dirty="0">
-                <a:solidFill>
-                  <a:srgbClr val="333333"/>
-                </a:solidFill>
-                <a:latin typeface="Calibri" pitchFamily="34" charset="0"/>
-                <a:ea typeface="Calibri" pitchFamily="34" charset="-122"/>
-                <a:cs typeface="Calibri" pitchFamily="34" charset="-120"/>
-              </a:rPr>
-              <a:t>Gộp MIMIC + AFDB = 60 bệnh nhân, nhưng AFDB có 29k cửa sổ vs MIMIC 4k → cân bằng bằng sample weight (mỗi dataset một 'lá phiếu' ngang giá)</a:t>
-            </a:r>
-            <a:endParaRPr lang="en-US" sz="1400" dirty="0"/>
-          </a:p>
-          <a:p>
-            <a:pPr marL="342900" indent="-342900">
-              <a:spcAft>
-                <a:spcPts val="800"/>
-              </a:spcAft>
-              <a:buSzPct val="100000"/>
-              <a:buChar char="•"/>
-            </a:pPr>
-            <a:r>
-              <a:rPr lang="en-US" sz="1400" dirty="0">
-                <a:solidFill>
-                  <a:srgbClr val="333333"/>
-                </a:solidFill>
-                <a:latin typeface="Calibri" pitchFamily="34" charset="0"/>
-                <a:ea typeface="Calibri" pitchFamily="34" charset="-122"/>
-                <a:cs typeface="Calibri" pitchFamily="34" charset="-120"/>
-              </a:rPr>
-              <a:t>Vẫn thi LOSO — giờ là 60 vòng</a:t>
-            </a:r>
-            <a:endParaRPr lang="en-US" sz="1400" dirty="0"/>
-          </a:p>
-          <a:p>
-            <a:pPr marL="342900" indent="-342900">
-              <a:spcAft>
-                <a:spcPts val="800"/>
-              </a:spcAft>
-              <a:buSzPct val="100000"/>
-              <a:buChar char="•"/>
-            </a:pPr>
-            <a:r>
-              <a:rPr lang="en-US" sz="1400" dirty="0">
-                <a:solidFill>
-                  <a:srgbClr val="333333"/>
-                </a:solidFill>
-                <a:latin typeface="Calibri" pitchFamily="34" charset="0"/>
-                <a:ea typeface="Calibri" pitchFamily="34" charset="-122"/>
-                <a:cs typeface="Calibri" pitchFamily="34" charset="-120"/>
-              </a:rPr>
-              <a:t>Thắng cuộc: XGBoost → train lại trên toàn bộ 60 người → xuất healthsense_afib_pipeline.pkl (kèm scaler trong 1 file)</a:t>
-            </a:r>
-            <a:endParaRPr lang="en-US" sz="1400" dirty="0"/>
-          </a:p>
-          <a:p>
-            <a:pPr marL="342900" indent="-342900">
-              <a:spcAft>
-                <a:spcPts val="800"/>
-              </a:spcAft>
-              <a:buSzPct val="100000"/>
-              <a:buChar char="•"/>
-            </a:pPr>
-            <a:r>
-              <a:rPr lang="en-US" sz="1400" dirty="0">
-                <a:solidFill>
-                  <a:srgbClr val="333333"/>
-                </a:solidFill>
-                <a:latin typeface="Calibri" pitchFamily="34" charset="0"/>
-                <a:ea typeface="Calibri" pitchFamily="34" charset="-122"/>
-                <a:cs typeface="Calibri" pitchFamily="34" charset="-120"/>
-              </a:rPr>
-              <a:t>Kèm 'giấy khai sinh' model_card.json: input/output, điểm số từng bài thi, giới hạn sử dụng</a:t>
-            </a:r>
-            <a:endParaRPr lang="en-US" sz="1400" dirty="0"/>
-          </a:p>
-        </p:txBody>
-      </p:sp>
-      <p:sp>
-        <p:nvSpPr>
-          <p:cNvPr id="4" name="Text 2"/>
-          <p:cNvSpPr txBox="1"/>
-          <p:nvPr/>
-        </p:nvSpPr>
-        <p:spPr>
-          <a:xfrm>
-            <a:off x="7269480" y="1463040"/>
-            <a:ext cx="2377440" cy="822960"/>
-          </a:xfrm>
-          <a:prstGeom prst="rect">
-            <a:avLst/>
-          </a:prstGeom>
-          <a:noFill/>
-          <a:ln/>
-        </p:spPr>
-        <p:txBody>
-          <a:bodyPr wrap="square" lIns="0" tIns="0" rIns="0" bIns="0" rtlCol="0" anchor="ctr"/>
-          <a:lstStyle/>
-          <a:p>
-            <a:pPr algn="ctr" indent="0" marL="0">
-              <a:buNone/>
-            </a:pPr>
-            <a:r>
-              <a:rPr lang="en-US" sz="4400" b="1" dirty="0">
-                <a:solidFill>
-                  <a:srgbClr val="2F3C7E"/>
-                </a:solidFill>
-                <a:latin typeface="Arial" pitchFamily="34" charset="0"/>
-                <a:ea typeface="Arial" pitchFamily="34" charset="-122"/>
-                <a:cs typeface="Arial" pitchFamily="34" charset="-120"/>
-              </a:rPr>
-              <a:t>95.9%</a:t>
-            </a:r>
-            <a:endParaRPr lang="en-US" sz="4400" dirty="0"/>
-          </a:p>
-        </p:txBody>
-      </p:sp>
-      <p:sp>
-        <p:nvSpPr>
-          <p:cNvPr id="5" name="Text 3"/>
-          <p:cNvSpPr txBox="1"/>
-          <p:nvPr/>
-        </p:nvSpPr>
-        <p:spPr>
-          <a:xfrm>
-            <a:off x="7269480" y="2304288"/>
-            <a:ext cx="2377440" cy="640080"/>
-          </a:xfrm>
-          <a:prstGeom prst="rect">
-            <a:avLst/>
-          </a:prstGeom>
-          <a:noFill/>
-          <a:ln/>
-        </p:spPr>
-        <p:txBody>
-          <a:bodyPr wrap="square" lIns="0" tIns="0" rIns="0" bIns="0" rtlCol="0" anchor="ctr"/>
-          <a:lstStyle/>
-          <a:p>
-            <a:pPr algn="ctr" indent="0" marL="0">
-              <a:buNone/>
-            </a:pPr>
-            <a:r>
-              <a:rPr lang="en-US" sz="1300" dirty="0">
-                <a:solidFill>
-                  <a:srgbClr val="64748B"/>
-                </a:solidFill>
-                <a:latin typeface="Calibri" pitchFamily="34" charset="0"/>
-                <a:ea typeface="Calibri" pitchFamily="34" charset="-122"/>
-                <a:cs typeface="Calibri" pitchFamily="34" charset="-120"/>
-              </a:rPr>
-              <a:t>Accuracy pooled LOSO</a:t>
-            </a:r>
-            <a:endParaRPr lang="en-US" sz="1300" dirty="0"/>
-          </a:p>
-        </p:txBody>
-      </p:sp>
-      <p:sp>
-        <p:nvSpPr>
-          <p:cNvPr id="6" name="Text 4"/>
-          <p:cNvSpPr txBox="1"/>
-          <p:nvPr/>
-        </p:nvSpPr>
-        <p:spPr>
-          <a:xfrm>
-            <a:off x="9646920" y="1463040"/>
-            <a:ext cx="2377440" cy="822960"/>
-          </a:xfrm>
-          <a:prstGeom prst="rect">
-            <a:avLst/>
-          </a:prstGeom>
-          <a:noFill/>
-          <a:ln/>
-        </p:spPr>
-        <p:txBody>
-          <a:bodyPr wrap="square" lIns="0" tIns="0" rIns="0" bIns="0" rtlCol="0" anchor="ctr"/>
-          <a:lstStyle/>
-          <a:p>
-            <a:pPr algn="ctr" indent="0" marL="0">
-              <a:buNone/>
-            </a:pPr>
-            <a:r>
-              <a:rPr lang="en-US" sz="4400" b="1" dirty="0">
-                <a:solidFill>
-                  <a:srgbClr val="990011"/>
-                </a:solidFill>
-                <a:latin typeface="Arial" pitchFamily="34" charset="0"/>
-                <a:ea typeface="Arial" pitchFamily="34" charset="-122"/>
-                <a:cs typeface="Arial" pitchFamily="34" charset="-120"/>
-              </a:rPr>
-              <a:t>0.988</a:t>
-            </a:r>
-            <a:endParaRPr lang="en-US" sz="4400" dirty="0"/>
-          </a:p>
-        </p:txBody>
-      </p:sp>
-      <p:sp>
-        <p:nvSpPr>
-          <p:cNvPr id="7" name="Text 5"/>
-          <p:cNvSpPr txBox="1"/>
-          <p:nvPr/>
-        </p:nvSpPr>
-        <p:spPr>
-          <a:xfrm>
-            <a:off x="9646920" y="2304288"/>
-            <a:ext cx="2377440" cy="640080"/>
-          </a:xfrm>
-          <a:prstGeom prst="rect">
-            <a:avLst/>
-          </a:prstGeom>
-          <a:noFill/>
-          <a:ln/>
-        </p:spPr>
-        <p:txBody>
-          <a:bodyPr wrap="square" lIns="0" tIns="0" rIns="0" bIns="0" rtlCol="0" anchor="ctr"/>
-          <a:lstStyle/>
-          <a:p>
-            <a:pPr algn="ctr" indent="0" marL="0">
-              <a:buNone/>
-            </a:pPr>
-            <a:r>
-              <a:rPr lang="en-US" sz="1300" dirty="0">
-                <a:solidFill>
-                  <a:srgbClr val="64748B"/>
-                </a:solidFill>
-                <a:latin typeface="Calibri" pitchFamily="34" charset="0"/>
-                <a:ea typeface="Calibri" pitchFamily="34" charset="-122"/>
-                <a:cs typeface="Calibri" pitchFamily="34" charset="-120"/>
-              </a:rPr>
-              <a:t>ROC-AUC</a:t>
-            </a:r>
-            <a:endParaRPr lang="en-US" sz="1300" dirty="0"/>
-          </a:p>
-        </p:txBody>
-      </p:sp>
-      <p:sp>
-        <p:nvSpPr>
-          <p:cNvPr id="8" name="Text 6"/>
-          <p:cNvSpPr txBox="1"/>
-          <p:nvPr/>
-        </p:nvSpPr>
-        <p:spPr>
-          <a:xfrm>
-            <a:off x="7269480" y="3200400"/>
-            <a:ext cx="2377440" cy="822960"/>
-          </a:xfrm>
-          <a:prstGeom prst="rect">
-            <a:avLst/>
-          </a:prstGeom>
-          <a:noFill/>
-          <a:ln/>
-        </p:spPr>
-        <p:txBody>
-          <a:bodyPr wrap="square" lIns="0" tIns="0" rIns="0" bIns="0" rtlCol="0" anchor="ctr"/>
-          <a:lstStyle/>
-          <a:p>
-            <a:pPr algn="ctr" indent="0" marL="0">
-              <a:buNone/>
-            </a:pPr>
-            <a:r>
-              <a:rPr lang="en-US" sz="4400" b="1" dirty="0">
-                <a:solidFill>
-                  <a:srgbClr val="1B7A43"/>
-                </a:solidFill>
-                <a:latin typeface="Arial" pitchFamily="34" charset="0"/>
-                <a:ea typeface="Arial" pitchFamily="34" charset="-122"/>
-                <a:cs typeface="Arial" pitchFamily="34" charset="-120"/>
-              </a:rPr>
-              <a:t>97.2%</a:t>
-            </a:r>
-            <a:endParaRPr lang="en-US" sz="4400" dirty="0"/>
-          </a:p>
-        </p:txBody>
-      </p:sp>
-      <p:sp>
-        <p:nvSpPr>
-          <p:cNvPr id="9" name="Text 7"/>
-          <p:cNvSpPr txBox="1"/>
-          <p:nvPr/>
-        </p:nvSpPr>
-        <p:spPr>
-          <a:xfrm>
-            <a:off x="7269480" y="4041648"/>
-            <a:ext cx="2377440" cy="640080"/>
-          </a:xfrm>
-          <a:prstGeom prst="rect">
-            <a:avLst/>
-          </a:prstGeom>
-          <a:noFill/>
-          <a:ln/>
-        </p:spPr>
-        <p:txBody>
-          <a:bodyPr wrap="square" lIns="0" tIns="0" rIns="0" bIns="0" rtlCol="0" anchor="ctr"/>
-          <a:lstStyle/>
-          <a:p>
-            <a:pPr algn="ctr" indent="0" marL="0">
-              <a:buNone/>
-            </a:pPr>
-            <a:r>
-              <a:rPr lang="en-US" sz="1300" dirty="0">
-                <a:solidFill>
-                  <a:srgbClr val="64748B"/>
-                </a:solidFill>
-                <a:latin typeface="Calibri" pitchFamily="34" charset="0"/>
-                <a:ea typeface="Calibri" pitchFamily="34" charset="-122"/>
-                <a:cs typeface="Calibri" pitchFamily="34" charset="-120"/>
-              </a:rPr>
-              <a:t>Recall</a:t>
-            </a:r>
-            <a:endParaRPr lang="en-US" sz="1300" dirty="0"/>
-          </a:p>
-        </p:txBody>
-      </p:sp>
-      <p:sp>
-        <p:nvSpPr>
-          <p:cNvPr id="10" name="Text 8"/>
-          <p:cNvSpPr txBox="1"/>
-          <p:nvPr/>
-        </p:nvSpPr>
-        <p:spPr>
-          <a:xfrm>
-            <a:off x="9646920" y="3200400"/>
-            <a:ext cx="2377440" cy="822960"/>
-          </a:xfrm>
-          <a:prstGeom prst="rect">
-            <a:avLst/>
-          </a:prstGeom>
-          <a:noFill/>
-          <a:ln/>
-        </p:spPr>
-        <p:txBody>
-          <a:bodyPr wrap="square" lIns="0" tIns="0" rIns="0" bIns="0" rtlCol="0" anchor="ctr"/>
-          <a:lstStyle/>
-          <a:p>
-            <a:pPr algn="ctr" indent="0" marL="0">
-              <a:buNone/>
-            </a:pPr>
-            <a:r>
-              <a:rPr lang="en-US" sz="4400" b="1" dirty="0">
-                <a:solidFill>
-                  <a:srgbClr val="64748B"/>
-                </a:solidFill>
-                <a:latin typeface="Arial" pitchFamily="34" charset="0"/>
-                <a:ea typeface="Arial" pitchFamily="34" charset="-122"/>
-                <a:cs typeface="Arial" pitchFamily="34" charset="-120"/>
-              </a:rPr>
-              <a:t>60</a:t>
-            </a:r>
-            <a:endParaRPr lang="en-US" sz="4400" dirty="0"/>
-          </a:p>
-        </p:txBody>
-      </p:sp>
-      <p:sp>
-        <p:nvSpPr>
-          <p:cNvPr id="11" name="Text 9"/>
-          <p:cNvSpPr txBox="1"/>
-          <p:nvPr/>
-        </p:nvSpPr>
-        <p:spPr>
-          <a:xfrm>
-            <a:off x="9646920" y="4041648"/>
-            <a:ext cx="2377440" cy="640080"/>
-          </a:xfrm>
-          <a:prstGeom prst="rect">
-            <a:avLst/>
-          </a:prstGeom>
-          <a:noFill/>
-          <a:ln/>
-        </p:spPr>
-        <p:txBody>
-          <a:bodyPr wrap="square" lIns="0" tIns="0" rIns="0" bIns="0" rtlCol="0" anchor="ctr"/>
-          <a:lstStyle/>
-          <a:p>
-            <a:pPr algn="ctr" indent="0" marL="0">
-              <a:buNone/>
-            </a:pPr>
-            <a:r>
-              <a:rPr lang="en-US" sz="1300" dirty="0">
-                <a:solidFill>
-                  <a:srgbClr val="64748B"/>
-                </a:solidFill>
-                <a:latin typeface="Calibri" pitchFamily="34" charset="0"/>
-                <a:ea typeface="Calibri" pitchFamily="34" charset="-122"/>
-                <a:cs typeface="Calibri" pitchFamily="34" charset="-120"/>
-              </a:rPr>
-              <a:t>bệnh nhân, 2 loại cảm biến</a:t>
-            </a:r>
-            <a:endParaRPr lang="en-US" sz="1300" dirty="0"/>
-          </a:p>
-        </p:txBody>
-      </p:sp>
-      <p:sp>
-        <p:nvSpPr>
-          <p:cNvPr id="12" name="Text 10"/>
-          <p:cNvSpPr txBox="1"/>
-          <p:nvPr/>
-        </p:nvSpPr>
-        <p:spPr>
-          <a:xfrm>
-            <a:off x="640080" y="5623560"/>
-            <a:ext cx="10908792" cy="640080"/>
-          </a:xfrm>
-          <a:prstGeom prst="rect">
-            <a:avLst/>
-          </a:prstGeom>
-          <a:noFill/>
-          <a:ln/>
-        </p:spPr>
-        <p:txBody>
-          <a:bodyPr wrap="square" lIns="0" tIns="0" rIns="0" bIns="0" rtlCol="0" anchor="ctr"/>
-          <a:lstStyle/>
-          <a:p>
-            <a:pPr algn="ctr" indent="0" marL="0">
-              <a:buNone/>
-            </a:pPr>
-            <a:r>
-              <a:rPr lang="en-US" sz="1350" i="1" dirty="0">
-                <a:solidFill>
-                  <a:srgbClr val="990011"/>
-                </a:solidFill>
-                <a:latin typeface="Calibri" pitchFamily="34" charset="0"/>
-                <a:ea typeface="Calibri" pitchFamily="34" charset="-122"/>
-                <a:cs typeface="Calibri" pitchFamily="34" charset="-120"/>
-              </a:rPr>
-              <a:t>Gộp dữ liệu CHỈ sau khi đã chứng minh phương pháp sạch ở tầng 1-2 — gộp trước rồi chia random là quay lại đúng cái bẫy leakage.</a:t>
-            </a:r>
-            <a:endParaRPr lang="en-US" sz="1350" dirty="0"/>
-          </a:p>
-        </p:txBody>
-      </p:sp>
-    </p:spTree>
-  </p:cSld>
-  <p:clrMapOvr>
-    <a:masterClrMapping/>
-  </p:clrMapOvr>
-</p:sld>
-</file>
-
 <file path=ppt/slides/slide16.xml><?xml version="1.0" encoding="utf-8"?>
 <p:sld xmlns:a="http://schemas.openxmlformats.org/drawingml/2006/main" xmlns:r="http://schemas.openxmlformats.org/officeDocument/2006/relationships" xmlns:p="http://schemas.openxmlformats.org/presentationml/2006/main">
   <p:cSld name="Slide 16">
@@ -6230,7 +5924,7 @@
                 <a:ea typeface="Cambria" pitchFamily="34" charset="-122"/>
                 <a:cs typeface="Cambria" pitchFamily="34" charset="-120"/>
               </a:rPr>
-              <a:t>Kiểm chứng nền móng: chấm điểm dò nhịp bằng ECG</a:t>
+              <a:t>Tầng 3 — gộp 60 bệnh nhân, chốt model triển khai</a:t>
             </a:r>
             <a:endParaRPr lang="en-US" sz="3000" dirty="0"/>
           </a:p>
@@ -6245,7 +5939,7 @@
         <p:spPr>
           <a:xfrm>
             <a:off x="640080" y="1280160"/>
-            <a:ext cx="6766560" cy="4114800"/>
+            <a:ext cx="6309360" cy="4114800"/>
           </a:xfrm>
           <a:prstGeom prst="rect">
             <a:avLst/>
@@ -6273,7 +5967,7 @@
                 <a:ea typeface="Calibri" pitchFamily="34" charset="-122"/>
                 <a:cs typeface="Calibri" pitchFamily="34" charset="-120"/>
               </a:rPr>
-              <a:t>Mọi đặc trưng đứng trên vai bộ dò nhịp — nếu dò sai thì tất cả sụp. Phải chấm điểm nó!</a:t>
+              <a:t>Gộp MIMIC + AFDB = 60 bệnh nhân, nhưng AFDB có 29k cửa sổ vs MIMIC 4k → cân bằng bằng sample weight (mỗi dataset một 'lá phiếu' ngang giá)</a:t>
             </a:r>
             <a:endParaRPr lang="en-US" sz="1400" dirty="0"/>
           </a:p>
@@ -6294,7 +5988,7 @@
                 <a:ea typeface="Calibri" pitchFamily="34" charset="-122"/>
                 <a:cs typeface="Calibri" pitchFamily="34" charset="-120"/>
               </a:rPr>
-              <a:t>May mắn: MIMIC ghi ECG SONG SONG với PPG → dùng R-peak trên ECG làm đáp án chuẩn, khớp từng nhịp (±150ms, sau khi bù độ trễ mạch PTT)</a:t>
+              <a:t>Vẫn thi LOSO — giờ là 60 vòng</a:t>
             </a:r>
             <a:endParaRPr lang="en-US" sz="1400" dirty="0"/>
           </a:p>
@@ -6315,7 +6009,7 @@
                 <a:ea typeface="Calibri" pitchFamily="34" charset="-122"/>
                 <a:cs typeface="Calibri" pitchFamily="34" charset="-120"/>
               </a:rPr>
-              <a:t>Kết quả: nhóm Normal F1 = 0.991 (gần hoàn hảo); nhóm AFib 0.855 — thấp hơn vì biên độ mạch AF thay đổi từng nhịp</a:t>
+              <a:t>Thắng cuộc: XGBoost → train lại trên toàn bộ 60 người → xuất healthsense_afib_pipeline.pkl (kèm scaler trong 1 file)</a:t>
             </a:r>
             <a:endParaRPr lang="en-US" sz="1400" dirty="0"/>
           </a:p>
@@ -6336,7 +6030,7 @@
                 <a:ea typeface="Calibri" pitchFamily="34" charset="-122"/>
                 <a:cs typeface="Calibri" pitchFamily="34" charset="-120"/>
               </a:rPr>
-              <a:t>So kết quả đo: nhịp tim PPG lệch ECG trung bình chỉ 3.5 bpm (r = 0.94) — đủ tin cho sàng lọc; riêng giá trị HRV tuyệt đối thì PPG 'phóng đại' (hiện tượng PRV ≠ HRV kinh điển trong y văn)</a:t>
+              <a:t>Kèm 'giấy khai sinh' model_card.json: input/output, điểm số từng bài thi, giới hạn sử dụng</a:t>
             </a:r>
             <a:endParaRPr lang="en-US" sz="1400" dirty="0"/>
           </a:p>
@@ -6350,8 +6044,8 @@
         </p:nvSpPr>
         <p:spPr>
           <a:xfrm>
-            <a:off x="7772400" y="1554480"/>
-            <a:ext cx="3749040" cy="822960"/>
+            <a:off x="7269480" y="1463040"/>
+            <a:ext cx="2377440" cy="822960"/>
           </a:xfrm>
           <a:prstGeom prst="rect">
             <a:avLst/>
@@ -6369,13 +6063,13 @@
             <a:r>
               <a:rPr lang="en-US" sz="4400" b="1" dirty="0">
                 <a:solidFill>
-                  <a:srgbClr val="1B7A43"/>
+                  <a:srgbClr val="2F3C7E"/>
                 </a:solidFill>
                 <a:latin typeface="Arial" pitchFamily="34" charset="0"/>
                 <a:ea typeface="Arial" pitchFamily="34" charset="-122"/>
                 <a:cs typeface="Arial" pitchFamily="34" charset="-120"/>
               </a:rPr>
-              <a:t>0.991</a:t>
+              <a:t>95.9%</a:t>
             </a:r>
             <a:endParaRPr lang="en-US" sz="4400" dirty="0"/>
           </a:p>
@@ -6389,8 +6083,8 @@
         </p:nvSpPr>
         <p:spPr>
           <a:xfrm>
-            <a:off x="7772400" y="2395728"/>
-            <a:ext cx="3749040" cy="640080"/>
+            <a:off x="7269480" y="2304288"/>
+            <a:ext cx="2377440" cy="640080"/>
           </a:xfrm>
           <a:prstGeom prst="rect">
             <a:avLst/>
@@ -6414,7 +6108,7 @@
                 <a:ea typeface="Calibri" pitchFamily="34" charset="-122"/>
                 <a:cs typeface="Calibri" pitchFamily="34" charset="-120"/>
               </a:rPr>
-              <a:t>F1 dò nhịp nhóm Normal — mỗi nhịp ECG đều được PPG 'bắt' đúng chỗ</a:t>
+              <a:t>Accuracy pooled LOSO</a:t>
             </a:r>
             <a:endParaRPr lang="en-US" sz="1300" dirty="0"/>
           </a:p>
@@ -6428,8 +6122,8 @@
         </p:nvSpPr>
         <p:spPr>
           <a:xfrm>
-            <a:off x="7772400" y="3383280"/>
-            <a:ext cx="3749040" cy="822960"/>
+            <a:off x="9646920" y="1463040"/>
+            <a:ext cx="2377440" cy="822960"/>
           </a:xfrm>
           <a:prstGeom prst="rect">
             <a:avLst/>
@@ -6447,13 +6141,13 @@
             <a:r>
               <a:rPr lang="en-US" sz="4400" b="1" dirty="0">
                 <a:solidFill>
-                  <a:srgbClr val="2F3C7E"/>
+                  <a:srgbClr val="990011"/>
                 </a:solidFill>
                 <a:latin typeface="Arial" pitchFamily="34" charset="0"/>
                 <a:ea typeface="Arial" pitchFamily="34" charset="-122"/>
                 <a:cs typeface="Arial" pitchFamily="34" charset="-120"/>
               </a:rPr>
-              <a:t>3.5 bpm</a:t>
+              <a:t>0.988</a:t>
             </a:r>
             <a:endParaRPr lang="en-US" sz="4400" dirty="0"/>
           </a:p>
@@ -6467,8 +6161,8 @@
         </p:nvSpPr>
         <p:spPr>
           <a:xfrm>
-            <a:off x="7772400" y="4224528"/>
-            <a:ext cx="3749040" cy="640080"/>
+            <a:off x="9646920" y="2304288"/>
+            <a:ext cx="2377440" cy="640080"/>
           </a:xfrm>
           <a:prstGeom prst="rect">
             <a:avLst/>
@@ -6492,9 +6186,204 @@
                 <a:ea typeface="Calibri" pitchFamily="34" charset="-122"/>
                 <a:cs typeface="Calibri" pitchFamily="34" charset="-120"/>
               </a:rPr>
-              <a:t>sai số nhịp tim PPG vs ECG trên 1.400 cửa sổ</a:t>
+              <a:t>ROC-AUC</a:t>
             </a:r>
             <a:endParaRPr lang="en-US" sz="1300" dirty="0"/>
+          </a:p>
+        </p:txBody>
+      </p:sp>
+      <p:sp>
+        <p:nvSpPr>
+          <p:cNvPr id="8" name="Text 6"/>
+          <p:cNvSpPr txBox="1"/>
+          <p:nvPr/>
+        </p:nvSpPr>
+        <p:spPr>
+          <a:xfrm>
+            <a:off x="7269480" y="3200400"/>
+            <a:ext cx="2377440" cy="822960"/>
+          </a:xfrm>
+          <a:prstGeom prst="rect">
+            <a:avLst/>
+          </a:prstGeom>
+          <a:noFill/>
+          <a:ln/>
+        </p:spPr>
+        <p:txBody>
+          <a:bodyPr wrap="square" lIns="0" tIns="0" rIns="0" bIns="0" rtlCol="0" anchor="ctr"/>
+          <a:lstStyle/>
+          <a:p>
+            <a:pPr algn="ctr" indent="0" marL="0">
+              <a:buNone/>
+            </a:pPr>
+            <a:r>
+              <a:rPr lang="en-US" sz="4400" b="1" dirty="0">
+                <a:solidFill>
+                  <a:srgbClr val="1B7A43"/>
+                </a:solidFill>
+                <a:latin typeface="Arial" pitchFamily="34" charset="0"/>
+                <a:ea typeface="Arial" pitchFamily="34" charset="-122"/>
+                <a:cs typeface="Arial" pitchFamily="34" charset="-120"/>
+              </a:rPr>
+              <a:t>97.2%</a:t>
+            </a:r>
+            <a:endParaRPr lang="en-US" sz="4400" dirty="0"/>
+          </a:p>
+        </p:txBody>
+      </p:sp>
+      <p:sp>
+        <p:nvSpPr>
+          <p:cNvPr id="9" name="Text 7"/>
+          <p:cNvSpPr txBox="1"/>
+          <p:nvPr/>
+        </p:nvSpPr>
+        <p:spPr>
+          <a:xfrm>
+            <a:off x="7269480" y="4041648"/>
+            <a:ext cx="2377440" cy="640080"/>
+          </a:xfrm>
+          <a:prstGeom prst="rect">
+            <a:avLst/>
+          </a:prstGeom>
+          <a:noFill/>
+          <a:ln/>
+        </p:spPr>
+        <p:txBody>
+          <a:bodyPr wrap="square" lIns="0" tIns="0" rIns="0" bIns="0" rtlCol="0" anchor="ctr"/>
+          <a:lstStyle/>
+          <a:p>
+            <a:pPr algn="ctr" indent="0" marL="0">
+              <a:buNone/>
+            </a:pPr>
+            <a:r>
+              <a:rPr lang="en-US" sz="1300" dirty="0">
+                <a:solidFill>
+                  <a:srgbClr val="64748B"/>
+                </a:solidFill>
+                <a:latin typeface="Calibri" pitchFamily="34" charset="0"/>
+                <a:ea typeface="Calibri" pitchFamily="34" charset="-122"/>
+                <a:cs typeface="Calibri" pitchFamily="34" charset="-120"/>
+              </a:rPr>
+              <a:t>Recall</a:t>
+            </a:r>
+            <a:endParaRPr lang="en-US" sz="1300" dirty="0"/>
+          </a:p>
+        </p:txBody>
+      </p:sp>
+      <p:sp>
+        <p:nvSpPr>
+          <p:cNvPr id="10" name="Text 8"/>
+          <p:cNvSpPr txBox="1"/>
+          <p:nvPr/>
+        </p:nvSpPr>
+        <p:spPr>
+          <a:xfrm>
+            <a:off x="9646920" y="3200400"/>
+            <a:ext cx="2377440" cy="822960"/>
+          </a:xfrm>
+          <a:prstGeom prst="rect">
+            <a:avLst/>
+          </a:prstGeom>
+          <a:noFill/>
+          <a:ln/>
+        </p:spPr>
+        <p:txBody>
+          <a:bodyPr wrap="square" lIns="0" tIns="0" rIns="0" bIns="0" rtlCol="0" anchor="ctr"/>
+          <a:lstStyle/>
+          <a:p>
+            <a:pPr algn="ctr" indent="0" marL="0">
+              <a:buNone/>
+            </a:pPr>
+            <a:r>
+              <a:rPr lang="en-US" sz="4400" b="1" dirty="0">
+                <a:solidFill>
+                  <a:srgbClr val="64748B"/>
+                </a:solidFill>
+                <a:latin typeface="Arial" pitchFamily="34" charset="0"/>
+                <a:ea typeface="Arial" pitchFamily="34" charset="-122"/>
+                <a:cs typeface="Arial" pitchFamily="34" charset="-120"/>
+              </a:rPr>
+              <a:t>60</a:t>
+            </a:r>
+            <a:endParaRPr lang="en-US" sz="4400" dirty="0"/>
+          </a:p>
+        </p:txBody>
+      </p:sp>
+      <p:sp>
+        <p:nvSpPr>
+          <p:cNvPr id="11" name="Text 9"/>
+          <p:cNvSpPr txBox="1"/>
+          <p:nvPr/>
+        </p:nvSpPr>
+        <p:spPr>
+          <a:xfrm>
+            <a:off x="9646920" y="4041648"/>
+            <a:ext cx="2377440" cy="640080"/>
+          </a:xfrm>
+          <a:prstGeom prst="rect">
+            <a:avLst/>
+          </a:prstGeom>
+          <a:noFill/>
+          <a:ln/>
+        </p:spPr>
+        <p:txBody>
+          <a:bodyPr wrap="square" lIns="0" tIns="0" rIns="0" bIns="0" rtlCol="0" anchor="ctr"/>
+          <a:lstStyle/>
+          <a:p>
+            <a:pPr algn="ctr" indent="0" marL="0">
+              <a:buNone/>
+            </a:pPr>
+            <a:r>
+              <a:rPr lang="en-US" sz="1300" dirty="0">
+                <a:solidFill>
+                  <a:srgbClr val="64748B"/>
+                </a:solidFill>
+                <a:latin typeface="Calibri" pitchFamily="34" charset="0"/>
+                <a:ea typeface="Calibri" pitchFamily="34" charset="-122"/>
+                <a:cs typeface="Calibri" pitchFamily="34" charset="-120"/>
+              </a:rPr>
+              <a:t>bệnh nhân, 2 loại cảm biến</a:t>
+            </a:r>
+            <a:endParaRPr lang="en-US" sz="1300" dirty="0"/>
+          </a:p>
+        </p:txBody>
+      </p:sp>
+      <p:sp>
+        <p:nvSpPr>
+          <p:cNvPr id="12" name="Text 10"/>
+          <p:cNvSpPr txBox="1"/>
+          <p:nvPr/>
+        </p:nvSpPr>
+        <p:spPr>
+          <a:xfrm>
+            <a:off x="640080" y="5623560"/>
+            <a:ext cx="10908792" cy="640080"/>
+          </a:xfrm>
+          <a:prstGeom prst="rect">
+            <a:avLst/>
+          </a:prstGeom>
+          <a:noFill/>
+          <a:ln/>
+        </p:spPr>
+        <p:txBody>
+          <a:bodyPr wrap="square" lIns="0" tIns="0" rIns="0" bIns="0" rtlCol="0" anchor="ctr"/>
+          <a:lstStyle/>
+          <a:p>
+            <a:pPr algn="ctr" indent="0" marL="0">
+              <a:buNone/>
+            </a:pPr>
+            <a:r>
+              <a:rPr lang="en-US" sz="1350" i="1" dirty="0">
+                <a:solidFill>
+                  <a:srgbClr val="990011"/>
+                </a:solidFill>
+                <a:latin typeface="Calibri" pitchFamily="34" charset="0"/>
+                <a:ea typeface="Calibri" pitchFamily="34" charset="-122"/>
+                <a:cs typeface="Calibri" pitchFamily="34" charset="-120"/>
+              </a:rPr>
+              <a:t>Gộp dữ liệu CHỈ sau khi đã chứng minh phương pháp sạch ở tầng 1-2 — gộp trước rồi chia random là quay lại đúng cái bẫy leakage.</a:t>
+            </a:r>
+            <a:endParaRPr lang="en-US" sz="1350" dirty="0"/>
           </a:p>
         </p:txBody>
       </p:sp>
@@ -6556,7 +6445,7 @@
                 <a:ea typeface="Cambria" pitchFamily="34" charset="-122"/>
                 <a:cs typeface="Cambria" pitchFamily="34" charset="-120"/>
               </a:rPr>
-              <a:t>Từ notebook đến sản phẩm thật</a:t>
+              <a:t>Kiểm chứng nền móng: chấm điểm dò nhịp bằng ECG</a:t>
             </a:r>
             <a:endParaRPr lang="en-US" sz="3000" dirty="0"/>
           </a:p>
@@ -6564,58 +6453,14 @@
       </p:sp>
       <p:sp>
         <p:nvSpPr>
-          <p:cNvPr id="3" name="Shape 1"/>
-          <p:cNvSpPr/>
-          <p:nvPr/>
-        </p:nvSpPr>
-        <p:spPr>
-          <a:xfrm>
-            <a:off x="640080" y="1344168"/>
-            <a:ext cx="502920" cy="502920"/>
-          </a:xfrm>
-          <a:prstGeom prst="ellipse">
-            <a:avLst/>
-          </a:prstGeom>
-          <a:solidFill>
-            <a:srgbClr val="990011"/>
-          </a:solidFill>
-          <a:ln/>
-        </p:spPr>
-      </p:sp>
-      <p:pic>
-        <p:nvPicPr>
-          <p:cNvPr id="4" name="Image 0" descr="preencoded.png">    </p:cNvPr>
-          <p:cNvPicPr>
-            <a:picLocks noChangeAspect="1"/>
-          </p:cNvPicPr>
-          <p:nvPr/>
-        </p:nvPicPr>
-        <p:blipFill>
-          <a:blip r:embed="rId1"/>
-          <a:stretch>
-            <a:fillRect/>
-          </a:stretch>
-        </p:blipFill>
-        <p:spPr>
-          <a:xfrm>
-            <a:off x="750722" y="1454810"/>
-            <a:ext cx="281635" cy="281635"/>
-          </a:xfrm>
-          <a:prstGeom prst="rect">
-            <a:avLst/>
-          </a:prstGeom>
-        </p:spPr>
-      </p:pic>
-      <p:sp>
-        <p:nvSpPr>
-          <p:cNvPr id="5" name="Text 2"/>
+          <p:cNvPr id="3" name="Text 1"/>
           <p:cNvSpPr txBox="1"/>
           <p:nvPr/>
         </p:nvSpPr>
         <p:spPr>
           <a:xfrm>
-            <a:off x="1371600" y="1234440"/>
-            <a:ext cx="10241280" cy="411480"/>
+            <a:off x="640080" y="1280160"/>
+            <a:ext cx="6766560" cy="4114800"/>
           </a:xfrm>
           <a:prstGeom prst="rect">
             <a:avLst/>
@@ -6624,242 +6469,104 @@
           <a:ln/>
         </p:spPr>
         <p:txBody>
-          <a:bodyPr wrap="square" lIns="0" tIns="0" rIns="0" bIns="0" rtlCol="0" anchor="ctr"/>
-          <a:lstStyle/>
-          <a:p>
-            <a:pPr indent="0" marL="0">
-              <a:buNone/>
-            </a:pPr>
-            <a:r>
-              <a:rPr lang="en-US" sz="1600" b="1" dirty="0">
-                <a:solidFill>
-                  <a:srgbClr val="2F3C7E"/>
+          <a:bodyPr wrap="square" lIns="0" tIns="0" rIns="0" bIns="0" rtlCol="0" anchor="t"/>
+          <a:lstStyle/>
+          <a:p>
+            <a:pPr marL="342900" indent="-342900">
+              <a:spcAft>
+                <a:spcPts val="800"/>
+              </a:spcAft>
+              <a:buSzPct val="100000"/>
+              <a:buChar char="•"/>
+            </a:pPr>
+            <a:r>
+              <a:rPr lang="en-US" sz="1400" dirty="0">
+                <a:solidFill>
+                  <a:srgbClr val="333333"/>
                 </a:solidFill>
                 <a:latin typeface="Calibri" pitchFamily="34" charset="0"/>
                 <a:ea typeface="Calibri" pitchFamily="34" charset="-122"/>
                 <a:cs typeface="Calibri" pitchFamily="34" charset="-120"/>
               </a:rPr>
-              <a:t>SQI — người gác cổng</a:t>
-            </a:r>
-            <a:endParaRPr lang="en-US" sz="1600" dirty="0"/>
-          </a:p>
-        </p:txBody>
-      </p:sp>
-      <p:sp>
-        <p:nvSpPr>
-          <p:cNvPr id="6" name="Text 3"/>
-          <p:cNvSpPr txBox="1"/>
-          <p:nvPr/>
-        </p:nvSpPr>
-        <p:spPr>
-          <a:xfrm>
-            <a:off x="1371600" y="1673352"/>
-            <a:ext cx="10241280" cy="1097280"/>
-          </a:xfrm>
-          <a:prstGeom prst="rect">
-            <a:avLst/>
-          </a:prstGeom>
-          <a:noFill/>
-          <a:ln/>
-        </p:spPr>
-        <p:txBody>
-          <a:bodyPr wrap="square" lIns="0" tIns="0" rIns="0" bIns="0" rtlCol="0" anchor="ctr"/>
-          <a:lstStyle/>
-          <a:p>
-            <a:pPr indent="0" marL="0">
-              <a:buNone/>
-            </a:pPr>
-            <a:r>
-              <a:rPr lang="en-US" sz="1300" dirty="0">
-                <a:solidFill>
-                  <a:srgbClr val="444444"/>
+              <a:t>Mọi đặc trưng đứng trên vai bộ dò nhịp — nếu dò sai thì tất cả sụp. Phải chấm điểm nó!</a:t>
+            </a:r>
+            <a:endParaRPr lang="en-US" sz="1400" dirty="0"/>
+          </a:p>
+          <a:p>
+            <a:pPr marL="342900" indent="-342900">
+              <a:spcAft>
+                <a:spcPts val="800"/>
+              </a:spcAft>
+              <a:buSzPct val="100000"/>
+              <a:buChar char="•"/>
+            </a:pPr>
+            <a:r>
+              <a:rPr lang="en-US" sz="1400" dirty="0">
+                <a:solidFill>
+                  <a:srgbClr val="333333"/>
                 </a:solidFill>
                 <a:latin typeface="Calibri" pitchFamily="34" charset="0"/>
                 <a:ea typeface="Calibri" pitchFamily="34" charset="-122"/>
                 <a:cs typeface="Calibri" pitchFamily="34" charset="-120"/>
               </a:rPr>
-              <a:t>Tín hiệu không giống sóng mạch (nhiễu, đeo lỏng) → TỪ CHỐI phân loại thay vì đoán bừa. Ngưỡng đặt bằng đo đạc thật: sóng thật dồn ≥86% năng lượng vào dải nhịp tim, nhiễu chỉ ~41%.</a:t>
-            </a:r>
-            <a:endParaRPr lang="en-US" sz="1300" dirty="0"/>
-          </a:p>
-        </p:txBody>
-      </p:sp>
-      <p:sp>
-        <p:nvSpPr>
-          <p:cNvPr id="7" name="Shape 4"/>
-          <p:cNvSpPr/>
-          <p:nvPr/>
-        </p:nvSpPr>
-        <p:spPr>
-          <a:xfrm>
-            <a:off x="640080" y="2971800"/>
-            <a:ext cx="502920" cy="502920"/>
-          </a:xfrm>
-          <a:prstGeom prst="ellipse">
-            <a:avLst/>
-          </a:prstGeom>
-          <a:solidFill>
-            <a:srgbClr val="2F3C7E"/>
-          </a:solidFill>
-          <a:ln/>
-        </p:spPr>
-      </p:sp>
-      <p:pic>
-        <p:nvPicPr>
-          <p:cNvPr id="8" name="Image 1" descr="preencoded.png">    </p:cNvPr>
-          <p:cNvPicPr>
-            <a:picLocks noChangeAspect="1"/>
-          </p:cNvPicPr>
-          <p:nvPr/>
-        </p:nvPicPr>
-        <p:blipFill>
-          <a:blip r:embed="rId2"/>
-          <a:stretch>
-            <a:fillRect/>
-          </a:stretch>
-        </p:blipFill>
-        <p:spPr>
-          <a:xfrm>
-            <a:off x="750722" y="3082442"/>
-            <a:ext cx="281635" cy="281635"/>
-          </a:xfrm>
-          <a:prstGeom prst="rect">
-            <a:avLst/>
-          </a:prstGeom>
-        </p:spPr>
-      </p:pic>
-      <p:sp>
-        <p:nvSpPr>
-          <p:cNvPr id="9" name="Text 5"/>
-          <p:cNvSpPr txBox="1"/>
-          <p:nvPr/>
-        </p:nvSpPr>
-        <p:spPr>
-          <a:xfrm>
-            <a:off x="1371600" y="2862072"/>
-            <a:ext cx="10241280" cy="411480"/>
-          </a:xfrm>
-          <a:prstGeom prst="rect">
-            <a:avLst/>
-          </a:prstGeom>
-          <a:noFill/>
-          <a:ln/>
-        </p:spPr>
-        <p:txBody>
-          <a:bodyPr wrap="square" lIns="0" tIns="0" rIns="0" bIns="0" rtlCol="0" anchor="ctr"/>
-          <a:lstStyle/>
-          <a:p>
-            <a:pPr indent="0" marL="0">
-              <a:buNone/>
-            </a:pPr>
-            <a:r>
-              <a:rPr lang="en-US" sz="1600" b="1" dirty="0">
-                <a:solidFill>
-                  <a:srgbClr val="2F3C7E"/>
+              <a:t>May mắn: MIMIC ghi ECG SONG SONG với PPG → dùng R-peak trên ECG làm đáp án chuẩn, khớp từng nhịp (±150ms, sau khi bù độ trễ mạch PTT)</a:t>
+            </a:r>
+            <a:endParaRPr lang="en-US" sz="1400" dirty="0"/>
+          </a:p>
+          <a:p>
+            <a:pPr marL="342900" indent="-342900">
+              <a:spcAft>
+                <a:spcPts val="800"/>
+              </a:spcAft>
+              <a:buSzPct val="100000"/>
+              <a:buChar char="•"/>
+            </a:pPr>
+            <a:r>
+              <a:rPr lang="en-US" sz="1400" dirty="0">
+                <a:solidFill>
+                  <a:srgbClr val="333333"/>
                 </a:solidFill>
                 <a:latin typeface="Calibri" pitchFamily="34" charset="0"/>
                 <a:ea typeface="Calibri" pitchFamily="34" charset="-122"/>
                 <a:cs typeface="Calibri" pitchFamily="34" charset="-120"/>
               </a:rPr>
-              <a:t>Parity test — khóa an toàn</a:t>
-            </a:r>
-            <a:endParaRPr lang="en-US" sz="1600" dirty="0"/>
-          </a:p>
-        </p:txBody>
-      </p:sp>
-      <p:sp>
-        <p:nvSpPr>
-          <p:cNvPr id="10" name="Text 6"/>
-          <p:cNvSpPr txBox="1"/>
-          <p:nvPr/>
-        </p:nvSpPr>
-        <p:spPr>
-          <a:xfrm>
-            <a:off x="1371600" y="3300984"/>
-            <a:ext cx="10241280" cy="1097280"/>
-          </a:xfrm>
-          <a:prstGeom prst="rect">
-            <a:avLst/>
-          </a:prstGeom>
-          <a:noFill/>
-          <a:ln/>
-        </p:spPr>
-        <p:txBody>
-          <a:bodyPr wrap="square" lIns="0" tIns="0" rIns="0" bIns="0" rtlCol="0" anchor="ctr"/>
-          <a:lstStyle/>
-          <a:p>
-            <a:pPr indent="0" marL="0">
-              <a:buNone/>
-            </a:pPr>
-            <a:r>
-              <a:rPr lang="en-US" sz="1300" dirty="0">
-                <a:solidFill>
-                  <a:srgbClr val="444444"/>
+              <a:t>Kết quả: nhóm Normal F1 = 0.991 (gần hoàn hảo); nhóm AFib 0.855 — thấp hơn vì biên độ mạch AF thay đổi từng nhịp</a:t>
+            </a:r>
+            <a:endParaRPr lang="en-US" sz="1400" dirty="0"/>
+          </a:p>
+          <a:p>
+            <a:pPr marL="342900" indent="-342900">
+              <a:spcAft>
+                <a:spcPts val="800"/>
+              </a:spcAft>
+              <a:buSzPct val="100000"/>
+              <a:buChar char="•"/>
+            </a:pPr>
+            <a:r>
+              <a:rPr lang="en-US" sz="1400" dirty="0">
+                <a:solidFill>
+                  <a:srgbClr val="333333"/>
                 </a:solidFill>
                 <a:latin typeface="Calibri" pitchFamily="34" charset="0"/>
                 <a:ea typeface="Calibri" pitchFamily="34" charset="-122"/>
                 <a:cs typeface="Calibri" pitchFamily="34" charset="-120"/>
               </a:rPr>
-              <a:t>Service tính đặc trưng phải GIỐNG HỆT lab đến 6 chữ số thập phân — chạy tự động trước mỗi lần deploy. Chặn lớp bug 'lệch âm thầm' giữa nơi huấn luyện và nơi phục vụ.</a:t>
-            </a:r>
-            <a:endParaRPr lang="en-US" sz="1300" dirty="0"/>
-          </a:p>
-        </p:txBody>
-      </p:sp>
-      <p:sp>
-        <p:nvSpPr>
-          <p:cNvPr id="11" name="Shape 7"/>
-          <p:cNvSpPr/>
-          <p:nvPr/>
-        </p:nvSpPr>
-        <p:spPr>
-          <a:xfrm>
-            <a:off x="640080" y="4599432"/>
-            <a:ext cx="502920" cy="502920"/>
-          </a:xfrm>
-          <a:prstGeom prst="ellipse">
-            <a:avLst/>
-          </a:prstGeom>
-          <a:solidFill>
-            <a:srgbClr val="2F3C7E"/>
-          </a:solidFill>
-          <a:ln/>
-        </p:spPr>
-      </p:sp>
-      <p:pic>
-        <p:nvPicPr>
-          <p:cNvPr id="12" name="Image 2" descr="preencoded.png">    </p:cNvPr>
-          <p:cNvPicPr>
-            <a:picLocks noChangeAspect="1"/>
-          </p:cNvPicPr>
-          <p:nvPr/>
-        </p:nvPicPr>
-        <p:blipFill>
-          <a:blip r:embed="rId3"/>
-          <a:stretch>
-            <a:fillRect/>
-          </a:stretch>
-        </p:blipFill>
-        <p:spPr>
-          <a:xfrm>
-            <a:off x="750722" y="4710074"/>
-            <a:ext cx="281635" cy="281635"/>
-          </a:xfrm>
-          <a:prstGeom prst="rect">
-            <a:avLst/>
-          </a:prstGeom>
-        </p:spPr>
-      </p:pic>
-      <p:sp>
-        <p:nvSpPr>
-          <p:cNvPr id="13" name="Text 8"/>
+              <a:t>So kết quả đo: nhịp tim PPG lệch ECG trung bình chỉ 3.5 bpm (r = 0.94) — đủ tin cho sàng lọc; riêng giá trị HRV tuyệt đối thì PPG 'phóng đại' (hiện tượng PRV ≠ HRV kinh điển trong y văn)</a:t>
+            </a:r>
+            <a:endParaRPr lang="en-US" sz="1400" dirty="0"/>
+          </a:p>
+        </p:txBody>
+      </p:sp>
+      <p:sp>
+        <p:nvSpPr>
+          <p:cNvPr id="4" name="Text 2"/>
           <p:cNvSpPr txBox="1"/>
           <p:nvPr/>
         </p:nvSpPr>
         <p:spPr>
           <a:xfrm>
-            <a:off x="1371600" y="4489704"/>
-            <a:ext cx="10241280" cy="411480"/>
+            <a:off x="7772400" y="1554480"/>
+            <a:ext cx="3749040" cy="822960"/>
           </a:xfrm>
           <a:prstGeom prst="rect">
             <a:avLst/>
@@ -6871,34 +6578,73 @@
           <a:bodyPr wrap="square" lIns="0" tIns="0" rIns="0" bIns="0" rtlCol="0" anchor="ctr"/>
           <a:lstStyle/>
           <a:p>
-            <a:pPr indent="0" marL="0">
-              <a:buNone/>
-            </a:pPr>
-            <a:r>
-              <a:rPr lang="en-US" sz="1600" b="1" dirty="0">
-                <a:solidFill>
-                  <a:srgbClr val="2F3C7E"/>
+            <a:pPr algn="ctr" indent="0" marL="0">
+              <a:buNone/>
+            </a:pPr>
+            <a:r>
+              <a:rPr lang="en-US" sz="4400" b="1" dirty="0">
+                <a:solidFill>
+                  <a:srgbClr val="1B7A43"/>
+                </a:solidFill>
+                <a:latin typeface="Arial" pitchFamily="34" charset="0"/>
+                <a:ea typeface="Arial" pitchFamily="34" charset="-122"/>
+                <a:cs typeface="Arial" pitchFamily="34" charset="-120"/>
+              </a:rPr>
+              <a:t>0.991</a:t>
+            </a:r>
+            <a:endParaRPr lang="en-US" sz="4400" dirty="0"/>
+          </a:p>
+        </p:txBody>
+      </p:sp>
+      <p:sp>
+        <p:nvSpPr>
+          <p:cNvPr id="5" name="Text 3"/>
+          <p:cNvSpPr txBox="1"/>
+          <p:nvPr/>
+        </p:nvSpPr>
+        <p:spPr>
+          <a:xfrm>
+            <a:off x="7772400" y="2395728"/>
+            <a:ext cx="3749040" cy="640080"/>
+          </a:xfrm>
+          <a:prstGeom prst="rect">
+            <a:avLst/>
+          </a:prstGeom>
+          <a:noFill/>
+          <a:ln/>
+        </p:spPr>
+        <p:txBody>
+          <a:bodyPr wrap="square" lIns="0" tIns="0" rIns="0" bIns="0" rtlCol="0" anchor="ctr"/>
+          <a:lstStyle/>
+          <a:p>
+            <a:pPr algn="ctr" indent="0" marL="0">
+              <a:buNone/>
+            </a:pPr>
+            <a:r>
+              <a:rPr lang="en-US" sz="1300" dirty="0">
+                <a:solidFill>
+                  <a:srgbClr val="64748B"/>
                 </a:solidFill>
                 <a:latin typeface="Calibri" pitchFamily="34" charset="0"/>
                 <a:ea typeface="Calibri" pitchFamily="34" charset="-122"/>
                 <a:cs typeface="Calibri" pitchFamily="34" charset="-120"/>
               </a:rPr>
-              <a:t>Đường đi trong production</a:t>
-            </a:r>
-            <a:endParaRPr lang="en-US" sz="1600" dirty="0"/>
-          </a:p>
-        </p:txBody>
-      </p:sp>
-      <p:sp>
-        <p:nvSpPr>
-          <p:cNvPr id="14" name="Text 9"/>
+              <a:t>F1 dò nhịp nhóm Normal — mỗi nhịp ECG đều được PPG 'bắt' đúng chỗ</a:t>
+            </a:r>
+            <a:endParaRPr lang="en-US" sz="1300" dirty="0"/>
+          </a:p>
+        </p:txBody>
+      </p:sp>
+      <p:sp>
+        <p:nvSpPr>
+          <p:cNvPr id="6" name="Text 4"/>
           <p:cNvSpPr txBox="1"/>
           <p:nvPr/>
         </p:nvSpPr>
         <p:spPr>
           <a:xfrm>
-            <a:off x="1371600" y="4928616"/>
-            <a:ext cx="10241280" cy="1097280"/>
+            <a:off x="7772400" y="3383280"/>
+            <a:ext cx="3749040" cy="822960"/>
           </a:xfrm>
           <a:prstGeom prst="rect">
             <a:avLst/>
@@ -6910,19 +6656,58 @@
           <a:bodyPr wrap="square" lIns="0" tIns="0" rIns="0" bIns="0" rtlCol="0" anchor="ctr"/>
           <a:lstStyle/>
           <a:p>
-            <a:pPr indent="0" marL="0">
+            <a:pPr algn="ctr" indent="0" marL="0">
+              <a:buNone/>
+            </a:pPr>
+            <a:r>
+              <a:rPr lang="en-US" sz="4400" b="1" dirty="0">
+                <a:solidFill>
+                  <a:srgbClr val="2F3C7E"/>
+                </a:solidFill>
+                <a:latin typeface="Arial" pitchFamily="34" charset="0"/>
+                <a:ea typeface="Arial" pitchFamily="34" charset="-122"/>
+                <a:cs typeface="Arial" pitchFamily="34" charset="-120"/>
+              </a:rPr>
+              <a:t>3.5 bpm</a:t>
+            </a:r>
+            <a:endParaRPr lang="en-US" sz="4400" dirty="0"/>
+          </a:p>
+        </p:txBody>
+      </p:sp>
+      <p:sp>
+        <p:nvSpPr>
+          <p:cNvPr id="7" name="Text 5"/>
+          <p:cNvSpPr txBox="1"/>
+          <p:nvPr/>
+        </p:nvSpPr>
+        <p:spPr>
+          <a:xfrm>
+            <a:off x="7772400" y="4224528"/>
+            <a:ext cx="3749040" cy="640080"/>
+          </a:xfrm>
+          <a:prstGeom prst="rect">
+            <a:avLst/>
+          </a:prstGeom>
+          <a:noFill/>
+          <a:ln/>
+        </p:spPr>
+        <p:txBody>
+          <a:bodyPr wrap="square" lIns="0" tIns="0" rIns="0" bIns="0" rtlCol="0" anchor="ctr"/>
+          <a:lstStyle/>
+          <a:p>
+            <a:pPr algn="ctr" indent="0" marL="0">
               <a:buNone/>
             </a:pPr>
             <a:r>
               <a:rPr lang="en-US" sz="1300" dirty="0">
                 <a:solidFill>
-                  <a:srgbClr val="444444"/>
+                  <a:srgbClr val="64748B"/>
                 </a:solidFill>
                 <a:latin typeface="Calibri" pitchFamily="34" charset="0"/>
                 <a:ea typeface="Calibri" pitchFamily="34" charset="-122"/>
                 <a:cs typeface="Calibri" pitchFamily="34" charset="-120"/>
               </a:rPr>
-              <a:t>Thiết bị đo → CSV lên server → hàng đợi → AI chấm P(AFib) + vẽ sẵn đồ thị → lưu hồ sơ → P cao thì chuông bác sĩ reo TỨC THÌ (realtime WS).</a:t>
+              <a:t>sai số nhịp tim PPG vs ECG trên 1.400 cửa sổ</a:t>
             </a:r>
             <a:endParaRPr lang="en-US" sz="1300" dirty="0"/>
           </a:p>
@@ -6939,6 +6724,436 @@
 <file path=ppt/slides/slide18.xml><?xml version="1.0" encoding="utf-8"?>
 <p:sld xmlns:a="http://schemas.openxmlformats.org/drawingml/2006/main" xmlns:r="http://schemas.openxmlformats.org/officeDocument/2006/relationships" xmlns:p="http://schemas.openxmlformats.org/presentationml/2006/main">
   <p:cSld name="Slide 18">
+    <p:spTree>
+      <p:nvGrpSpPr>
+        <p:cNvPr id="1" name=""/>
+        <p:cNvGrpSpPr/>
+        <p:nvPr/>
+      </p:nvGrpSpPr>
+      <p:grpSpPr>
+        <a:xfrm>
+          <a:off x="0" y="0"/>
+          <a:ext cx="0" cy="0"/>
+          <a:chOff x="0" y="0"/>
+          <a:chExt cx="0" cy="0"/>
+        </a:xfrm>
+      </p:grpSpPr>
+      <p:sp>
+        <p:nvSpPr>
+          <p:cNvPr id="2" name="Text 0"/>
+          <p:cNvSpPr txBox="1"/>
+          <p:nvPr/>
+        </p:nvSpPr>
+        <p:spPr>
+          <a:xfrm>
+            <a:off x="502920" y="292608"/>
+            <a:ext cx="11183112" cy="685800"/>
+          </a:xfrm>
+          <a:prstGeom prst="rect">
+            <a:avLst/>
+          </a:prstGeom>
+          <a:noFill/>
+          <a:ln/>
+        </p:spPr>
+        <p:txBody>
+          <a:bodyPr wrap="square" lIns="0" tIns="0" rIns="0" bIns="0" rtlCol="0" anchor="ctr"/>
+          <a:lstStyle/>
+          <a:p>
+            <a:pPr indent="0" marL="0">
+              <a:buNone/>
+            </a:pPr>
+            <a:r>
+              <a:rPr lang="en-US" sz="3000" b="1" dirty="0">
+                <a:solidFill>
+                  <a:srgbClr val="2F3C7E"/>
+                </a:solidFill>
+                <a:latin typeface="Cambria" pitchFamily="34" charset="0"/>
+                <a:ea typeface="Cambria" pitchFamily="34" charset="-122"/>
+                <a:cs typeface="Cambria" pitchFamily="34" charset="-120"/>
+              </a:rPr>
+              <a:t>Từ notebook đến sản phẩm thật</a:t>
+            </a:r>
+            <a:endParaRPr lang="en-US" sz="3000" dirty="0"/>
+          </a:p>
+        </p:txBody>
+      </p:sp>
+      <p:sp>
+        <p:nvSpPr>
+          <p:cNvPr id="3" name="Shape 1"/>
+          <p:cNvSpPr/>
+          <p:nvPr/>
+        </p:nvSpPr>
+        <p:spPr>
+          <a:xfrm>
+            <a:off x="640080" y="1344168"/>
+            <a:ext cx="502920" cy="502920"/>
+          </a:xfrm>
+          <a:prstGeom prst="ellipse">
+            <a:avLst/>
+          </a:prstGeom>
+          <a:solidFill>
+            <a:srgbClr val="990011"/>
+          </a:solidFill>
+          <a:ln/>
+        </p:spPr>
+      </p:sp>
+      <p:pic>
+        <p:nvPicPr>
+          <p:cNvPr id="4" name="Image 0" descr="preencoded.png">    </p:cNvPr>
+          <p:cNvPicPr>
+            <a:picLocks noChangeAspect="1"/>
+          </p:cNvPicPr>
+          <p:nvPr/>
+        </p:nvPicPr>
+        <p:blipFill>
+          <a:blip r:embed="rId1"/>
+          <a:stretch>
+            <a:fillRect/>
+          </a:stretch>
+        </p:blipFill>
+        <p:spPr>
+          <a:xfrm>
+            <a:off x="750722" y="1454810"/>
+            <a:ext cx="281635" cy="281635"/>
+          </a:xfrm>
+          <a:prstGeom prst="rect">
+            <a:avLst/>
+          </a:prstGeom>
+        </p:spPr>
+      </p:pic>
+      <p:sp>
+        <p:nvSpPr>
+          <p:cNvPr id="5" name="Text 2"/>
+          <p:cNvSpPr txBox="1"/>
+          <p:nvPr/>
+        </p:nvSpPr>
+        <p:spPr>
+          <a:xfrm>
+            <a:off x="1371600" y="1234440"/>
+            <a:ext cx="10241280" cy="411480"/>
+          </a:xfrm>
+          <a:prstGeom prst="rect">
+            <a:avLst/>
+          </a:prstGeom>
+          <a:noFill/>
+          <a:ln/>
+        </p:spPr>
+        <p:txBody>
+          <a:bodyPr wrap="square" lIns="0" tIns="0" rIns="0" bIns="0" rtlCol="0" anchor="ctr"/>
+          <a:lstStyle/>
+          <a:p>
+            <a:pPr indent="0" marL="0">
+              <a:buNone/>
+            </a:pPr>
+            <a:r>
+              <a:rPr lang="en-US" sz="1600" b="1" dirty="0">
+                <a:solidFill>
+                  <a:srgbClr val="2F3C7E"/>
+                </a:solidFill>
+                <a:latin typeface="Calibri" pitchFamily="34" charset="0"/>
+                <a:ea typeface="Calibri" pitchFamily="34" charset="-122"/>
+                <a:cs typeface="Calibri" pitchFamily="34" charset="-120"/>
+              </a:rPr>
+              <a:t>SQI — người gác cổng</a:t>
+            </a:r>
+            <a:endParaRPr lang="en-US" sz="1600" dirty="0"/>
+          </a:p>
+        </p:txBody>
+      </p:sp>
+      <p:sp>
+        <p:nvSpPr>
+          <p:cNvPr id="6" name="Text 3"/>
+          <p:cNvSpPr txBox="1"/>
+          <p:nvPr/>
+        </p:nvSpPr>
+        <p:spPr>
+          <a:xfrm>
+            <a:off x="1371600" y="1673352"/>
+            <a:ext cx="10241280" cy="1097280"/>
+          </a:xfrm>
+          <a:prstGeom prst="rect">
+            <a:avLst/>
+          </a:prstGeom>
+          <a:noFill/>
+          <a:ln/>
+        </p:spPr>
+        <p:txBody>
+          <a:bodyPr wrap="square" lIns="0" tIns="0" rIns="0" bIns="0" rtlCol="0" anchor="ctr"/>
+          <a:lstStyle/>
+          <a:p>
+            <a:pPr indent="0" marL="0">
+              <a:buNone/>
+            </a:pPr>
+            <a:r>
+              <a:rPr lang="en-US" sz="1300" dirty="0">
+                <a:solidFill>
+                  <a:srgbClr val="444444"/>
+                </a:solidFill>
+                <a:latin typeface="Calibri" pitchFamily="34" charset="0"/>
+                <a:ea typeface="Calibri" pitchFamily="34" charset="-122"/>
+                <a:cs typeface="Calibri" pitchFamily="34" charset="-120"/>
+              </a:rPr>
+              <a:t>Tín hiệu không giống sóng mạch (nhiễu, đeo lỏng) → TỪ CHỐI phân loại thay vì đoán bừa. Ngưỡng đặt bằng đo đạc thật: sóng thật dồn ≥86% năng lượng vào dải nhịp tim, nhiễu chỉ ~41%.</a:t>
+            </a:r>
+            <a:endParaRPr lang="en-US" sz="1300" dirty="0"/>
+          </a:p>
+        </p:txBody>
+      </p:sp>
+      <p:sp>
+        <p:nvSpPr>
+          <p:cNvPr id="7" name="Shape 4"/>
+          <p:cNvSpPr/>
+          <p:nvPr/>
+        </p:nvSpPr>
+        <p:spPr>
+          <a:xfrm>
+            <a:off x="640080" y="2971800"/>
+            <a:ext cx="502920" cy="502920"/>
+          </a:xfrm>
+          <a:prstGeom prst="ellipse">
+            <a:avLst/>
+          </a:prstGeom>
+          <a:solidFill>
+            <a:srgbClr val="2F3C7E"/>
+          </a:solidFill>
+          <a:ln/>
+        </p:spPr>
+      </p:sp>
+      <p:pic>
+        <p:nvPicPr>
+          <p:cNvPr id="8" name="Image 1" descr="preencoded.png">    </p:cNvPr>
+          <p:cNvPicPr>
+            <a:picLocks noChangeAspect="1"/>
+          </p:cNvPicPr>
+          <p:nvPr/>
+        </p:nvPicPr>
+        <p:blipFill>
+          <a:blip r:embed="rId2"/>
+          <a:stretch>
+            <a:fillRect/>
+          </a:stretch>
+        </p:blipFill>
+        <p:spPr>
+          <a:xfrm>
+            <a:off x="750722" y="3082442"/>
+            <a:ext cx="281635" cy="281635"/>
+          </a:xfrm>
+          <a:prstGeom prst="rect">
+            <a:avLst/>
+          </a:prstGeom>
+        </p:spPr>
+      </p:pic>
+      <p:sp>
+        <p:nvSpPr>
+          <p:cNvPr id="9" name="Text 5"/>
+          <p:cNvSpPr txBox="1"/>
+          <p:nvPr/>
+        </p:nvSpPr>
+        <p:spPr>
+          <a:xfrm>
+            <a:off x="1371600" y="2862072"/>
+            <a:ext cx="10241280" cy="411480"/>
+          </a:xfrm>
+          <a:prstGeom prst="rect">
+            <a:avLst/>
+          </a:prstGeom>
+          <a:noFill/>
+          <a:ln/>
+        </p:spPr>
+        <p:txBody>
+          <a:bodyPr wrap="square" lIns="0" tIns="0" rIns="0" bIns="0" rtlCol="0" anchor="ctr"/>
+          <a:lstStyle/>
+          <a:p>
+            <a:pPr indent="0" marL="0">
+              <a:buNone/>
+            </a:pPr>
+            <a:r>
+              <a:rPr lang="en-US" sz="1600" b="1" dirty="0">
+                <a:solidFill>
+                  <a:srgbClr val="2F3C7E"/>
+                </a:solidFill>
+                <a:latin typeface="Calibri" pitchFamily="34" charset="0"/>
+                <a:ea typeface="Calibri" pitchFamily="34" charset="-122"/>
+                <a:cs typeface="Calibri" pitchFamily="34" charset="-120"/>
+              </a:rPr>
+              <a:t>Parity test — khóa an toàn</a:t>
+            </a:r>
+            <a:endParaRPr lang="en-US" sz="1600" dirty="0"/>
+          </a:p>
+        </p:txBody>
+      </p:sp>
+      <p:sp>
+        <p:nvSpPr>
+          <p:cNvPr id="10" name="Text 6"/>
+          <p:cNvSpPr txBox="1"/>
+          <p:nvPr/>
+        </p:nvSpPr>
+        <p:spPr>
+          <a:xfrm>
+            <a:off x="1371600" y="3300984"/>
+            <a:ext cx="10241280" cy="1097280"/>
+          </a:xfrm>
+          <a:prstGeom prst="rect">
+            <a:avLst/>
+          </a:prstGeom>
+          <a:noFill/>
+          <a:ln/>
+        </p:spPr>
+        <p:txBody>
+          <a:bodyPr wrap="square" lIns="0" tIns="0" rIns="0" bIns="0" rtlCol="0" anchor="ctr"/>
+          <a:lstStyle/>
+          <a:p>
+            <a:pPr indent="0" marL="0">
+              <a:buNone/>
+            </a:pPr>
+            <a:r>
+              <a:rPr lang="en-US" sz="1300" dirty="0">
+                <a:solidFill>
+                  <a:srgbClr val="444444"/>
+                </a:solidFill>
+                <a:latin typeface="Calibri" pitchFamily="34" charset="0"/>
+                <a:ea typeface="Calibri" pitchFamily="34" charset="-122"/>
+                <a:cs typeface="Calibri" pitchFamily="34" charset="-120"/>
+              </a:rPr>
+              <a:t>Service tính đặc trưng phải GIỐNG HỆT lab đến 6 chữ số thập phân — chạy tự động trước mỗi lần deploy. Chặn lớp bug 'lệch âm thầm' giữa nơi huấn luyện và nơi phục vụ.</a:t>
+            </a:r>
+            <a:endParaRPr lang="en-US" sz="1300" dirty="0"/>
+          </a:p>
+        </p:txBody>
+      </p:sp>
+      <p:sp>
+        <p:nvSpPr>
+          <p:cNvPr id="11" name="Shape 7"/>
+          <p:cNvSpPr/>
+          <p:nvPr/>
+        </p:nvSpPr>
+        <p:spPr>
+          <a:xfrm>
+            <a:off x="640080" y="4599432"/>
+            <a:ext cx="502920" cy="502920"/>
+          </a:xfrm>
+          <a:prstGeom prst="ellipse">
+            <a:avLst/>
+          </a:prstGeom>
+          <a:solidFill>
+            <a:srgbClr val="2F3C7E"/>
+          </a:solidFill>
+          <a:ln/>
+        </p:spPr>
+      </p:sp>
+      <p:pic>
+        <p:nvPicPr>
+          <p:cNvPr id="12" name="Image 2" descr="preencoded.png">    </p:cNvPr>
+          <p:cNvPicPr>
+            <a:picLocks noChangeAspect="1"/>
+          </p:cNvPicPr>
+          <p:nvPr/>
+        </p:nvPicPr>
+        <p:blipFill>
+          <a:blip r:embed="rId3"/>
+          <a:stretch>
+            <a:fillRect/>
+          </a:stretch>
+        </p:blipFill>
+        <p:spPr>
+          <a:xfrm>
+            <a:off x="750722" y="4710074"/>
+            <a:ext cx="281635" cy="281635"/>
+          </a:xfrm>
+          <a:prstGeom prst="rect">
+            <a:avLst/>
+          </a:prstGeom>
+        </p:spPr>
+      </p:pic>
+      <p:sp>
+        <p:nvSpPr>
+          <p:cNvPr id="13" name="Text 8"/>
+          <p:cNvSpPr txBox="1"/>
+          <p:nvPr/>
+        </p:nvSpPr>
+        <p:spPr>
+          <a:xfrm>
+            <a:off x="1371600" y="4489704"/>
+            <a:ext cx="10241280" cy="411480"/>
+          </a:xfrm>
+          <a:prstGeom prst="rect">
+            <a:avLst/>
+          </a:prstGeom>
+          <a:noFill/>
+          <a:ln/>
+        </p:spPr>
+        <p:txBody>
+          <a:bodyPr wrap="square" lIns="0" tIns="0" rIns="0" bIns="0" rtlCol="0" anchor="ctr"/>
+          <a:lstStyle/>
+          <a:p>
+            <a:pPr indent="0" marL="0">
+              <a:buNone/>
+            </a:pPr>
+            <a:r>
+              <a:rPr lang="en-US" sz="1600" b="1" dirty="0">
+                <a:solidFill>
+                  <a:srgbClr val="2F3C7E"/>
+                </a:solidFill>
+                <a:latin typeface="Calibri" pitchFamily="34" charset="0"/>
+                <a:ea typeface="Calibri" pitchFamily="34" charset="-122"/>
+                <a:cs typeface="Calibri" pitchFamily="34" charset="-120"/>
+              </a:rPr>
+              <a:t>Đường đi trong production</a:t>
+            </a:r>
+            <a:endParaRPr lang="en-US" sz="1600" dirty="0"/>
+          </a:p>
+        </p:txBody>
+      </p:sp>
+      <p:sp>
+        <p:nvSpPr>
+          <p:cNvPr id="14" name="Text 9"/>
+          <p:cNvSpPr txBox="1"/>
+          <p:nvPr/>
+        </p:nvSpPr>
+        <p:spPr>
+          <a:xfrm>
+            <a:off x="1371600" y="4928616"/>
+            <a:ext cx="10241280" cy="1097280"/>
+          </a:xfrm>
+          <a:prstGeom prst="rect">
+            <a:avLst/>
+          </a:prstGeom>
+          <a:noFill/>
+          <a:ln/>
+        </p:spPr>
+        <p:txBody>
+          <a:bodyPr wrap="square" lIns="0" tIns="0" rIns="0" bIns="0" rtlCol="0" anchor="ctr"/>
+          <a:lstStyle/>
+          <a:p>
+            <a:pPr indent="0" marL="0">
+              <a:buNone/>
+            </a:pPr>
+            <a:r>
+              <a:rPr lang="en-US" sz="1300" dirty="0">
+                <a:solidFill>
+                  <a:srgbClr val="444444"/>
+                </a:solidFill>
+                <a:latin typeface="Calibri" pitchFamily="34" charset="0"/>
+                <a:ea typeface="Calibri" pitchFamily="34" charset="-122"/>
+                <a:cs typeface="Calibri" pitchFamily="34" charset="-120"/>
+              </a:rPr>
+              <a:t>Thiết bị đo → CSV lên server → hàng đợi → AI chấm P(AFib) + vẽ sẵn đồ thị → lưu hồ sơ → P cao thì chuông bác sĩ reo TỨC THÌ (realtime WS).</a:t>
+            </a:r>
+            <a:endParaRPr lang="en-US" sz="1300" dirty="0"/>
+          </a:p>
+        </p:txBody>
+      </p:sp>
+    </p:spTree>
+  </p:cSld>
+  <p:clrMapOvr>
+    <a:masterClrMapping/>
+  </p:clrMapOvr>
+</p:sld>
+</file>
+
+<file path=ppt/slides/slide19.xml><?xml version="1.0" encoding="utf-8"?>
+<p:sld xmlns:a="http://schemas.openxmlformats.org/drawingml/2006/main" xmlns:r="http://schemas.openxmlformats.org/officeDocument/2006/relationships" xmlns:p="http://schemas.openxmlformats.org/presentationml/2006/main">
+  <p:cSld name="Slide 19">
     <p:bg>
       <p:bgPr>
         <a:solidFill>
@@ -9947,7 +10162,7 @@
                 <a:ea typeface="Cambria" pitchFamily="34" charset="-122"/>
                 <a:cs typeface="Cambria" pitchFamily="34" charset="-120"/>
               </a:rPr>
-              <a:t>16 đặc trưng HRV — 3 cách đo 'độ loạn'</a:t>
+              <a:t>Máy học 'ăn' gì? — từ dãy NN đến bảng số</a:t>
             </a:r>
             <a:endParaRPr lang="en-US" sz="3000" dirty="0"/>
           </a:p>
@@ -9961,21 +10176,1977 @@
         </p:nvSpPr>
         <p:spPr>
           <a:xfrm>
-            <a:off x="640080" y="1344168"/>
-            <a:ext cx="502920" cy="502920"/>
-          </a:xfrm>
-          <a:prstGeom prst="ellipse">
-            <a:avLst/>
+            <a:off x="640080" y="1188720"/>
+            <a:ext cx="4937760" cy="1115568"/>
+          </a:xfrm>
+          <a:prstGeom prst="roundRect">
+            <a:avLst>
+              <a:gd name="adj" fmla="val 9836"/>
+            </a:avLst>
+          </a:prstGeom>
+          <a:solidFill>
+            <a:srgbClr val="FCF6F5"/>
+          </a:solidFill>
+          <a:ln w="12700">
+            <a:solidFill>
+              <a:srgbClr val="E3D5D3"/>
+            </a:solidFill>
+            <a:prstDash val="solid"/>
+          </a:ln>
+        </p:spPr>
+      </p:sp>
+      <p:sp>
+        <p:nvSpPr>
+          <p:cNvPr id="4" name="Text 2"/>
+          <p:cNvSpPr txBox="1"/>
+          <p:nvPr/>
+        </p:nvSpPr>
+        <p:spPr>
+          <a:xfrm>
+            <a:off x="914400" y="1298448"/>
+            <a:ext cx="4480560" cy="365760"/>
+          </a:xfrm>
+          <a:prstGeom prst="rect">
+            <a:avLst/>
+          </a:prstGeom>
+          <a:noFill/>
+          <a:ln/>
+        </p:spPr>
+        <p:txBody>
+          <a:bodyPr wrap="square" lIns="0" tIns="0" rIns="0" bIns="0" rtlCol="0" anchor="ctr"/>
+          <a:lstStyle/>
+          <a:p>
+            <a:pPr indent="0" marL="0">
+              <a:buNone/>
+            </a:pPr>
+            <a:r>
+              <a:rPr lang="en-US" sz="1500" b="1" dirty="0">
+                <a:solidFill>
+                  <a:srgbClr val="2F3C7E"/>
+                </a:solidFill>
+                <a:latin typeface="Calibri" pitchFamily="34" charset="0"/>
+                <a:ea typeface="Calibri" pitchFamily="34" charset="-122"/>
+                <a:cs typeface="Calibri" pitchFamily="34" charset="-120"/>
+              </a:rPr>
+              <a:t>1. Chuỗi NN thô</a:t>
+            </a:r>
+            <a:endParaRPr lang="en-US" sz="1500" dirty="0"/>
+          </a:p>
+        </p:txBody>
+      </p:sp>
+      <p:sp>
+        <p:nvSpPr>
+          <p:cNvPr id="5" name="Text 3"/>
+          <p:cNvSpPr txBox="1"/>
+          <p:nvPr/>
+        </p:nvSpPr>
+        <p:spPr>
+          <a:xfrm>
+            <a:off x="914400" y="1609344"/>
+            <a:ext cx="4480560" cy="640080"/>
+          </a:xfrm>
+          <a:prstGeom prst="rect">
+            <a:avLst/>
+          </a:prstGeom>
+          <a:noFill/>
+          <a:ln/>
+        </p:spPr>
+        <p:txBody>
+          <a:bodyPr wrap="square" lIns="0" tIns="0" rIns="0" bIns="0" rtlCol="0" anchor="ctr"/>
+          <a:lstStyle/>
+          <a:p>
+            <a:pPr indent="0" marL="0">
+              <a:buNone/>
+            </a:pPr>
+            <a:r>
+              <a:rPr lang="en-US" sz="1150" dirty="0">
+                <a:solidFill>
+                  <a:srgbClr val="444444"/>
+                </a:solidFill>
+                <a:latin typeface="Calibri" pitchFamily="34" charset="0"/>
+                <a:ea typeface="Calibri" pitchFamily="34" charset="-122"/>
+                <a:cs typeface="Calibri" pitchFamily="34" charset="-120"/>
+              </a:rPr>
+              <a:t>Mỗi cửa sổ 30s cho ~35 số...</a:t>
+            </a:r>
+            <a:endParaRPr lang="en-US" sz="1150" dirty="0"/>
+          </a:p>
+          <a:p>
+            <a:pPr indent="0" marL="0">
+              <a:buNone/>
+            </a:pPr>
+            <a:r>
+              <a:rPr lang="en-US" sz="1150" dirty="0">
+                <a:solidFill>
+                  <a:srgbClr val="444444"/>
+                </a:solidFill>
+                <a:latin typeface="Calibri" pitchFamily="34" charset="0"/>
+                <a:ea typeface="Calibri" pitchFamily="34" charset="-122"/>
+                <a:cs typeface="Calibri" pitchFamily="34" charset="-120"/>
+              </a:rPr>
+              <a:t>nhưng MỖI LẦN MỖI KHÁC:</a:t>
+            </a:r>
+            <a:endParaRPr lang="en-US" sz="1150" dirty="0"/>
+          </a:p>
+          <a:p>
+            <a:pPr indent="0" marL="0">
+              <a:buNone/>
+            </a:pPr>
+            <a:r>
+              <a:rPr lang="en-US" sz="1150" dirty="0">
+                <a:solidFill>
+                  <a:srgbClr val="444444"/>
+                </a:solidFill>
+                <a:latin typeface="Calibri" pitchFamily="34" charset="0"/>
+                <a:ea typeface="Calibri" pitchFamily="34" charset="-122"/>
+                <a:cs typeface="Calibri" pitchFamily="34" charset="-120"/>
+              </a:rPr>
+              <a:t>lần 35 số, lần 41, lần 28</a:t>
+            </a:r>
+            <a:endParaRPr lang="en-US" sz="1150" dirty="0"/>
+          </a:p>
+        </p:txBody>
+      </p:sp>
+      <p:sp>
+        <p:nvSpPr>
+          <p:cNvPr id="6" name="Text 4"/>
+          <p:cNvSpPr txBox="1"/>
+          <p:nvPr/>
+        </p:nvSpPr>
+        <p:spPr>
+          <a:xfrm>
+            <a:off x="2926080" y="2286000"/>
+            <a:ext cx="365760" cy="164592"/>
+          </a:xfrm>
+          <a:prstGeom prst="rect">
+            <a:avLst/>
+          </a:prstGeom>
+          <a:noFill/>
+          <a:ln/>
+        </p:spPr>
+        <p:txBody>
+          <a:bodyPr wrap="square" lIns="0" tIns="0" rIns="0" bIns="0" rtlCol="0" anchor="ctr"/>
+          <a:lstStyle/>
+          <a:p>
+            <a:pPr algn="ctr" indent="0" marL="0">
+              <a:buNone/>
+            </a:pPr>
+            <a:r>
+              <a:rPr lang="en-US" sz="1300" b="1" dirty="0">
+                <a:solidFill>
+                  <a:srgbClr val="990011"/>
+                </a:solidFill>
+                <a:latin typeface="Arial" pitchFamily="34" charset="0"/>
+                <a:ea typeface="Arial" pitchFamily="34" charset="-122"/>
+                <a:cs typeface="Arial" pitchFamily="34" charset="-120"/>
+              </a:rPr>
+              <a:t>↓</a:t>
+            </a:r>
+            <a:endParaRPr lang="en-US" sz="1300" dirty="0"/>
+          </a:p>
+        </p:txBody>
+      </p:sp>
+      <p:sp>
+        <p:nvSpPr>
+          <p:cNvPr id="7" name="Shape 5"/>
+          <p:cNvSpPr/>
+          <p:nvPr/>
+        </p:nvSpPr>
+        <p:spPr>
+          <a:xfrm>
+            <a:off x="640080" y="2450592"/>
+            <a:ext cx="4937760" cy="1115568"/>
+          </a:xfrm>
+          <a:prstGeom prst="roundRect">
+            <a:avLst>
+              <a:gd name="adj" fmla="val 9836"/>
+            </a:avLst>
+          </a:prstGeom>
+          <a:solidFill>
+            <a:srgbClr val="FCF6F5"/>
+          </a:solidFill>
+          <a:ln w="12700">
+            <a:solidFill>
+              <a:srgbClr val="E3D5D3"/>
+            </a:solidFill>
+            <a:prstDash val="solid"/>
+          </a:ln>
+        </p:spPr>
+      </p:sp>
+      <p:sp>
+        <p:nvSpPr>
+          <p:cNvPr id="8" name="Text 6"/>
+          <p:cNvSpPr txBox="1"/>
+          <p:nvPr/>
+        </p:nvSpPr>
+        <p:spPr>
+          <a:xfrm>
+            <a:off x="914400" y="2560320"/>
+            <a:ext cx="4480560" cy="365760"/>
+          </a:xfrm>
+          <a:prstGeom prst="rect">
+            <a:avLst/>
+          </a:prstGeom>
+          <a:noFill/>
+          <a:ln/>
+        </p:spPr>
+        <p:txBody>
+          <a:bodyPr wrap="square" lIns="0" tIns="0" rIns="0" bIns="0" rtlCol="0" anchor="ctr"/>
+          <a:lstStyle/>
+          <a:p>
+            <a:pPr indent="0" marL="0">
+              <a:buNone/>
+            </a:pPr>
+            <a:r>
+              <a:rPr lang="en-US" sz="1500" b="1" dirty="0">
+                <a:solidFill>
+                  <a:srgbClr val="990011"/>
+                </a:solidFill>
+                <a:latin typeface="Calibri" pitchFamily="34" charset="0"/>
+                <a:ea typeface="Calibri" pitchFamily="34" charset="-122"/>
+                <a:cs typeface="Calibri" pitchFamily="34" charset="-120"/>
+              </a:rPr>
+              <a:t>2. Vấn đề</a:t>
+            </a:r>
+            <a:endParaRPr lang="en-US" sz="1500" dirty="0"/>
+          </a:p>
+        </p:txBody>
+      </p:sp>
+      <p:sp>
+        <p:nvSpPr>
+          <p:cNvPr id="9" name="Text 7"/>
+          <p:cNvSpPr txBox="1"/>
+          <p:nvPr/>
+        </p:nvSpPr>
+        <p:spPr>
+          <a:xfrm>
+            <a:off x="914400" y="2871216"/>
+            <a:ext cx="4480560" cy="640080"/>
+          </a:xfrm>
+          <a:prstGeom prst="rect">
+            <a:avLst/>
+          </a:prstGeom>
+          <a:noFill/>
+          <a:ln/>
+        </p:spPr>
+        <p:txBody>
+          <a:bodyPr wrap="square" lIns="0" tIns="0" rIns="0" bIns="0" rtlCol="0" anchor="ctr"/>
+          <a:lstStyle/>
+          <a:p>
+            <a:pPr indent="0" marL="0">
+              <a:buNone/>
+            </a:pPr>
+            <a:r>
+              <a:rPr lang="en-US" sz="1150" dirty="0">
+                <a:solidFill>
+                  <a:srgbClr val="444444"/>
+                </a:solidFill>
+                <a:latin typeface="Calibri" pitchFamily="34" charset="0"/>
+                <a:ea typeface="Calibri" pitchFamily="34" charset="-122"/>
+                <a:cs typeface="Calibri" pitchFamily="34" charset="-120"/>
+              </a:rPr>
+              <a:t>Mô hình ML cần đầu vào có</a:t>
+            </a:r>
+            <a:endParaRPr lang="en-US" sz="1150" dirty="0"/>
+          </a:p>
+          <a:p>
+            <a:pPr indent="0" marL="0">
+              <a:buNone/>
+            </a:pPr>
+            <a:r>
+              <a:rPr lang="en-US" sz="1150" dirty="0">
+                <a:solidFill>
+                  <a:srgbClr val="444444"/>
+                </a:solidFill>
+                <a:latin typeface="Calibri" pitchFamily="34" charset="0"/>
+                <a:ea typeface="Calibri" pitchFamily="34" charset="-122"/>
+                <a:cs typeface="Calibri" pitchFamily="34" charset="-120"/>
+              </a:rPr>
+              <a:t>SỐ CỘT CỐ ĐỊNH — không đút</a:t>
+            </a:r>
+            <a:endParaRPr lang="en-US" sz="1150" dirty="0"/>
+          </a:p>
+          <a:p>
+            <a:pPr indent="0" marL="0">
+              <a:buNone/>
+            </a:pPr>
+            <a:r>
+              <a:rPr lang="en-US" sz="1150" dirty="0">
+                <a:solidFill>
+                  <a:srgbClr val="444444"/>
+                </a:solidFill>
+                <a:latin typeface="Calibri" pitchFamily="34" charset="0"/>
+                <a:ea typeface="Calibri" pitchFamily="34" charset="-122"/>
+                <a:cs typeface="Calibri" pitchFamily="34" charset="-120"/>
+              </a:rPr>
+              <a:t>thẳng dãy dài ngắn thất thường</a:t>
+            </a:r>
+            <a:endParaRPr lang="en-US" sz="1150" dirty="0"/>
+          </a:p>
+        </p:txBody>
+      </p:sp>
+      <p:sp>
+        <p:nvSpPr>
+          <p:cNvPr id="10" name="Text 8"/>
+          <p:cNvSpPr txBox="1"/>
+          <p:nvPr/>
+        </p:nvSpPr>
+        <p:spPr>
+          <a:xfrm>
+            <a:off x="2926080" y="3547872"/>
+            <a:ext cx="365760" cy="164592"/>
+          </a:xfrm>
+          <a:prstGeom prst="rect">
+            <a:avLst/>
+          </a:prstGeom>
+          <a:noFill/>
+          <a:ln/>
+        </p:spPr>
+        <p:txBody>
+          <a:bodyPr wrap="square" lIns="0" tIns="0" rIns="0" bIns="0" rtlCol="0" anchor="ctr"/>
+          <a:lstStyle/>
+          <a:p>
+            <a:pPr algn="ctr" indent="0" marL="0">
+              <a:buNone/>
+            </a:pPr>
+            <a:r>
+              <a:rPr lang="en-US" sz="1300" b="1" dirty="0">
+                <a:solidFill>
+                  <a:srgbClr val="990011"/>
+                </a:solidFill>
+                <a:latin typeface="Arial" pitchFamily="34" charset="0"/>
+                <a:ea typeface="Arial" pitchFamily="34" charset="-122"/>
+                <a:cs typeface="Arial" pitchFamily="34" charset="-120"/>
+              </a:rPr>
+              <a:t>↓</a:t>
+            </a:r>
+            <a:endParaRPr lang="en-US" sz="1300" dirty="0"/>
+          </a:p>
+        </p:txBody>
+      </p:sp>
+      <p:sp>
+        <p:nvSpPr>
+          <p:cNvPr id="11" name="Shape 9"/>
+          <p:cNvSpPr/>
+          <p:nvPr/>
+        </p:nvSpPr>
+        <p:spPr>
+          <a:xfrm>
+            <a:off x="640080" y="3712464"/>
+            <a:ext cx="4937760" cy="1115568"/>
+          </a:xfrm>
+          <a:prstGeom prst="roundRect">
+            <a:avLst>
+              <a:gd name="adj" fmla="val 9836"/>
+            </a:avLst>
           </a:prstGeom>
           <a:solidFill>
             <a:srgbClr val="2F3C7E"/>
           </a:solidFill>
+          <a:ln w="12700">
+            <a:solidFill>
+              <a:srgbClr val="E3D5D3"/>
+            </a:solidFill>
+            <a:prstDash val="solid"/>
+          </a:ln>
+        </p:spPr>
+      </p:sp>
+      <p:sp>
+        <p:nvSpPr>
+          <p:cNvPr id="12" name="Text 10"/>
+          <p:cNvSpPr txBox="1"/>
+          <p:nvPr/>
+        </p:nvSpPr>
+        <p:spPr>
+          <a:xfrm>
+            <a:off x="914400" y="3822192"/>
+            <a:ext cx="4480560" cy="365760"/>
+          </a:xfrm>
+          <a:prstGeom prst="rect">
+            <a:avLst/>
+          </a:prstGeom>
+          <a:noFill/>
+          <a:ln/>
+        </p:spPr>
+        <p:txBody>
+          <a:bodyPr wrap="square" lIns="0" tIns="0" rIns="0" bIns="0" rtlCol="0" anchor="ctr"/>
+          <a:lstStyle/>
+          <a:p>
+            <a:pPr indent="0" marL="0">
+              <a:buNone/>
+            </a:pPr>
+            <a:r>
+              <a:rPr lang="en-US" sz="1500" b="1" dirty="0">
+                <a:solidFill>
+                  <a:srgbClr val="FFFFFF"/>
+                </a:solidFill>
+                <a:latin typeface="Calibri" pitchFamily="34" charset="0"/>
+                <a:ea typeface="Calibri" pitchFamily="34" charset="-122"/>
+                <a:cs typeface="Calibri" pitchFamily="34" charset="-120"/>
+              </a:rPr>
+              <a:t>3. Giải pháp: TÓM TẮT</a:t>
+            </a:r>
+            <a:endParaRPr lang="en-US" sz="1500" dirty="0"/>
+          </a:p>
+        </p:txBody>
+      </p:sp>
+      <p:sp>
+        <p:nvSpPr>
+          <p:cNvPr id="13" name="Text 11"/>
+          <p:cNvSpPr txBox="1"/>
+          <p:nvPr/>
+        </p:nvSpPr>
+        <p:spPr>
+          <a:xfrm>
+            <a:off x="914400" y="4133088"/>
+            <a:ext cx="4480560" cy="640080"/>
+          </a:xfrm>
+          <a:prstGeom prst="rect">
+            <a:avLst/>
+          </a:prstGeom>
+          <a:noFill/>
+          <a:ln/>
+        </p:spPr>
+        <p:txBody>
+          <a:bodyPr wrap="square" lIns="0" tIns="0" rIns="0" bIns="0" rtlCol="0" anchor="ctr"/>
+          <a:lstStyle/>
+          <a:p>
+            <a:pPr indent="0" marL="0">
+              <a:buNone/>
+            </a:pPr>
+            <a:r>
+              <a:rPr lang="en-US" sz="1150" dirty="0">
+                <a:solidFill>
+                  <a:srgbClr val="DDE2F5"/>
+                </a:solidFill>
+                <a:latin typeface="Calibri" pitchFamily="34" charset="0"/>
+                <a:ea typeface="Calibri" pitchFamily="34" charset="-122"/>
+                <a:cs typeface="Calibri" pitchFamily="34" charset="-120"/>
+              </a:rPr>
+              <a:t>Nén cả dãy thành các chỉ số</a:t>
+            </a:r>
+            <a:endParaRPr lang="en-US" sz="1150" dirty="0"/>
+          </a:p>
+          <a:p>
+            <a:pPr indent="0" marL="0">
+              <a:buNone/>
+            </a:pPr>
+            <a:r>
+              <a:rPr lang="en-US" sz="1150" dirty="0">
+                <a:solidFill>
+                  <a:srgbClr val="DDE2F5"/>
+                </a:solidFill>
+                <a:latin typeface="Calibri" pitchFamily="34" charset="0"/>
+                <a:ea typeface="Calibri" pitchFamily="34" charset="-122"/>
+                <a:cs typeface="Calibri" pitchFamily="34" charset="-120"/>
+              </a:rPr>
+              <a:t>thống kê mô tả — dãy nào</a:t>
+            </a:r>
+            <a:endParaRPr lang="en-US" sz="1150" dirty="0"/>
+          </a:p>
+          <a:p>
+            <a:pPr indent="0" marL="0">
+              <a:buNone/>
+            </a:pPr>
+            <a:r>
+              <a:rPr lang="en-US" sz="1150" dirty="0">
+                <a:solidFill>
+                  <a:srgbClr val="DDE2F5"/>
+                </a:solidFill>
+                <a:latin typeface="Calibri" pitchFamily="34" charset="0"/>
+                <a:ea typeface="Calibri" pitchFamily="34" charset="-122"/>
+                <a:cs typeface="Calibri" pitchFamily="34" charset="-120"/>
+              </a:rPr>
+              <a:t>cũng ra đúng 16 con số</a:t>
+            </a:r>
+            <a:endParaRPr lang="en-US" sz="1150" dirty="0"/>
+          </a:p>
+        </p:txBody>
+      </p:sp>
+      <p:sp>
+        <p:nvSpPr>
+          <p:cNvPr id="14" name="Text 12"/>
+          <p:cNvSpPr txBox="1"/>
+          <p:nvPr/>
+        </p:nvSpPr>
+        <p:spPr>
+          <a:xfrm>
+            <a:off x="6035040" y="1234440"/>
+            <a:ext cx="5669280" cy="365760"/>
+          </a:xfrm>
+          <a:prstGeom prst="rect">
+            <a:avLst/>
+          </a:prstGeom>
+          <a:noFill/>
+          <a:ln/>
+        </p:spPr>
+        <p:txBody>
+          <a:bodyPr wrap="square" lIns="0" tIns="0" rIns="0" bIns="0" rtlCol="0" anchor="ctr"/>
+          <a:lstStyle/>
+          <a:p>
+            <a:pPr indent="0" marL="0">
+              <a:buNone/>
+            </a:pPr>
+            <a:r>
+              <a:rPr lang="en-US" sz="1400" b="1" dirty="0">
+                <a:solidFill>
+                  <a:srgbClr val="2F3C7E"/>
+                </a:solidFill>
+                <a:latin typeface="Calibri" pitchFamily="34" charset="0"/>
+                <a:ea typeface="Calibri" pitchFamily="34" charset="-122"/>
+                <a:cs typeface="Calibri" pitchFamily="34" charset="-120"/>
+              </a:rPr>
+              <a:t>Kết quả: BẢNG dữ liệu — mỗi hàng = 1 cửa sổ 30 giây đã 'tóm tắt'</a:t>
+            </a:r>
+            <a:endParaRPr lang="en-US" sz="1400" dirty="0"/>
+          </a:p>
+        </p:txBody>
+      </p:sp>
+      <p:graphicFrame>
+        <p:nvGraphicFramePr>
+          <p:cNvPr id="9" name="Table 0"/>
+          <p:cNvGraphicFramePr>
+            <a:graphicFrameLocks noGrp="1"/>
+          </p:cNvGraphicFramePr>
+          <p:nvPr>
+            <p:extLst>
+              <p:ext uri="{D42A27DB-BD31-4B8C-83A1-F6EECF244321}">
+                <p14:modId xmlns:p14="http://schemas.microsoft.com/office/powerpoint/2010/main" val="1579011935"/>
+              </p:ext>
+            </p:extLst>
+          </p:nvPr>
+        </p:nvGraphicFramePr>
+        <p:xfrm>
+          <a:off x="6035040" y="1691640"/>
+          <a:ext cx="5623560" cy="914400"/>
+        </p:xfrm>
+        <a:graphic>
+          <a:graphicData uri="http://schemas.openxmlformats.org/drawingml/2006/table">
+            <a:tbl>
+              <a:tblPr/>
+              <a:tblGrid>
+                <a:gridCol w="1417320"/>
+                <a:gridCol w="1051560"/>
+                <a:gridCol w="960120"/>
+                <a:gridCol w="1280160"/>
+                <a:gridCol w="914400"/>
+              </a:tblGrid>
+              <a:tr h="384048">
+                <a:tc>
+                  <a:txBody>
+                    <a:bodyPr/>
+                    <a:lstStyle/>
+                    <a:p>
+                      <a:pPr algn="ctr" indent="0" marL="0">
+                        <a:buNone/>
+                      </a:pPr>
+                      <a:r>
+                        <a:rPr lang="en-US" sz="1200" b="1" dirty="0">
+                          <a:solidFill>
+                            <a:srgbClr val="FFFFFF"/>
+                          </a:solidFill>
+                          <a:latin typeface="Calibri" pitchFamily="34" charset="0"/>
+                          <a:ea typeface="Calibri" pitchFamily="34" charset="-122"/>
+                          <a:cs typeface="Calibri" pitchFamily="34" charset="-120"/>
+                        </a:rPr>
+                        <a:t>record_id</a:t>
+                      </a:r>
+                      <a:endParaRPr lang="en-US" sz="1200" dirty="0">
+                        <a:latin typeface="Calibri" charset="0"/>
+                        <a:ea typeface="Calibri" charset="0"/>
+                        <a:cs typeface="Calibri" charset="0"/>
+                      </a:endParaRPr>
+                    </a:p>
+                  </a:txBody>
+                  <a:tcPr marL="91440" marR="91440" marT="45720" marB="45720" anchor="ctr">
+                    <a:lnL w="12700" cap="flat" cmpd="sng" algn="ctr">
+                      <a:solidFill>
+                        <a:srgbClr val="D9DCE8"/>
+                      </a:solidFill>
+                      <a:prstDash val="solid"/>
+                      <a:round/>
+                      <a:headEnd type="none" w="med" len="med"/>
+                      <a:tailEnd type="none" w="med" len="med"/>
+                    </a:lnL>
+                    <a:lnR w="12700" cap="flat" cmpd="sng" algn="ctr">
+                      <a:solidFill>
+                        <a:srgbClr val="D9DCE8"/>
+                      </a:solidFill>
+                      <a:prstDash val="solid"/>
+                      <a:round/>
+                      <a:headEnd type="none" w="med" len="med"/>
+                      <a:tailEnd type="none" w="med" len="med"/>
+                    </a:lnR>
+                    <a:lnT w="12700" cap="flat" cmpd="sng" algn="ctr">
+                      <a:solidFill>
+                        <a:srgbClr val="D9DCE8"/>
+                      </a:solidFill>
+                      <a:prstDash val="solid"/>
+                      <a:round/>
+                      <a:headEnd type="none" w="med" len="med"/>
+                      <a:tailEnd type="none" w="med" len="med"/>
+                    </a:lnT>
+                    <a:lnB w="12700" cap="flat" cmpd="sng" algn="ctr">
+                      <a:solidFill>
+                        <a:srgbClr val="D9DCE8"/>
+                      </a:solidFill>
+                      <a:prstDash val="solid"/>
+                      <a:round/>
+                      <a:headEnd type="none" w="med" len="med"/>
+                      <a:tailEnd type="none" w="med" len="med"/>
+                    </a:lnB>
+                    <a:solidFill>
+                      <a:srgbClr val="2F3C7E"/>
+                    </a:solidFill>
+                  </a:tcPr>
+                </a:tc>
+                <a:tc>
+                  <a:txBody>
+                    <a:bodyPr/>
+                    <a:lstStyle/>
+                    <a:p>
+                      <a:pPr algn="ctr" indent="0" marL="0">
+                        <a:buNone/>
+                      </a:pPr>
+                      <a:r>
+                        <a:rPr lang="en-US" sz="1200" b="1" dirty="0">
+                          <a:solidFill>
+                            <a:srgbClr val="FFFFFF"/>
+                          </a:solidFill>
+                          <a:latin typeface="Calibri" pitchFamily="34" charset="0"/>
+                          <a:ea typeface="Calibri" pitchFamily="34" charset="-122"/>
+                          <a:cs typeface="Calibri" pitchFamily="34" charset="-120"/>
+                        </a:rPr>
+                        <a:t>HR_mean</a:t>
+                      </a:r>
+                      <a:endParaRPr lang="en-US" sz="1200" dirty="0">
+                        <a:latin typeface="Calibri" charset="0"/>
+                        <a:ea typeface="Calibri" charset="0"/>
+                        <a:cs typeface="Calibri" charset="0"/>
+                      </a:endParaRPr>
+                    </a:p>
+                  </a:txBody>
+                  <a:tcPr marL="91440" marR="91440" marT="45720" marB="45720" anchor="ctr">
+                    <a:lnL w="12700" cap="flat" cmpd="sng" algn="ctr">
+                      <a:solidFill>
+                        <a:srgbClr val="D9DCE8"/>
+                      </a:solidFill>
+                      <a:prstDash val="solid"/>
+                      <a:round/>
+                      <a:headEnd type="none" w="med" len="med"/>
+                      <a:tailEnd type="none" w="med" len="med"/>
+                    </a:lnL>
+                    <a:lnR w="12700" cap="flat" cmpd="sng" algn="ctr">
+                      <a:solidFill>
+                        <a:srgbClr val="D9DCE8"/>
+                      </a:solidFill>
+                      <a:prstDash val="solid"/>
+                      <a:round/>
+                      <a:headEnd type="none" w="med" len="med"/>
+                      <a:tailEnd type="none" w="med" len="med"/>
+                    </a:lnR>
+                    <a:lnT w="12700" cap="flat" cmpd="sng" algn="ctr">
+                      <a:solidFill>
+                        <a:srgbClr val="D9DCE8"/>
+                      </a:solidFill>
+                      <a:prstDash val="solid"/>
+                      <a:round/>
+                      <a:headEnd type="none" w="med" len="med"/>
+                      <a:tailEnd type="none" w="med" len="med"/>
+                    </a:lnT>
+                    <a:lnB w="12700" cap="flat" cmpd="sng" algn="ctr">
+                      <a:solidFill>
+                        <a:srgbClr val="D9DCE8"/>
+                      </a:solidFill>
+                      <a:prstDash val="solid"/>
+                      <a:round/>
+                      <a:headEnd type="none" w="med" len="med"/>
+                      <a:tailEnd type="none" w="med" len="med"/>
+                    </a:lnB>
+                    <a:solidFill>
+                      <a:srgbClr val="2F3C7E"/>
+                    </a:solidFill>
+                  </a:tcPr>
+                </a:tc>
+                <a:tc>
+                  <a:txBody>
+                    <a:bodyPr/>
+                    <a:lstStyle/>
+                    <a:p>
+                      <a:pPr algn="ctr" indent="0" marL="0">
+                        <a:buNone/>
+                      </a:pPr>
+                      <a:r>
+                        <a:rPr lang="en-US" sz="1200" b="1" dirty="0">
+                          <a:solidFill>
+                            <a:srgbClr val="FFFFFF"/>
+                          </a:solidFill>
+                          <a:latin typeface="Calibri" pitchFamily="34" charset="0"/>
+                          <a:ea typeface="Calibri" pitchFamily="34" charset="-122"/>
+                          <a:cs typeface="Calibri" pitchFamily="34" charset="-120"/>
+                        </a:rPr>
+                        <a:t>RMSSD</a:t>
+                      </a:r>
+                      <a:endParaRPr lang="en-US" sz="1200" dirty="0">
+                        <a:latin typeface="Calibri" charset="0"/>
+                        <a:ea typeface="Calibri" charset="0"/>
+                        <a:cs typeface="Calibri" charset="0"/>
+                      </a:endParaRPr>
+                    </a:p>
+                  </a:txBody>
+                  <a:tcPr marL="91440" marR="91440" marT="45720" marB="45720" anchor="ctr">
+                    <a:lnL w="12700" cap="flat" cmpd="sng" algn="ctr">
+                      <a:solidFill>
+                        <a:srgbClr val="D9DCE8"/>
+                      </a:solidFill>
+                      <a:prstDash val="solid"/>
+                      <a:round/>
+                      <a:headEnd type="none" w="med" len="med"/>
+                      <a:tailEnd type="none" w="med" len="med"/>
+                    </a:lnL>
+                    <a:lnR w="12700" cap="flat" cmpd="sng" algn="ctr">
+                      <a:solidFill>
+                        <a:srgbClr val="D9DCE8"/>
+                      </a:solidFill>
+                      <a:prstDash val="solid"/>
+                      <a:round/>
+                      <a:headEnd type="none" w="med" len="med"/>
+                      <a:tailEnd type="none" w="med" len="med"/>
+                    </a:lnR>
+                    <a:lnT w="12700" cap="flat" cmpd="sng" algn="ctr">
+                      <a:solidFill>
+                        <a:srgbClr val="D9DCE8"/>
+                      </a:solidFill>
+                      <a:prstDash val="solid"/>
+                      <a:round/>
+                      <a:headEnd type="none" w="med" len="med"/>
+                      <a:tailEnd type="none" w="med" len="med"/>
+                    </a:lnT>
+                    <a:lnB w="12700" cap="flat" cmpd="sng" algn="ctr">
+                      <a:solidFill>
+                        <a:srgbClr val="D9DCE8"/>
+                      </a:solidFill>
+                      <a:prstDash val="solid"/>
+                      <a:round/>
+                      <a:headEnd type="none" w="med" len="med"/>
+                      <a:tailEnd type="none" w="med" len="med"/>
+                    </a:lnB>
+                    <a:solidFill>
+                      <a:srgbClr val="2F3C7E"/>
+                    </a:solidFill>
+                  </a:tcPr>
+                </a:tc>
+                <a:tc>
+                  <a:txBody>
+                    <a:bodyPr/>
+                    <a:lstStyle/>
+                    <a:p>
+                      <a:pPr algn="ctr" indent="0" marL="0">
+                        <a:buNone/>
+                      </a:pPr>
+                      <a:r>
+                        <a:rPr lang="en-US" sz="1200" b="1" dirty="0">
+                          <a:solidFill>
+                            <a:srgbClr val="FFFFFF"/>
+                          </a:solidFill>
+                          <a:latin typeface="Calibri" pitchFamily="34" charset="0"/>
+                          <a:ea typeface="Calibri" pitchFamily="34" charset="-122"/>
+                          <a:cs typeface="Calibri" pitchFamily="34" charset="-120"/>
+                        </a:rPr>
+                        <a:t>...14 cột nữa</a:t>
+                      </a:r>
+                      <a:endParaRPr lang="en-US" sz="1200" dirty="0">
+                        <a:latin typeface="Calibri" charset="0"/>
+                        <a:ea typeface="Calibri" charset="0"/>
+                        <a:cs typeface="Calibri" charset="0"/>
+                      </a:endParaRPr>
+                    </a:p>
+                  </a:txBody>
+                  <a:tcPr marL="91440" marR="91440" marT="45720" marB="45720" anchor="ctr">
+                    <a:lnL w="12700" cap="flat" cmpd="sng" algn="ctr">
+                      <a:solidFill>
+                        <a:srgbClr val="D9DCE8"/>
+                      </a:solidFill>
+                      <a:prstDash val="solid"/>
+                      <a:round/>
+                      <a:headEnd type="none" w="med" len="med"/>
+                      <a:tailEnd type="none" w="med" len="med"/>
+                    </a:lnL>
+                    <a:lnR w="12700" cap="flat" cmpd="sng" algn="ctr">
+                      <a:solidFill>
+                        <a:srgbClr val="D9DCE8"/>
+                      </a:solidFill>
+                      <a:prstDash val="solid"/>
+                      <a:round/>
+                      <a:headEnd type="none" w="med" len="med"/>
+                      <a:tailEnd type="none" w="med" len="med"/>
+                    </a:lnR>
+                    <a:lnT w="12700" cap="flat" cmpd="sng" algn="ctr">
+                      <a:solidFill>
+                        <a:srgbClr val="D9DCE8"/>
+                      </a:solidFill>
+                      <a:prstDash val="solid"/>
+                      <a:round/>
+                      <a:headEnd type="none" w="med" len="med"/>
+                      <a:tailEnd type="none" w="med" len="med"/>
+                    </a:lnT>
+                    <a:lnB w="12700" cap="flat" cmpd="sng" algn="ctr">
+                      <a:solidFill>
+                        <a:srgbClr val="D9DCE8"/>
+                      </a:solidFill>
+                      <a:prstDash val="solid"/>
+                      <a:round/>
+                      <a:headEnd type="none" w="med" len="med"/>
+                      <a:tailEnd type="none" w="med" len="med"/>
+                    </a:lnB>
+                    <a:solidFill>
+                      <a:srgbClr val="2F3C7E"/>
+                    </a:solidFill>
+                  </a:tcPr>
+                </a:tc>
+                <a:tc>
+                  <a:txBody>
+                    <a:bodyPr/>
+                    <a:lstStyle/>
+                    <a:p>
+                      <a:pPr algn="ctr" indent="0" marL="0">
+                        <a:buNone/>
+                      </a:pPr>
+                      <a:r>
+                        <a:rPr lang="en-US" sz="1200" b="1" dirty="0">
+                          <a:solidFill>
+                            <a:srgbClr val="FFFFFF"/>
+                          </a:solidFill>
+                          <a:latin typeface="Calibri" pitchFamily="34" charset="0"/>
+                          <a:ea typeface="Calibri" pitchFamily="34" charset="-122"/>
+                          <a:cs typeface="Calibri" pitchFamily="34" charset="-120"/>
+                        </a:rPr>
+                        <a:t>Nhãn</a:t>
+                      </a:r>
+                      <a:endParaRPr lang="en-US" sz="1200" dirty="0">
+                        <a:latin typeface="Calibri" charset="0"/>
+                        <a:ea typeface="Calibri" charset="0"/>
+                        <a:cs typeface="Calibri" charset="0"/>
+                      </a:endParaRPr>
+                    </a:p>
+                  </a:txBody>
+                  <a:tcPr marL="91440" marR="91440" marT="45720" marB="45720" anchor="ctr">
+                    <a:lnL w="12700" cap="flat" cmpd="sng" algn="ctr">
+                      <a:solidFill>
+                        <a:srgbClr val="D9DCE8"/>
+                      </a:solidFill>
+                      <a:prstDash val="solid"/>
+                      <a:round/>
+                      <a:headEnd type="none" w="med" len="med"/>
+                      <a:tailEnd type="none" w="med" len="med"/>
+                    </a:lnL>
+                    <a:lnR w="12700" cap="flat" cmpd="sng" algn="ctr">
+                      <a:solidFill>
+                        <a:srgbClr val="D9DCE8"/>
+                      </a:solidFill>
+                      <a:prstDash val="solid"/>
+                      <a:round/>
+                      <a:headEnd type="none" w="med" len="med"/>
+                      <a:tailEnd type="none" w="med" len="med"/>
+                    </a:lnR>
+                    <a:lnT w="12700" cap="flat" cmpd="sng" algn="ctr">
+                      <a:solidFill>
+                        <a:srgbClr val="D9DCE8"/>
+                      </a:solidFill>
+                      <a:prstDash val="solid"/>
+                      <a:round/>
+                      <a:headEnd type="none" w="med" len="med"/>
+                      <a:tailEnd type="none" w="med" len="med"/>
+                    </a:lnT>
+                    <a:lnB w="12700" cap="flat" cmpd="sng" algn="ctr">
+                      <a:solidFill>
+                        <a:srgbClr val="D9DCE8"/>
+                      </a:solidFill>
+                      <a:prstDash val="solid"/>
+                      <a:round/>
+                      <a:headEnd type="none" w="med" len="med"/>
+                      <a:tailEnd type="none" w="med" len="med"/>
+                    </a:lnB>
+                    <a:solidFill>
+                      <a:srgbClr val="2F3C7E"/>
+                    </a:solidFill>
+                  </a:tcPr>
+                </a:tc>
+              </a:tr>
+              <a:tr h="384048">
+                <a:tc>
+                  <a:txBody>
+                    <a:bodyPr/>
+                    <a:lstStyle/>
+                    <a:p>
+                      <a:pPr algn="ctr" indent="0" marL="0">
+                        <a:buNone/>
+                      </a:pPr>
+                      <a:r>
+                        <a:rPr lang="en-US" sz="1200" dirty="0">
+                          <a:solidFill>
+                            <a:srgbClr val="000000"/>
+                          </a:solidFill>
+                          <a:latin typeface="Calibri" pitchFamily="34" charset="0"/>
+                          <a:ea typeface="Calibri" pitchFamily="34" charset="-122"/>
+                          <a:cs typeface="Calibri" pitchFamily="34" charset="-120"/>
+                        </a:rPr>
+                        <a:t>non_af_005</a:t>
+                      </a:r>
+                      <a:endParaRPr lang="en-US" sz="1200" dirty="0">
+                        <a:latin typeface="Calibri" charset="0"/>
+                        <a:ea typeface="Calibri" charset="0"/>
+                        <a:cs typeface="Calibri" charset="0"/>
+                      </a:endParaRPr>
+                    </a:p>
+                  </a:txBody>
+                  <a:tcPr marL="91440" marR="91440" marT="45720" marB="45720" anchor="ctr">
+                    <a:lnL w="12700" cap="flat" cmpd="sng" algn="ctr">
+                      <a:solidFill>
+                        <a:srgbClr val="D9DCE8"/>
+                      </a:solidFill>
+                      <a:prstDash val="solid"/>
+                      <a:round/>
+                      <a:headEnd type="none" w="med" len="med"/>
+                      <a:tailEnd type="none" w="med" len="med"/>
+                    </a:lnL>
+                    <a:lnR w="12700" cap="flat" cmpd="sng" algn="ctr">
+                      <a:solidFill>
+                        <a:srgbClr val="D9DCE8"/>
+                      </a:solidFill>
+                      <a:prstDash val="solid"/>
+                      <a:round/>
+                      <a:headEnd type="none" w="med" len="med"/>
+                      <a:tailEnd type="none" w="med" len="med"/>
+                    </a:lnR>
+                    <a:lnT w="12700" cap="flat" cmpd="sng" algn="ctr">
+                      <a:solidFill>
+                        <a:srgbClr val="D9DCE8"/>
+                      </a:solidFill>
+                      <a:prstDash val="solid"/>
+                      <a:round/>
+                      <a:headEnd type="none" w="med" len="med"/>
+                      <a:tailEnd type="none" w="med" len="med"/>
+                    </a:lnT>
+                    <a:lnB w="12700" cap="flat" cmpd="sng" algn="ctr">
+                      <a:solidFill>
+                        <a:srgbClr val="D9DCE8"/>
+                      </a:solidFill>
+                      <a:prstDash val="solid"/>
+                      <a:round/>
+                      <a:headEnd type="none" w="med" len="med"/>
+                      <a:tailEnd type="none" w="med" len="med"/>
+                    </a:lnB>
+                  </a:tcPr>
+                </a:tc>
+                <a:tc>
+                  <a:txBody>
+                    <a:bodyPr/>
+                    <a:lstStyle/>
+                    <a:p>
+                      <a:pPr algn="ctr" indent="0" marL="0">
+                        <a:buNone/>
+                      </a:pPr>
+                      <a:r>
+                        <a:rPr lang="en-US" sz="1200" dirty="0">
+                          <a:solidFill>
+                            <a:srgbClr val="000000"/>
+                          </a:solidFill>
+                          <a:latin typeface="Calibri" pitchFamily="34" charset="0"/>
+                          <a:ea typeface="Calibri" pitchFamily="34" charset="-122"/>
+                          <a:cs typeface="Calibri" pitchFamily="34" charset="-120"/>
+                        </a:rPr>
+                        <a:t>60.1</a:t>
+                      </a:r>
+                      <a:endParaRPr lang="en-US" sz="1200" dirty="0">
+                        <a:latin typeface="Calibri" charset="0"/>
+                        <a:ea typeface="Calibri" charset="0"/>
+                        <a:cs typeface="Calibri" charset="0"/>
+                      </a:endParaRPr>
+                    </a:p>
+                  </a:txBody>
+                  <a:tcPr marL="91440" marR="91440" marT="45720" marB="45720" anchor="ctr">
+                    <a:lnL w="12700" cap="flat" cmpd="sng" algn="ctr">
+                      <a:solidFill>
+                        <a:srgbClr val="D9DCE8"/>
+                      </a:solidFill>
+                      <a:prstDash val="solid"/>
+                      <a:round/>
+                      <a:headEnd type="none" w="med" len="med"/>
+                      <a:tailEnd type="none" w="med" len="med"/>
+                    </a:lnL>
+                    <a:lnR w="12700" cap="flat" cmpd="sng" algn="ctr">
+                      <a:solidFill>
+                        <a:srgbClr val="D9DCE8"/>
+                      </a:solidFill>
+                      <a:prstDash val="solid"/>
+                      <a:round/>
+                      <a:headEnd type="none" w="med" len="med"/>
+                      <a:tailEnd type="none" w="med" len="med"/>
+                    </a:lnR>
+                    <a:lnT w="12700" cap="flat" cmpd="sng" algn="ctr">
+                      <a:solidFill>
+                        <a:srgbClr val="D9DCE8"/>
+                      </a:solidFill>
+                      <a:prstDash val="solid"/>
+                      <a:round/>
+                      <a:headEnd type="none" w="med" len="med"/>
+                      <a:tailEnd type="none" w="med" len="med"/>
+                    </a:lnT>
+                    <a:lnB w="12700" cap="flat" cmpd="sng" algn="ctr">
+                      <a:solidFill>
+                        <a:srgbClr val="D9DCE8"/>
+                      </a:solidFill>
+                      <a:prstDash val="solid"/>
+                      <a:round/>
+                      <a:headEnd type="none" w="med" len="med"/>
+                      <a:tailEnd type="none" w="med" len="med"/>
+                    </a:lnB>
+                  </a:tcPr>
+                </a:tc>
+                <a:tc>
+                  <a:txBody>
+                    <a:bodyPr/>
+                    <a:lstStyle/>
+                    <a:p>
+                      <a:pPr algn="ctr" indent="0" marL="0">
+                        <a:buNone/>
+                      </a:pPr>
+                      <a:r>
+                        <a:rPr lang="en-US" sz="1200" dirty="0">
+                          <a:solidFill>
+                            <a:srgbClr val="000000"/>
+                          </a:solidFill>
+                          <a:latin typeface="Calibri" pitchFamily="34" charset="0"/>
+                          <a:ea typeface="Calibri" pitchFamily="34" charset="-122"/>
+                          <a:cs typeface="Calibri" pitchFamily="34" charset="-120"/>
+                        </a:rPr>
+                        <a:t>34.9</a:t>
+                      </a:r>
+                      <a:endParaRPr lang="en-US" sz="1200" dirty="0">
+                        <a:latin typeface="Calibri" charset="0"/>
+                        <a:ea typeface="Calibri" charset="0"/>
+                        <a:cs typeface="Calibri" charset="0"/>
+                      </a:endParaRPr>
+                    </a:p>
+                  </a:txBody>
+                  <a:tcPr marL="91440" marR="91440" marT="45720" marB="45720" anchor="ctr">
+                    <a:lnL w="12700" cap="flat" cmpd="sng" algn="ctr">
+                      <a:solidFill>
+                        <a:srgbClr val="D9DCE8"/>
+                      </a:solidFill>
+                      <a:prstDash val="solid"/>
+                      <a:round/>
+                      <a:headEnd type="none" w="med" len="med"/>
+                      <a:tailEnd type="none" w="med" len="med"/>
+                    </a:lnL>
+                    <a:lnR w="12700" cap="flat" cmpd="sng" algn="ctr">
+                      <a:solidFill>
+                        <a:srgbClr val="D9DCE8"/>
+                      </a:solidFill>
+                      <a:prstDash val="solid"/>
+                      <a:round/>
+                      <a:headEnd type="none" w="med" len="med"/>
+                      <a:tailEnd type="none" w="med" len="med"/>
+                    </a:lnR>
+                    <a:lnT w="12700" cap="flat" cmpd="sng" algn="ctr">
+                      <a:solidFill>
+                        <a:srgbClr val="D9DCE8"/>
+                      </a:solidFill>
+                      <a:prstDash val="solid"/>
+                      <a:round/>
+                      <a:headEnd type="none" w="med" len="med"/>
+                      <a:tailEnd type="none" w="med" len="med"/>
+                    </a:lnT>
+                    <a:lnB w="12700" cap="flat" cmpd="sng" algn="ctr">
+                      <a:solidFill>
+                        <a:srgbClr val="D9DCE8"/>
+                      </a:solidFill>
+                      <a:prstDash val="solid"/>
+                      <a:round/>
+                      <a:headEnd type="none" w="med" len="med"/>
+                      <a:tailEnd type="none" w="med" len="med"/>
+                    </a:lnB>
+                  </a:tcPr>
+                </a:tc>
+                <a:tc>
+                  <a:txBody>
+                    <a:bodyPr/>
+                    <a:lstStyle/>
+                    <a:p>
+                      <a:pPr algn="ctr" indent="0" marL="0">
+                        <a:buNone/>
+                      </a:pPr>
+                      <a:r>
+                        <a:rPr lang="en-US" sz="1200" dirty="0">
+                          <a:solidFill>
+                            <a:srgbClr val="000000"/>
+                          </a:solidFill>
+                          <a:latin typeface="Calibri" pitchFamily="34" charset="0"/>
+                          <a:ea typeface="Calibri" pitchFamily="34" charset="-122"/>
+                          <a:cs typeface="Calibri" pitchFamily="34" charset="-120"/>
+                        </a:rPr>
+                        <a:t>...</a:t>
+                      </a:r>
+                      <a:endParaRPr lang="en-US" sz="1200" dirty="0">
+                        <a:latin typeface="Calibri" charset="0"/>
+                        <a:ea typeface="Calibri" charset="0"/>
+                        <a:cs typeface="Calibri" charset="0"/>
+                      </a:endParaRPr>
+                    </a:p>
+                  </a:txBody>
+                  <a:tcPr marL="91440" marR="91440" marT="45720" marB="45720" anchor="ctr">
+                    <a:lnL w="12700" cap="flat" cmpd="sng" algn="ctr">
+                      <a:solidFill>
+                        <a:srgbClr val="D9DCE8"/>
+                      </a:solidFill>
+                      <a:prstDash val="solid"/>
+                      <a:round/>
+                      <a:headEnd type="none" w="med" len="med"/>
+                      <a:tailEnd type="none" w="med" len="med"/>
+                    </a:lnL>
+                    <a:lnR w="12700" cap="flat" cmpd="sng" algn="ctr">
+                      <a:solidFill>
+                        <a:srgbClr val="D9DCE8"/>
+                      </a:solidFill>
+                      <a:prstDash val="solid"/>
+                      <a:round/>
+                      <a:headEnd type="none" w="med" len="med"/>
+                      <a:tailEnd type="none" w="med" len="med"/>
+                    </a:lnR>
+                    <a:lnT w="12700" cap="flat" cmpd="sng" algn="ctr">
+                      <a:solidFill>
+                        <a:srgbClr val="D9DCE8"/>
+                      </a:solidFill>
+                      <a:prstDash val="solid"/>
+                      <a:round/>
+                      <a:headEnd type="none" w="med" len="med"/>
+                      <a:tailEnd type="none" w="med" len="med"/>
+                    </a:lnT>
+                    <a:lnB w="12700" cap="flat" cmpd="sng" algn="ctr">
+                      <a:solidFill>
+                        <a:srgbClr val="D9DCE8"/>
+                      </a:solidFill>
+                      <a:prstDash val="solid"/>
+                      <a:round/>
+                      <a:headEnd type="none" w="med" len="med"/>
+                      <a:tailEnd type="none" w="med" len="med"/>
+                    </a:lnB>
+                  </a:tcPr>
+                </a:tc>
+                <a:tc>
+                  <a:txBody>
+                    <a:bodyPr/>
+                    <a:lstStyle/>
+                    <a:p>
+                      <a:pPr algn="ctr" indent="0" marL="0">
+                        <a:buNone/>
+                      </a:pPr>
+                      <a:r>
+                        <a:rPr lang="en-US" sz="1200" dirty="0">
+                          <a:solidFill>
+                            <a:srgbClr val="000000"/>
+                          </a:solidFill>
+                          <a:latin typeface="Calibri" pitchFamily="34" charset="0"/>
+                          <a:ea typeface="Calibri" pitchFamily="34" charset="-122"/>
+                          <a:cs typeface="Calibri" pitchFamily="34" charset="-120"/>
+                        </a:rPr>
+                        <a:t>Thường</a:t>
+                      </a:r>
+                      <a:endParaRPr lang="en-US" sz="1200" dirty="0">
+                        <a:latin typeface="Calibri" charset="0"/>
+                        <a:ea typeface="Calibri" charset="0"/>
+                        <a:cs typeface="Calibri" charset="0"/>
+                      </a:endParaRPr>
+                    </a:p>
+                  </a:txBody>
+                  <a:tcPr marL="91440" marR="91440" marT="45720" marB="45720" anchor="ctr">
+                    <a:lnL w="12700" cap="flat" cmpd="sng" algn="ctr">
+                      <a:solidFill>
+                        <a:srgbClr val="D9DCE8"/>
+                      </a:solidFill>
+                      <a:prstDash val="solid"/>
+                      <a:round/>
+                      <a:headEnd type="none" w="med" len="med"/>
+                      <a:tailEnd type="none" w="med" len="med"/>
+                    </a:lnL>
+                    <a:lnR w="12700" cap="flat" cmpd="sng" algn="ctr">
+                      <a:solidFill>
+                        <a:srgbClr val="D9DCE8"/>
+                      </a:solidFill>
+                      <a:prstDash val="solid"/>
+                      <a:round/>
+                      <a:headEnd type="none" w="med" len="med"/>
+                      <a:tailEnd type="none" w="med" len="med"/>
+                    </a:lnR>
+                    <a:lnT w="12700" cap="flat" cmpd="sng" algn="ctr">
+                      <a:solidFill>
+                        <a:srgbClr val="D9DCE8"/>
+                      </a:solidFill>
+                      <a:prstDash val="solid"/>
+                      <a:round/>
+                      <a:headEnd type="none" w="med" len="med"/>
+                      <a:tailEnd type="none" w="med" len="med"/>
+                    </a:lnT>
+                    <a:lnB w="12700" cap="flat" cmpd="sng" algn="ctr">
+                      <a:solidFill>
+                        <a:srgbClr val="D9DCE8"/>
+                      </a:solidFill>
+                      <a:prstDash val="solid"/>
+                      <a:round/>
+                      <a:headEnd type="none" w="med" len="med"/>
+                      <a:tailEnd type="none" w="med" len="med"/>
+                    </a:lnB>
+                  </a:tcPr>
+                </a:tc>
+              </a:tr>
+              <a:tr h="384048">
+                <a:tc>
+                  <a:txBody>
+                    <a:bodyPr/>
+                    <a:lstStyle/>
+                    <a:p>
+                      <a:pPr algn="ctr" indent="0" marL="0">
+                        <a:buNone/>
+                      </a:pPr>
+                      <a:r>
+                        <a:rPr lang="en-US" sz="1200" dirty="0">
+                          <a:solidFill>
+                            <a:srgbClr val="000000"/>
+                          </a:solidFill>
+                          <a:latin typeface="Calibri" pitchFamily="34" charset="0"/>
+                          <a:ea typeface="Calibri" pitchFamily="34" charset="-122"/>
+                          <a:cs typeface="Calibri" pitchFamily="34" charset="-120"/>
+                        </a:rPr>
+                        <a:t>non_af_005</a:t>
+                      </a:r>
+                      <a:endParaRPr lang="en-US" sz="1200" dirty="0">
+                        <a:latin typeface="Calibri" charset="0"/>
+                        <a:ea typeface="Calibri" charset="0"/>
+                        <a:cs typeface="Calibri" charset="0"/>
+                      </a:endParaRPr>
+                    </a:p>
+                  </a:txBody>
+                  <a:tcPr marL="91440" marR="91440" marT="45720" marB="45720" anchor="ctr">
+                    <a:lnL w="12700" cap="flat" cmpd="sng" algn="ctr">
+                      <a:solidFill>
+                        <a:srgbClr val="D9DCE8"/>
+                      </a:solidFill>
+                      <a:prstDash val="solid"/>
+                      <a:round/>
+                      <a:headEnd type="none" w="med" len="med"/>
+                      <a:tailEnd type="none" w="med" len="med"/>
+                    </a:lnL>
+                    <a:lnR w="12700" cap="flat" cmpd="sng" algn="ctr">
+                      <a:solidFill>
+                        <a:srgbClr val="D9DCE8"/>
+                      </a:solidFill>
+                      <a:prstDash val="solid"/>
+                      <a:round/>
+                      <a:headEnd type="none" w="med" len="med"/>
+                      <a:tailEnd type="none" w="med" len="med"/>
+                    </a:lnR>
+                    <a:lnT w="12700" cap="flat" cmpd="sng" algn="ctr">
+                      <a:solidFill>
+                        <a:srgbClr val="D9DCE8"/>
+                      </a:solidFill>
+                      <a:prstDash val="solid"/>
+                      <a:round/>
+                      <a:headEnd type="none" w="med" len="med"/>
+                      <a:tailEnd type="none" w="med" len="med"/>
+                    </a:lnT>
+                    <a:lnB w="12700" cap="flat" cmpd="sng" algn="ctr">
+                      <a:solidFill>
+                        <a:srgbClr val="D9DCE8"/>
+                      </a:solidFill>
+                      <a:prstDash val="solid"/>
+                      <a:round/>
+                      <a:headEnd type="none" w="med" len="med"/>
+                      <a:tailEnd type="none" w="med" len="med"/>
+                    </a:lnB>
+                  </a:tcPr>
+                </a:tc>
+                <a:tc>
+                  <a:txBody>
+                    <a:bodyPr/>
+                    <a:lstStyle/>
+                    <a:p>
+                      <a:pPr algn="ctr" indent="0" marL="0">
+                        <a:buNone/>
+                      </a:pPr>
+                      <a:r>
+                        <a:rPr lang="en-US" sz="1200" dirty="0">
+                          <a:solidFill>
+                            <a:srgbClr val="000000"/>
+                          </a:solidFill>
+                          <a:latin typeface="Calibri" pitchFamily="34" charset="0"/>
+                          <a:ea typeface="Calibri" pitchFamily="34" charset="-122"/>
+                          <a:cs typeface="Calibri" pitchFamily="34" charset="-120"/>
+                        </a:rPr>
+                        <a:t>59.0</a:t>
+                      </a:r>
+                      <a:endParaRPr lang="en-US" sz="1200" dirty="0">
+                        <a:latin typeface="Calibri" charset="0"/>
+                        <a:ea typeface="Calibri" charset="0"/>
+                        <a:cs typeface="Calibri" charset="0"/>
+                      </a:endParaRPr>
+                    </a:p>
+                  </a:txBody>
+                  <a:tcPr marL="91440" marR="91440" marT="45720" marB="45720" anchor="ctr">
+                    <a:lnL w="12700" cap="flat" cmpd="sng" algn="ctr">
+                      <a:solidFill>
+                        <a:srgbClr val="D9DCE8"/>
+                      </a:solidFill>
+                      <a:prstDash val="solid"/>
+                      <a:round/>
+                      <a:headEnd type="none" w="med" len="med"/>
+                      <a:tailEnd type="none" w="med" len="med"/>
+                    </a:lnL>
+                    <a:lnR w="12700" cap="flat" cmpd="sng" algn="ctr">
+                      <a:solidFill>
+                        <a:srgbClr val="D9DCE8"/>
+                      </a:solidFill>
+                      <a:prstDash val="solid"/>
+                      <a:round/>
+                      <a:headEnd type="none" w="med" len="med"/>
+                      <a:tailEnd type="none" w="med" len="med"/>
+                    </a:lnR>
+                    <a:lnT w="12700" cap="flat" cmpd="sng" algn="ctr">
+                      <a:solidFill>
+                        <a:srgbClr val="D9DCE8"/>
+                      </a:solidFill>
+                      <a:prstDash val="solid"/>
+                      <a:round/>
+                      <a:headEnd type="none" w="med" len="med"/>
+                      <a:tailEnd type="none" w="med" len="med"/>
+                    </a:lnT>
+                    <a:lnB w="12700" cap="flat" cmpd="sng" algn="ctr">
+                      <a:solidFill>
+                        <a:srgbClr val="D9DCE8"/>
+                      </a:solidFill>
+                      <a:prstDash val="solid"/>
+                      <a:round/>
+                      <a:headEnd type="none" w="med" len="med"/>
+                      <a:tailEnd type="none" w="med" len="med"/>
+                    </a:lnB>
+                  </a:tcPr>
+                </a:tc>
+                <a:tc>
+                  <a:txBody>
+                    <a:bodyPr/>
+                    <a:lstStyle/>
+                    <a:p>
+                      <a:pPr algn="ctr" indent="0" marL="0">
+                        <a:buNone/>
+                      </a:pPr>
+                      <a:r>
+                        <a:rPr lang="en-US" sz="1200" dirty="0">
+                          <a:solidFill>
+                            <a:srgbClr val="000000"/>
+                          </a:solidFill>
+                          <a:latin typeface="Calibri" pitchFamily="34" charset="0"/>
+                          <a:ea typeface="Calibri" pitchFamily="34" charset="-122"/>
+                          <a:cs typeface="Calibri" pitchFamily="34" charset="-120"/>
+                        </a:rPr>
+                        <a:t>25.6</a:t>
+                      </a:r>
+                      <a:endParaRPr lang="en-US" sz="1200" dirty="0">
+                        <a:latin typeface="Calibri" charset="0"/>
+                        <a:ea typeface="Calibri" charset="0"/>
+                        <a:cs typeface="Calibri" charset="0"/>
+                      </a:endParaRPr>
+                    </a:p>
+                  </a:txBody>
+                  <a:tcPr marL="91440" marR="91440" marT="45720" marB="45720" anchor="ctr">
+                    <a:lnL w="12700" cap="flat" cmpd="sng" algn="ctr">
+                      <a:solidFill>
+                        <a:srgbClr val="D9DCE8"/>
+                      </a:solidFill>
+                      <a:prstDash val="solid"/>
+                      <a:round/>
+                      <a:headEnd type="none" w="med" len="med"/>
+                      <a:tailEnd type="none" w="med" len="med"/>
+                    </a:lnL>
+                    <a:lnR w="12700" cap="flat" cmpd="sng" algn="ctr">
+                      <a:solidFill>
+                        <a:srgbClr val="D9DCE8"/>
+                      </a:solidFill>
+                      <a:prstDash val="solid"/>
+                      <a:round/>
+                      <a:headEnd type="none" w="med" len="med"/>
+                      <a:tailEnd type="none" w="med" len="med"/>
+                    </a:lnR>
+                    <a:lnT w="12700" cap="flat" cmpd="sng" algn="ctr">
+                      <a:solidFill>
+                        <a:srgbClr val="D9DCE8"/>
+                      </a:solidFill>
+                      <a:prstDash val="solid"/>
+                      <a:round/>
+                      <a:headEnd type="none" w="med" len="med"/>
+                      <a:tailEnd type="none" w="med" len="med"/>
+                    </a:lnT>
+                    <a:lnB w="12700" cap="flat" cmpd="sng" algn="ctr">
+                      <a:solidFill>
+                        <a:srgbClr val="D9DCE8"/>
+                      </a:solidFill>
+                      <a:prstDash val="solid"/>
+                      <a:round/>
+                      <a:headEnd type="none" w="med" len="med"/>
+                      <a:tailEnd type="none" w="med" len="med"/>
+                    </a:lnB>
+                  </a:tcPr>
+                </a:tc>
+                <a:tc>
+                  <a:txBody>
+                    <a:bodyPr/>
+                    <a:lstStyle/>
+                    <a:p>
+                      <a:pPr algn="ctr" indent="0" marL="0">
+                        <a:buNone/>
+                      </a:pPr>
+                      <a:r>
+                        <a:rPr lang="en-US" sz="1200" dirty="0">
+                          <a:solidFill>
+                            <a:srgbClr val="000000"/>
+                          </a:solidFill>
+                          <a:latin typeface="Calibri" pitchFamily="34" charset="0"/>
+                          <a:ea typeface="Calibri" pitchFamily="34" charset="-122"/>
+                          <a:cs typeface="Calibri" pitchFamily="34" charset="-120"/>
+                        </a:rPr>
+                        <a:t>...</a:t>
+                      </a:r>
+                      <a:endParaRPr lang="en-US" sz="1200" dirty="0">
+                        <a:latin typeface="Calibri" charset="0"/>
+                        <a:ea typeface="Calibri" charset="0"/>
+                        <a:cs typeface="Calibri" charset="0"/>
+                      </a:endParaRPr>
+                    </a:p>
+                  </a:txBody>
+                  <a:tcPr marL="91440" marR="91440" marT="45720" marB="45720" anchor="ctr">
+                    <a:lnL w="12700" cap="flat" cmpd="sng" algn="ctr">
+                      <a:solidFill>
+                        <a:srgbClr val="D9DCE8"/>
+                      </a:solidFill>
+                      <a:prstDash val="solid"/>
+                      <a:round/>
+                      <a:headEnd type="none" w="med" len="med"/>
+                      <a:tailEnd type="none" w="med" len="med"/>
+                    </a:lnL>
+                    <a:lnR w="12700" cap="flat" cmpd="sng" algn="ctr">
+                      <a:solidFill>
+                        <a:srgbClr val="D9DCE8"/>
+                      </a:solidFill>
+                      <a:prstDash val="solid"/>
+                      <a:round/>
+                      <a:headEnd type="none" w="med" len="med"/>
+                      <a:tailEnd type="none" w="med" len="med"/>
+                    </a:lnR>
+                    <a:lnT w="12700" cap="flat" cmpd="sng" algn="ctr">
+                      <a:solidFill>
+                        <a:srgbClr val="D9DCE8"/>
+                      </a:solidFill>
+                      <a:prstDash val="solid"/>
+                      <a:round/>
+                      <a:headEnd type="none" w="med" len="med"/>
+                      <a:tailEnd type="none" w="med" len="med"/>
+                    </a:lnT>
+                    <a:lnB w="12700" cap="flat" cmpd="sng" algn="ctr">
+                      <a:solidFill>
+                        <a:srgbClr val="D9DCE8"/>
+                      </a:solidFill>
+                      <a:prstDash val="solid"/>
+                      <a:round/>
+                      <a:headEnd type="none" w="med" len="med"/>
+                      <a:tailEnd type="none" w="med" len="med"/>
+                    </a:lnB>
+                  </a:tcPr>
+                </a:tc>
+                <a:tc>
+                  <a:txBody>
+                    <a:bodyPr/>
+                    <a:lstStyle/>
+                    <a:p>
+                      <a:pPr algn="ctr" indent="0" marL="0">
+                        <a:buNone/>
+                      </a:pPr>
+                      <a:r>
+                        <a:rPr lang="en-US" sz="1200" dirty="0">
+                          <a:solidFill>
+                            <a:srgbClr val="000000"/>
+                          </a:solidFill>
+                          <a:latin typeface="Calibri" pitchFamily="34" charset="0"/>
+                          <a:ea typeface="Calibri" pitchFamily="34" charset="-122"/>
+                          <a:cs typeface="Calibri" pitchFamily="34" charset="-120"/>
+                        </a:rPr>
+                        <a:t>Thường</a:t>
+                      </a:r>
+                      <a:endParaRPr lang="en-US" sz="1200" dirty="0">
+                        <a:latin typeface="Calibri" charset="0"/>
+                        <a:ea typeface="Calibri" charset="0"/>
+                        <a:cs typeface="Calibri" charset="0"/>
+                      </a:endParaRPr>
+                    </a:p>
+                  </a:txBody>
+                  <a:tcPr marL="91440" marR="91440" marT="45720" marB="45720" anchor="ctr">
+                    <a:lnL w="12700" cap="flat" cmpd="sng" algn="ctr">
+                      <a:solidFill>
+                        <a:srgbClr val="D9DCE8"/>
+                      </a:solidFill>
+                      <a:prstDash val="solid"/>
+                      <a:round/>
+                      <a:headEnd type="none" w="med" len="med"/>
+                      <a:tailEnd type="none" w="med" len="med"/>
+                    </a:lnL>
+                    <a:lnR w="12700" cap="flat" cmpd="sng" algn="ctr">
+                      <a:solidFill>
+                        <a:srgbClr val="D9DCE8"/>
+                      </a:solidFill>
+                      <a:prstDash val="solid"/>
+                      <a:round/>
+                      <a:headEnd type="none" w="med" len="med"/>
+                      <a:tailEnd type="none" w="med" len="med"/>
+                    </a:lnR>
+                    <a:lnT w="12700" cap="flat" cmpd="sng" algn="ctr">
+                      <a:solidFill>
+                        <a:srgbClr val="D9DCE8"/>
+                      </a:solidFill>
+                      <a:prstDash val="solid"/>
+                      <a:round/>
+                      <a:headEnd type="none" w="med" len="med"/>
+                      <a:tailEnd type="none" w="med" len="med"/>
+                    </a:lnT>
+                    <a:lnB w="12700" cap="flat" cmpd="sng" algn="ctr">
+                      <a:solidFill>
+                        <a:srgbClr val="D9DCE8"/>
+                      </a:solidFill>
+                      <a:prstDash val="solid"/>
+                      <a:round/>
+                      <a:headEnd type="none" w="med" len="med"/>
+                      <a:tailEnd type="none" w="med" len="med"/>
+                    </a:lnB>
+                  </a:tcPr>
+                </a:tc>
+              </a:tr>
+              <a:tr h="384048">
+                <a:tc>
+                  <a:txBody>
+                    <a:bodyPr/>
+                    <a:lstStyle/>
+                    <a:p>
+                      <a:pPr algn="ctr" indent="0" marL="0">
+                        <a:buNone/>
+                      </a:pPr>
+                      <a:r>
+                        <a:rPr lang="en-US" sz="1200" dirty="0">
+                          <a:solidFill>
+                            <a:srgbClr val="990011"/>
+                          </a:solidFill>
+                          <a:latin typeface="Calibri" pitchFamily="34" charset="0"/>
+                          <a:ea typeface="Calibri" pitchFamily="34" charset="-122"/>
+                          <a:cs typeface="Calibri" pitchFamily="34" charset="-120"/>
+                        </a:rPr>
+                        <a:t>af_003</a:t>
+                      </a:r>
+                      <a:endParaRPr lang="en-US" sz="1200" dirty="0">
+                        <a:latin typeface="Calibri" charset="0"/>
+                        <a:ea typeface="Calibri" charset="0"/>
+                        <a:cs typeface="Calibri" charset="0"/>
+                      </a:endParaRPr>
+                    </a:p>
+                  </a:txBody>
+                  <a:tcPr marL="91440" marR="91440" marT="45720" marB="45720" anchor="ctr">
+                    <a:lnL w="12700" cap="flat" cmpd="sng" algn="ctr">
+                      <a:solidFill>
+                        <a:srgbClr val="D9DCE8"/>
+                      </a:solidFill>
+                      <a:prstDash val="solid"/>
+                      <a:round/>
+                      <a:headEnd type="none" w="med" len="med"/>
+                      <a:tailEnd type="none" w="med" len="med"/>
+                    </a:lnL>
+                    <a:lnR w="12700" cap="flat" cmpd="sng" algn="ctr">
+                      <a:solidFill>
+                        <a:srgbClr val="D9DCE8"/>
+                      </a:solidFill>
+                      <a:prstDash val="solid"/>
+                      <a:round/>
+                      <a:headEnd type="none" w="med" len="med"/>
+                      <a:tailEnd type="none" w="med" len="med"/>
+                    </a:lnR>
+                    <a:lnT w="12700" cap="flat" cmpd="sng" algn="ctr">
+                      <a:solidFill>
+                        <a:srgbClr val="D9DCE8"/>
+                      </a:solidFill>
+                      <a:prstDash val="solid"/>
+                      <a:round/>
+                      <a:headEnd type="none" w="med" len="med"/>
+                      <a:tailEnd type="none" w="med" len="med"/>
+                    </a:lnT>
+                    <a:lnB w="12700" cap="flat" cmpd="sng" algn="ctr">
+                      <a:solidFill>
+                        <a:srgbClr val="D9DCE8"/>
+                      </a:solidFill>
+                      <a:prstDash val="solid"/>
+                      <a:round/>
+                      <a:headEnd type="none" w="med" len="med"/>
+                      <a:tailEnd type="none" w="med" len="med"/>
+                    </a:lnB>
+                  </a:tcPr>
+                </a:tc>
+                <a:tc>
+                  <a:txBody>
+                    <a:bodyPr/>
+                    <a:lstStyle/>
+                    <a:p>
+                      <a:pPr algn="ctr" indent="0" marL="0">
+                        <a:buNone/>
+                      </a:pPr>
+                      <a:r>
+                        <a:rPr lang="en-US" sz="1200" dirty="0">
+                          <a:solidFill>
+                            <a:srgbClr val="990011"/>
+                          </a:solidFill>
+                          <a:latin typeface="Calibri" pitchFamily="34" charset="0"/>
+                          <a:ea typeface="Calibri" pitchFamily="34" charset="-122"/>
+                          <a:cs typeface="Calibri" pitchFamily="34" charset="-120"/>
+                        </a:rPr>
+                        <a:t>78.2</a:t>
+                      </a:r>
+                      <a:endParaRPr lang="en-US" sz="1200" dirty="0">
+                        <a:latin typeface="Calibri" charset="0"/>
+                        <a:ea typeface="Calibri" charset="0"/>
+                        <a:cs typeface="Calibri" charset="0"/>
+                      </a:endParaRPr>
+                    </a:p>
+                  </a:txBody>
+                  <a:tcPr marL="91440" marR="91440" marT="45720" marB="45720" anchor="ctr">
+                    <a:lnL w="12700" cap="flat" cmpd="sng" algn="ctr">
+                      <a:solidFill>
+                        <a:srgbClr val="D9DCE8"/>
+                      </a:solidFill>
+                      <a:prstDash val="solid"/>
+                      <a:round/>
+                      <a:headEnd type="none" w="med" len="med"/>
+                      <a:tailEnd type="none" w="med" len="med"/>
+                    </a:lnL>
+                    <a:lnR w="12700" cap="flat" cmpd="sng" algn="ctr">
+                      <a:solidFill>
+                        <a:srgbClr val="D9DCE8"/>
+                      </a:solidFill>
+                      <a:prstDash val="solid"/>
+                      <a:round/>
+                      <a:headEnd type="none" w="med" len="med"/>
+                      <a:tailEnd type="none" w="med" len="med"/>
+                    </a:lnR>
+                    <a:lnT w="12700" cap="flat" cmpd="sng" algn="ctr">
+                      <a:solidFill>
+                        <a:srgbClr val="D9DCE8"/>
+                      </a:solidFill>
+                      <a:prstDash val="solid"/>
+                      <a:round/>
+                      <a:headEnd type="none" w="med" len="med"/>
+                      <a:tailEnd type="none" w="med" len="med"/>
+                    </a:lnT>
+                    <a:lnB w="12700" cap="flat" cmpd="sng" algn="ctr">
+                      <a:solidFill>
+                        <a:srgbClr val="D9DCE8"/>
+                      </a:solidFill>
+                      <a:prstDash val="solid"/>
+                      <a:round/>
+                      <a:headEnd type="none" w="med" len="med"/>
+                      <a:tailEnd type="none" w="med" len="med"/>
+                    </a:lnB>
+                  </a:tcPr>
+                </a:tc>
+                <a:tc>
+                  <a:txBody>
+                    <a:bodyPr/>
+                    <a:lstStyle/>
+                    <a:p>
+                      <a:pPr algn="ctr" indent="0" marL="0">
+                        <a:buNone/>
+                      </a:pPr>
+                      <a:r>
+                        <a:rPr lang="en-US" sz="1200" b="1" dirty="0">
+                          <a:solidFill>
+                            <a:srgbClr val="990011"/>
+                          </a:solidFill>
+                          <a:latin typeface="Calibri" pitchFamily="34" charset="0"/>
+                          <a:ea typeface="Calibri" pitchFamily="34" charset="-122"/>
+                          <a:cs typeface="Calibri" pitchFamily="34" charset="-120"/>
+                        </a:rPr>
+                        <a:t>295.2</a:t>
+                      </a:r>
+                      <a:endParaRPr lang="en-US" sz="1200" dirty="0">
+                        <a:latin typeface="Calibri" charset="0"/>
+                        <a:ea typeface="Calibri" charset="0"/>
+                        <a:cs typeface="Calibri" charset="0"/>
+                      </a:endParaRPr>
+                    </a:p>
+                  </a:txBody>
+                  <a:tcPr marL="91440" marR="91440" marT="45720" marB="45720" anchor="ctr">
+                    <a:lnL w="12700" cap="flat" cmpd="sng" algn="ctr">
+                      <a:solidFill>
+                        <a:srgbClr val="D9DCE8"/>
+                      </a:solidFill>
+                      <a:prstDash val="solid"/>
+                      <a:round/>
+                      <a:headEnd type="none" w="med" len="med"/>
+                      <a:tailEnd type="none" w="med" len="med"/>
+                    </a:lnL>
+                    <a:lnR w="12700" cap="flat" cmpd="sng" algn="ctr">
+                      <a:solidFill>
+                        <a:srgbClr val="D9DCE8"/>
+                      </a:solidFill>
+                      <a:prstDash val="solid"/>
+                      <a:round/>
+                      <a:headEnd type="none" w="med" len="med"/>
+                      <a:tailEnd type="none" w="med" len="med"/>
+                    </a:lnR>
+                    <a:lnT w="12700" cap="flat" cmpd="sng" algn="ctr">
+                      <a:solidFill>
+                        <a:srgbClr val="D9DCE8"/>
+                      </a:solidFill>
+                      <a:prstDash val="solid"/>
+                      <a:round/>
+                      <a:headEnd type="none" w="med" len="med"/>
+                      <a:tailEnd type="none" w="med" len="med"/>
+                    </a:lnT>
+                    <a:lnB w="12700" cap="flat" cmpd="sng" algn="ctr">
+                      <a:solidFill>
+                        <a:srgbClr val="D9DCE8"/>
+                      </a:solidFill>
+                      <a:prstDash val="solid"/>
+                      <a:round/>
+                      <a:headEnd type="none" w="med" len="med"/>
+                      <a:tailEnd type="none" w="med" len="med"/>
+                    </a:lnB>
+                  </a:tcPr>
+                </a:tc>
+                <a:tc>
+                  <a:txBody>
+                    <a:bodyPr/>
+                    <a:lstStyle/>
+                    <a:p>
+                      <a:pPr algn="ctr" indent="0" marL="0">
+                        <a:buNone/>
+                      </a:pPr>
+                      <a:r>
+                        <a:rPr lang="en-US" sz="1200" dirty="0">
+                          <a:solidFill>
+                            <a:srgbClr val="990011"/>
+                          </a:solidFill>
+                          <a:latin typeface="Calibri" pitchFamily="34" charset="0"/>
+                          <a:ea typeface="Calibri" pitchFamily="34" charset="-122"/>
+                          <a:cs typeface="Calibri" pitchFamily="34" charset="-120"/>
+                        </a:rPr>
+                        <a:t>...</a:t>
+                      </a:r>
+                      <a:endParaRPr lang="en-US" sz="1200" dirty="0">
+                        <a:latin typeface="Calibri" charset="0"/>
+                        <a:ea typeface="Calibri" charset="0"/>
+                        <a:cs typeface="Calibri" charset="0"/>
+                      </a:endParaRPr>
+                    </a:p>
+                  </a:txBody>
+                  <a:tcPr marL="91440" marR="91440" marT="45720" marB="45720" anchor="ctr">
+                    <a:lnL w="12700" cap="flat" cmpd="sng" algn="ctr">
+                      <a:solidFill>
+                        <a:srgbClr val="D9DCE8"/>
+                      </a:solidFill>
+                      <a:prstDash val="solid"/>
+                      <a:round/>
+                      <a:headEnd type="none" w="med" len="med"/>
+                      <a:tailEnd type="none" w="med" len="med"/>
+                    </a:lnL>
+                    <a:lnR w="12700" cap="flat" cmpd="sng" algn="ctr">
+                      <a:solidFill>
+                        <a:srgbClr val="D9DCE8"/>
+                      </a:solidFill>
+                      <a:prstDash val="solid"/>
+                      <a:round/>
+                      <a:headEnd type="none" w="med" len="med"/>
+                      <a:tailEnd type="none" w="med" len="med"/>
+                    </a:lnR>
+                    <a:lnT w="12700" cap="flat" cmpd="sng" algn="ctr">
+                      <a:solidFill>
+                        <a:srgbClr val="D9DCE8"/>
+                      </a:solidFill>
+                      <a:prstDash val="solid"/>
+                      <a:round/>
+                      <a:headEnd type="none" w="med" len="med"/>
+                      <a:tailEnd type="none" w="med" len="med"/>
+                    </a:lnT>
+                    <a:lnB w="12700" cap="flat" cmpd="sng" algn="ctr">
+                      <a:solidFill>
+                        <a:srgbClr val="D9DCE8"/>
+                      </a:solidFill>
+                      <a:prstDash val="solid"/>
+                      <a:round/>
+                      <a:headEnd type="none" w="med" len="med"/>
+                      <a:tailEnd type="none" w="med" len="med"/>
+                    </a:lnB>
+                  </a:tcPr>
+                </a:tc>
+                <a:tc>
+                  <a:txBody>
+                    <a:bodyPr/>
+                    <a:lstStyle/>
+                    <a:p>
+                      <a:pPr algn="ctr" indent="0" marL="0">
+                        <a:buNone/>
+                      </a:pPr>
+                      <a:r>
+                        <a:rPr lang="en-US" sz="1200" b="1" dirty="0">
+                          <a:solidFill>
+                            <a:srgbClr val="990011"/>
+                          </a:solidFill>
+                          <a:latin typeface="Calibri" pitchFamily="34" charset="0"/>
+                          <a:ea typeface="Calibri" pitchFamily="34" charset="-122"/>
+                          <a:cs typeface="Calibri" pitchFamily="34" charset="-120"/>
+                        </a:rPr>
+                        <a:t>AFib</a:t>
+                      </a:r>
+                      <a:endParaRPr lang="en-US" sz="1200" dirty="0">
+                        <a:latin typeface="Calibri" charset="0"/>
+                        <a:ea typeface="Calibri" charset="0"/>
+                        <a:cs typeface="Calibri" charset="0"/>
+                      </a:endParaRPr>
+                    </a:p>
+                  </a:txBody>
+                  <a:tcPr marL="91440" marR="91440" marT="45720" marB="45720" anchor="ctr">
+                    <a:lnL w="12700" cap="flat" cmpd="sng" algn="ctr">
+                      <a:solidFill>
+                        <a:srgbClr val="D9DCE8"/>
+                      </a:solidFill>
+                      <a:prstDash val="solid"/>
+                      <a:round/>
+                      <a:headEnd type="none" w="med" len="med"/>
+                      <a:tailEnd type="none" w="med" len="med"/>
+                    </a:lnL>
+                    <a:lnR w="12700" cap="flat" cmpd="sng" algn="ctr">
+                      <a:solidFill>
+                        <a:srgbClr val="D9DCE8"/>
+                      </a:solidFill>
+                      <a:prstDash val="solid"/>
+                      <a:round/>
+                      <a:headEnd type="none" w="med" len="med"/>
+                      <a:tailEnd type="none" w="med" len="med"/>
+                    </a:lnR>
+                    <a:lnT w="12700" cap="flat" cmpd="sng" algn="ctr">
+                      <a:solidFill>
+                        <a:srgbClr val="D9DCE8"/>
+                      </a:solidFill>
+                      <a:prstDash val="solid"/>
+                      <a:round/>
+                      <a:headEnd type="none" w="med" len="med"/>
+                      <a:tailEnd type="none" w="med" len="med"/>
+                    </a:lnT>
+                    <a:lnB w="12700" cap="flat" cmpd="sng" algn="ctr">
+                      <a:solidFill>
+                        <a:srgbClr val="D9DCE8"/>
+                      </a:solidFill>
+                      <a:prstDash val="solid"/>
+                      <a:round/>
+                      <a:headEnd type="none" w="med" len="med"/>
+                      <a:tailEnd type="none" w="med" len="med"/>
+                    </a:lnB>
+                  </a:tcPr>
+                </a:tc>
+              </a:tr>
+            </a:tbl>
+          </a:graphicData>
+        </a:graphic>
+      </p:graphicFrame>
+      <p:sp>
+        <p:nvSpPr>
+          <p:cNvPr id="16" name="Text 13"/>
+          <p:cNvSpPr txBox="1"/>
+          <p:nvPr/>
+        </p:nvSpPr>
+        <p:spPr>
+          <a:xfrm>
+            <a:off x="6035040" y="3520440"/>
+            <a:ext cx="5669280" cy="685800"/>
+          </a:xfrm>
+          <a:prstGeom prst="rect">
+            <a:avLst/>
+          </a:prstGeom>
+          <a:noFill/>
+          <a:ln/>
+        </p:spPr>
+        <p:txBody>
+          <a:bodyPr wrap="square" lIns="0" tIns="0" rIns="0" bIns="0" rtlCol="0" anchor="ctr"/>
+          <a:lstStyle/>
+          <a:p>
+            <a:pPr indent="0" marL="0">
+              <a:buNone/>
+            </a:pPr>
+            <a:r>
+              <a:rPr lang="en-US" sz="1200" i="1" dirty="0">
+                <a:solidFill>
+                  <a:srgbClr val="64748B"/>
+                </a:solidFill>
+                <a:latin typeface="Calibri" pitchFamily="34" charset="0"/>
+                <a:ea typeface="Calibri" pitchFamily="34" charset="-122"/>
+                <a:cs typeface="Calibri" pitchFamily="34" charset="-120"/>
+              </a:rPr>
+              <a:t>4.130 hàng (MIMIC) — thêm cột record_id để chia theo bệnh nhân. Đây mới là thứ đưa vào mô hình.</a:t>
+            </a:r>
+            <a:endParaRPr lang="en-US" sz="1200" dirty="0"/>
+          </a:p>
+        </p:txBody>
+      </p:sp>
+      <p:sp>
+        <p:nvSpPr>
+          <p:cNvPr id="17" name="Shape 14"/>
+          <p:cNvSpPr/>
+          <p:nvPr/>
+        </p:nvSpPr>
+        <p:spPr>
+          <a:xfrm>
+            <a:off x="640080" y="5029200"/>
+            <a:ext cx="10908792" cy="1325880"/>
+          </a:xfrm>
+          <a:prstGeom prst="roundRect">
+            <a:avLst>
+              <a:gd name="adj" fmla="val 8276"/>
+            </a:avLst>
+          </a:prstGeom>
+          <a:solidFill>
+            <a:srgbClr val="FCF6F5"/>
+          </a:solidFill>
+          <a:ln w="15875">
+            <a:solidFill>
+              <a:srgbClr val="990011"/>
+            </a:solidFill>
+            <a:prstDash val="solid"/>
+          </a:ln>
+        </p:spPr>
+      </p:sp>
+      <p:sp>
+        <p:nvSpPr>
+          <p:cNvPr id="18" name="Shape 15"/>
+          <p:cNvSpPr/>
+          <p:nvPr/>
+        </p:nvSpPr>
+        <p:spPr>
+          <a:xfrm>
+            <a:off x="914400" y="5413248"/>
+            <a:ext cx="502920" cy="502920"/>
+          </a:xfrm>
+          <a:prstGeom prst="ellipse">
+            <a:avLst/>
+          </a:prstGeom>
+          <a:solidFill>
+            <a:srgbClr val="990011"/>
+          </a:solidFill>
           <a:ln/>
         </p:spPr>
       </p:sp>
       <p:pic>
         <p:nvPicPr>
-          <p:cNvPr id="4" name="Image 0" descr="preencoded.png">    </p:cNvPr>
+          <p:cNvPr id="19" name="Image 0" descr="preencoded.png">    </p:cNvPr>
           <p:cNvPicPr>
             <a:picLocks noChangeAspect="1"/>
           </p:cNvPicPr>
@@ -9989,7 +12160,7 @@
         </p:blipFill>
         <p:spPr>
           <a:xfrm>
-            <a:off x="750722" y="1454810"/>
+            <a:off x="1025042" y="5523890"/>
             <a:ext cx="281635" cy="281635"/>
           </a:xfrm>
           <a:prstGeom prst="rect">
@@ -9999,14 +12170,14 @@
       </p:pic>
       <p:sp>
         <p:nvSpPr>
-          <p:cNvPr id="5" name="Text 2"/>
+          <p:cNvPr id="20" name="Text 16"/>
           <p:cNvSpPr txBox="1"/>
           <p:nvPr/>
         </p:nvSpPr>
         <p:spPr>
           <a:xfrm>
-            <a:off x="1371600" y="1234440"/>
-            <a:ext cx="10241280" cy="411480"/>
+            <a:off x="1600200" y="5138928"/>
+            <a:ext cx="9720072" cy="1143000"/>
           </a:xfrm>
           <a:prstGeom prst="rect">
             <a:avLst/>
@@ -10022,342 +12193,31 @@
               <a:buNone/>
             </a:pPr>
             <a:r>
-              <a:rPr lang="en-US" sz="1600" b="1" dirty="0">
-                <a:solidFill>
-                  <a:srgbClr val="2F3C7E"/>
+              <a:rPr lang="en-US" sz="1350" b="1" dirty="0">
+                <a:solidFill>
+                  <a:srgbClr val="990011"/>
                 </a:solidFill>
                 <a:latin typeface="Calibri" pitchFamily="34" charset="0"/>
                 <a:ea typeface="Calibri" pitchFamily="34" charset="-122"/>
                 <a:cs typeface="Calibri" pitchFamily="34" charset="-120"/>
               </a:rPr>
-              <a:t>Nhóm THỜI GIAN (7)   </a:t>
+              <a:t>Dựa vào đâu ra đúng 16? </a:t>
             </a:r>
             <a:pPr indent="0" marL="0">
               <a:buNone/>
             </a:pPr>
             <a:r>
-              <a:rPr lang="en-US" sz="1300" i="1" dirty="0">
-                <a:solidFill>
-                  <a:srgbClr val="990011"/>
+              <a:rPr lang="en-US" sz="1350" dirty="0">
+                <a:solidFill>
+                  <a:srgbClr val="333333"/>
                 </a:solidFill>
                 <a:latin typeface="Calibri" pitchFamily="34" charset="0"/>
                 <a:ea typeface="Calibri" pitchFamily="34" charset="-122"/>
                 <a:cs typeface="Calibri" pitchFamily="34" charset="-120"/>
               </a:rPr>
-              <a:t>RMSSD, pNN50, SDNN, CV...</a:t>
-            </a:r>
-            <a:endParaRPr lang="en-US" sz="1600" dirty="0"/>
-          </a:p>
-        </p:txBody>
-      </p:sp>
-      <p:sp>
-        <p:nvSpPr>
-          <p:cNvPr id="6" name="Text 3"/>
-          <p:cNvSpPr txBox="1"/>
-          <p:nvPr/>
-        </p:nvSpPr>
-        <p:spPr>
-          <a:xfrm>
-            <a:off x="1371600" y="1673352"/>
-            <a:ext cx="10241280" cy="1051560"/>
-          </a:xfrm>
-          <a:prstGeom prst="rect">
-            <a:avLst/>
-          </a:prstGeom>
-          <a:noFill/>
-          <a:ln/>
-        </p:spPr>
-        <p:txBody>
-          <a:bodyPr wrap="square" lIns="0" tIns="0" rIns="0" bIns="0" rtlCol="0" anchor="ctr"/>
-          <a:lstStyle/>
-          <a:p>
-            <a:pPr indent="0" marL="0">
-              <a:buNone/>
-            </a:pPr>
-            <a:r>
-              <a:rPr lang="en-US" sz="1300" dirty="0">
-                <a:solidFill>
-                  <a:srgbClr val="444444"/>
-                </a:solidFill>
-                <a:latin typeface="Calibri" pitchFamily="34" charset="0"/>
-                <a:ea typeface="Calibri" pitchFamily="34" charset="-122"/>
-                <a:cs typeface="Calibri" pitchFamily="34" charset="-120"/>
-              </a:rPr>
-              <a:t>Thước kẻ: đo trực tiếp độ nhấp nhô của chuỗi NN. pNN50 = % cặp nhịp liền kề lệch nhau &gt;50ms — người AF thường &gt;70%, người thường &lt;20%.</a:t>
-            </a:r>
-            <a:endParaRPr lang="en-US" sz="1300" dirty="0"/>
-          </a:p>
-        </p:txBody>
-      </p:sp>
-      <p:sp>
-        <p:nvSpPr>
-          <p:cNvPr id="7" name="Shape 4"/>
-          <p:cNvSpPr/>
-          <p:nvPr/>
-        </p:nvSpPr>
-        <p:spPr>
-          <a:xfrm>
-            <a:off x="640080" y="2971800"/>
-            <a:ext cx="502920" cy="502920"/>
-          </a:xfrm>
-          <a:prstGeom prst="ellipse">
-            <a:avLst/>
-          </a:prstGeom>
-          <a:solidFill>
-            <a:srgbClr val="64748B"/>
-          </a:solidFill>
-          <a:ln/>
-        </p:spPr>
-      </p:sp>
-      <p:pic>
-        <p:nvPicPr>
-          <p:cNvPr id="8" name="Image 1" descr="preencoded.png">    </p:cNvPr>
-          <p:cNvPicPr>
-            <a:picLocks noChangeAspect="1"/>
-          </p:cNvPicPr>
-          <p:nvPr/>
-        </p:nvPicPr>
-        <p:blipFill>
-          <a:blip r:embed="rId2"/>
-          <a:stretch>
-            <a:fillRect/>
-          </a:stretch>
-        </p:blipFill>
-        <p:spPr>
-          <a:xfrm>
-            <a:off x="750722" y="3082442"/>
-            <a:ext cx="281635" cy="281635"/>
-          </a:xfrm>
-          <a:prstGeom prst="rect">
-            <a:avLst/>
-          </a:prstGeom>
-        </p:spPr>
-      </p:pic>
-      <p:sp>
-        <p:nvSpPr>
-          <p:cNvPr id="9" name="Text 5"/>
-          <p:cNvSpPr txBox="1"/>
-          <p:nvPr/>
-        </p:nvSpPr>
-        <p:spPr>
-          <a:xfrm>
-            <a:off x="1371600" y="2862072"/>
-            <a:ext cx="10241280" cy="411480"/>
-          </a:xfrm>
-          <a:prstGeom prst="rect">
-            <a:avLst/>
-          </a:prstGeom>
-          <a:noFill/>
-          <a:ln/>
-        </p:spPr>
-        <p:txBody>
-          <a:bodyPr wrap="square" lIns="0" tIns="0" rIns="0" bIns="0" rtlCol="0" anchor="ctr"/>
-          <a:lstStyle/>
-          <a:p>
-            <a:pPr indent="0" marL="0">
-              <a:buNone/>
-            </a:pPr>
-            <a:r>
-              <a:rPr lang="en-US" sz="1600" b="1" dirty="0">
-                <a:solidFill>
-                  <a:srgbClr val="2F3C7E"/>
-                </a:solidFill>
-                <a:latin typeface="Calibri" pitchFamily="34" charset="0"/>
-                <a:ea typeface="Calibri" pitchFamily="34" charset="-122"/>
-                <a:cs typeface="Calibri" pitchFamily="34" charset="-120"/>
-              </a:rPr>
-              <a:t>Nhóm TẦN SỐ (6)   </a:t>
-            </a:r>
-            <a:pPr indent="0" marL="0">
-              <a:buNone/>
-            </a:pPr>
-            <a:r>
-              <a:rPr lang="en-US" sz="1300" i="1" dirty="0">
-                <a:solidFill>
-                  <a:srgbClr val="990011"/>
-                </a:solidFill>
-                <a:latin typeface="Calibri" pitchFamily="34" charset="0"/>
-                <a:ea typeface="Calibri" pitchFamily="34" charset="-122"/>
-                <a:cs typeface="Calibri" pitchFamily="34" charset="-120"/>
-              </a:rPr>
-              <a:t>HF, Total Power... (LF bị LOẠI)</a:t>
-            </a:r>
-            <a:endParaRPr lang="en-US" sz="1600" dirty="0"/>
-          </a:p>
-        </p:txBody>
-      </p:sp>
-      <p:sp>
-        <p:nvSpPr>
-          <p:cNvPr id="10" name="Text 6"/>
-          <p:cNvSpPr txBox="1"/>
-          <p:nvPr/>
-        </p:nvSpPr>
-        <p:spPr>
-          <a:xfrm>
-            <a:off x="1371600" y="3300984"/>
-            <a:ext cx="10241280" cy="1051560"/>
-          </a:xfrm>
-          <a:prstGeom prst="rect">
-            <a:avLst/>
-          </a:prstGeom>
-          <a:noFill/>
-          <a:ln/>
-        </p:spPr>
-        <p:txBody>
-          <a:bodyPr wrap="square" lIns="0" tIns="0" rIns="0" bIns="0" rtlCol="0" anchor="ctr"/>
-          <a:lstStyle/>
-          <a:p>
-            <a:pPr indent="0" marL="0">
-              <a:buNone/>
-            </a:pPr>
-            <a:r>
-              <a:rPr lang="en-US" sz="1300" dirty="0">
-                <a:solidFill>
-                  <a:srgbClr val="444444"/>
-                </a:solidFill>
-                <a:latin typeface="Calibri" pitchFamily="34" charset="0"/>
-                <a:ea typeface="Calibri" pitchFamily="34" charset="-122"/>
-                <a:cs typeface="Calibri" pitchFamily="34" charset="-120"/>
-              </a:rPr>
-              <a:t>Máy phân tích nhạc: tách dao động theo nhịp thở, thần kinh. Nhóm LF cần bản ghi ≥2 phút mới tin được — cửa sổ 30s của ta quá ngắn → loại 3 đặc trưng LF, còn dùng 13.</a:t>
-            </a:r>
-            <a:endParaRPr lang="en-US" sz="1300" dirty="0"/>
-          </a:p>
-        </p:txBody>
-      </p:sp>
-      <p:sp>
-        <p:nvSpPr>
-          <p:cNvPr id="11" name="Shape 7"/>
-          <p:cNvSpPr/>
-          <p:nvPr/>
-        </p:nvSpPr>
-        <p:spPr>
-          <a:xfrm>
-            <a:off x="640080" y="4599432"/>
-            <a:ext cx="502920" cy="502920"/>
-          </a:xfrm>
-          <a:prstGeom prst="ellipse">
-            <a:avLst/>
-          </a:prstGeom>
-          <a:solidFill>
-            <a:srgbClr val="2F3C7E"/>
-          </a:solidFill>
-          <a:ln/>
-        </p:spPr>
-      </p:sp>
-      <p:pic>
-        <p:nvPicPr>
-          <p:cNvPr id="12" name="Image 2" descr="preencoded.png">    </p:cNvPr>
-          <p:cNvPicPr>
-            <a:picLocks noChangeAspect="1"/>
-          </p:cNvPicPr>
-          <p:nvPr/>
-        </p:nvPicPr>
-        <p:blipFill>
-          <a:blip r:embed="rId3"/>
-          <a:stretch>
-            <a:fillRect/>
-          </a:stretch>
-        </p:blipFill>
-        <p:spPr>
-          <a:xfrm>
-            <a:off x="750722" y="4710074"/>
-            <a:ext cx="281635" cy="281635"/>
-          </a:xfrm>
-          <a:prstGeom prst="rect">
-            <a:avLst/>
-          </a:prstGeom>
-        </p:spPr>
-      </p:pic>
-      <p:sp>
-        <p:nvSpPr>
-          <p:cNvPr id="13" name="Text 8"/>
-          <p:cNvSpPr txBox="1"/>
-          <p:nvPr/>
-        </p:nvSpPr>
-        <p:spPr>
-          <a:xfrm>
-            <a:off x="1371600" y="4489704"/>
-            <a:ext cx="10241280" cy="411480"/>
-          </a:xfrm>
-          <a:prstGeom prst="rect">
-            <a:avLst/>
-          </a:prstGeom>
-          <a:noFill/>
-          <a:ln/>
-        </p:spPr>
-        <p:txBody>
-          <a:bodyPr wrap="square" lIns="0" tIns="0" rIns="0" bIns="0" rtlCol="0" anchor="ctr"/>
-          <a:lstStyle/>
-          <a:p>
-            <a:pPr indent="0" marL="0">
-              <a:buNone/>
-            </a:pPr>
-            <a:r>
-              <a:rPr lang="en-US" sz="1600" b="1" dirty="0">
-                <a:solidFill>
-                  <a:srgbClr val="2F3C7E"/>
-                </a:solidFill>
-                <a:latin typeface="Calibri" pitchFamily="34" charset="0"/>
-                <a:ea typeface="Calibri" pitchFamily="34" charset="-122"/>
-                <a:cs typeface="Calibri" pitchFamily="34" charset="-120"/>
-              </a:rPr>
-              <a:t>Nhóm PHI TUYẾN (3)   </a:t>
-            </a:r>
-            <a:pPr indent="0" marL="0">
-              <a:buNone/>
-            </a:pPr>
-            <a:r>
-              <a:rPr lang="en-US" sz="1300" i="1" dirty="0">
-                <a:solidFill>
-                  <a:srgbClr val="990011"/>
-                </a:solidFill>
-                <a:latin typeface="Calibri" pitchFamily="34" charset="0"/>
-                <a:ea typeface="Calibri" pitchFamily="34" charset="-122"/>
-                <a:cs typeface="Calibri" pitchFamily="34" charset="-120"/>
-              </a:rPr>
-              <a:t>SampEn, SD1, SD2 (Poincaré)</a:t>
-            </a:r>
-            <a:endParaRPr lang="en-US" sz="1600" dirty="0"/>
-          </a:p>
-        </p:txBody>
-      </p:sp>
-      <p:sp>
-        <p:nvSpPr>
-          <p:cNvPr id="14" name="Text 9"/>
-          <p:cNvSpPr txBox="1"/>
-          <p:nvPr/>
-        </p:nvSpPr>
-        <p:spPr>
-          <a:xfrm>
-            <a:off x="1371600" y="4928616"/>
-            <a:ext cx="10241280" cy="1051560"/>
-          </a:xfrm>
-          <a:prstGeom prst="rect">
-            <a:avLst/>
-          </a:prstGeom>
-          <a:noFill/>
-          <a:ln/>
-        </p:spPr>
-        <p:txBody>
-          <a:bodyPr wrap="square" lIns="0" tIns="0" rIns="0" bIns="0" rtlCol="0" anchor="ctr"/>
-          <a:lstStyle/>
-          <a:p>
-            <a:pPr indent="0" marL="0">
-              <a:buNone/>
-            </a:pPr>
-            <a:r>
-              <a:rPr lang="en-US" sz="1300" dirty="0">
-                <a:solidFill>
-                  <a:srgbClr val="444444"/>
-                </a:solidFill>
-                <a:latin typeface="Calibri" pitchFamily="34" charset="0"/>
-                <a:ea typeface="Calibri" pitchFamily="34" charset="-122"/>
-                <a:cs typeface="Calibri" pitchFamily="34" charset="-120"/>
-              </a:rPr>
-              <a:t>Máy đo độ khó đoán: SampEn cao = chuỗi nhịp hỗn loạn khó dự đoán — đặc trưng 'sát thủ' với AFib. SD1/SD2 là hình dáng đám mây Poincaré (slide sau).</a:t>
-            </a:r>
-            <a:endParaRPr lang="en-US" sz="1300" dirty="0"/>
+              <a:t>Không tự nghĩ ra — lấy theo CHUẨN Y KHOA QUỐC TẾ Task Force 1996 (hai hiệp hội tim mạch Âu–Mỹ cùng định nghĩa bộ chỉ số HRV): mỗi chỉ số có ý nghĩa sinh lý được công nhận, bác sĩ đọc hiểu được, và so sánh được với nghiên cứu khác.</a:t>
+            </a:r>
+            <a:endParaRPr lang="en-US" sz="1350" dirty="0"/>
           </a:p>
         </p:txBody>
       </p:sp>
@@ -10419,15 +12279,35 @@
                 <a:ea typeface="Cambria" pitchFamily="34" charset="-122"/>
                 <a:cs typeface="Cambria" pitchFamily="34" charset="-120"/>
               </a:rPr>
-              <a:t>Poincaré — 'chụp X-quang' cho nhịp tim</a:t>
+              <a:t>16 đặc trưng HRV — 3 cách đo 'độ loạn'</a:t>
             </a:r>
             <a:endParaRPr lang="en-US" sz="3000" dirty="0"/>
           </a:p>
         </p:txBody>
+      </p:sp>
+      <p:sp>
+        <p:nvSpPr>
+          <p:cNvPr id="3" name="Shape 1"/>
+          <p:cNvSpPr/>
+          <p:nvPr/>
+        </p:nvSpPr>
+        <p:spPr>
+          <a:xfrm>
+            <a:off x="640080" y="1344168"/>
+            <a:ext cx="502920" cy="502920"/>
+          </a:xfrm>
+          <a:prstGeom prst="ellipse">
+            <a:avLst/>
+          </a:prstGeom>
+          <a:solidFill>
+            <a:srgbClr val="2F3C7E"/>
+          </a:solidFill>
+          <a:ln/>
+        </p:spPr>
       </p:sp>
       <p:pic>
         <p:nvPicPr>
-          <p:cNvPr id="3" name="Image 0" descr="C:/Users/Admin/AppData/Local/Temp/claude/D--Projects-HealthSense/f9ec15a3-f454-4ee6-860d-29e10e4b7747/scratchpad/slides_figs/poincare_compare.png">    </p:cNvPr>
+          <p:cNvPr id="4" name="Image 0" descr="preencoded.png">    </p:cNvPr>
           <p:cNvPicPr>
             <a:picLocks noChangeAspect="1"/>
           </p:cNvPicPr>
@@ -10435,13 +12315,14 @@
         </p:nvPicPr>
         <p:blipFill>
           <a:blip r:embed="rId1"/>
-          <a:srcRect l="0" r="0" t="0" b="0"/>
-          <a:stretch/>
+          <a:stretch>
+            <a:fillRect/>
+          </a:stretch>
         </p:blipFill>
         <p:spPr>
           <a:xfrm>
-            <a:off x="1280160" y="1143000"/>
-            <a:ext cx="9628632" cy="4297680"/>
+            <a:off x="750722" y="1454810"/>
+            <a:ext cx="281635" cy="281635"/>
           </a:xfrm>
           <a:prstGeom prst="rect">
             <a:avLst/>
@@ -10450,14 +12331,14 @@
       </p:pic>
       <p:sp>
         <p:nvSpPr>
-          <p:cNvPr id="4" name="Text 1"/>
+          <p:cNvPr id="5" name="Text 2"/>
           <p:cNvSpPr txBox="1"/>
           <p:nvPr/>
         </p:nvSpPr>
         <p:spPr>
           <a:xfrm>
-            <a:off x="731520" y="5577840"/>
-            <a:ext cx="10725912" cy="777240"/>
+            <a:off x="1371600" y="1234440"/>
+            <a:ext cx="10241280" cy="411480"/>
           </a:xfrm>
           <a:prstGeom prst="rect">
             <a:avLst/>
@@ -10473,17 +12354,342 @@
               <a:buNone/>
             </a:pPr>
             <a:r>
-              <a:rPr lang="en-US" sz="1400" dirty="0">
-                <a:solidFill>
-                  <a:srgbClr val="333333"/>
+              <a:rPr lang="en-US" sz="1600" b="1" dirty="0">
+                <a:solidFill>
+                  <a:srgbClr val="2F3C7E"/>
                 </a:solidFill>
                 <a:latin typeface="Calibri" pitchFamily="34" charset="0"/>
                 <a:ea typeface="Calibri" pitchFamily="34" charset="-122"/>
                 <a:cs typeface="Calibri" pitchFamily="34" charset="-120"/>
               </a:rPr>
-              <a:t>Mỗi chấm = một cặp nhịp liên tiếp (nhịp n, nhịp n+1). Nhịp đều → chấm nào cũng gần chấm nào → chụm. Nhịp loạn → cặp nào cũng khác cặp nào → tản. SD1/SD2 chính là bề ngang/bề dài của đám chấm này.</a:t>
-            </a:r>
-            <a:endParaRPr lang="en-US" sz="1400" dirty="0"/>
+              <a:t>Nhóm THỜI GIAN (7)   </a:t>
+            </a:r>
+            <a:pPr indent="0" marL="0">
+              <a:buNone/>
+            </a:pPr>
+            <a:r>
+              <a:rPr lang="en-US" sz="1300" i="1" dirty="0">
+                <a:solidFill>
+                  <a:srgbClr val="990011"/>
+                </a:solidFill>
+                <a:latin typeface="Calibri" pitchFamily="34" charset="0"/>
+                <a:ea typeface="Calibri" pitchFamily="34" charset="-122"/>
+                <a:cs typeface="Calibri" pitchFamily="34" charset="-120"/>
+              </a:rPr>
+              <a:t>RMSSD, pNN50, SDNN, CV...</a:t>
+            </a:r>
+            <a:endParaRPr lang="en-US" sz="1600" dirty="0"/>
+          </a:p>
+        </p:txBody>
+      </p:sp>
+      <p:sp>
+        <p:nvSpPr>
+          <p:cNvPr id="6" name="Text 3"/>
+          <p:cNvSpPr txBox="1"/>
+          <p:nvPr/>
+        </p:nvSpPr>
+        <p:spPr>
+          <a:xfrm>
+            <a:off x="1371600" y="1673352"/>
+            <a:ext cx="10241280" cy="1051560"/>
+          </a:xfrm>
+          <a:prstGeom prst="rect">
+            <a:avLst/>
+          </a:prstGeom>
+          <a:noFill/>
+          <a:ln/>
+        </p:spPr>
+        <p:txBody>
+          <a:bodyPr wrap="square" lIns="0" tIns="0" rIns="0" bIns="0" rtlCol="0" anchor="ctr"/>
+          <a:lstStyle/>
+          <a:p>
+            <a:pPr indent="0" marL="0">
+              <a:buNone/>
+            </a:pPr>
+            <a:r>
+              <a:rPr lang="en-US" sz="1300" dirty="0">
+                <a:solidFill>
+                  <a:srgbClr val="444444"/>
+                </a:solidFill>
+                <a:latin typeface="Calibri" pitchFamily="34" charset="0"/>
+                <a:ea typeface="Calibri" pitchFamily="34" charset="-122"/>
+                <a:cs typeface="Calibri" pitchFamily="34" charset="-120"/>
+              </a:rPr>
+              <a:t>Thước kẻ: đo trực tiếp độ nhấp nhô của chuỗi NN. pNN50 = % cặp nhịp liền kề lệch nhau &gt;50ms — người AF thường &gt;70%, người thường &lt;20%.</a:t>
+            </a:r>
+            <a:endParaRPr lang="en-US" sz="1300" dirty="0"/>
+          </a:p>
+        </p:txBody>
+      </p:sp>
+      <p:sp>
+        <p:nvSpPr>
+          <p:cNvPr id="7" name="Shape 4"/>
+          <p:cNvSpPr/>
+          <p:nvPr/>
+        </p:nvSpPr>
+        <p:spPr>
+          <a:xfrm>
+            <a:off x="640080" y="2971800"/>
+            <a:ext cx="502920" cy="502920"/>
+          </a:xfrm>
+          <a:prstGeom prst="ellipse">
+            <a:avLst/>
+          </a:prstGeom>
+          <a:solidFill>
+            <a:srgbClr val="64748B"/>
+          </a:solidFill>
+          <a:ln/>
+        </p:spPr>
+      </p:sp>
+      <p:pic>
+        <p:nvPicPr>
+          <p:cNvPr id="8" name="Image 1" descr="preencoded.png">    </p:cNvPr>
+          <p:cNvPicPr>
+            <a:picLocks noChangeAspect="1"/>
+          </p:cNvPicPr>
+          <p:nvPr/>
+        </p:nvPicPr>
+        <p:blipFill>
+          <a:blip r:embed="rId2"/>
+          <a:stretch>
+            <a:fillRect/>
+          </a:stretch>
+        </p:blipFill>
+        <p:spPr>
+          <a:xfrm>
+            <a:off x="750722" y="3082442"/>
+            <a:ext cx="281635" cy="281635"/>
+          </a:xfrm>
+          <a:prstGeom prst="rect">
+            <a:avLst/>
+          </a:prstGeom>
+        </p:spPr>
+      </p:pic>
+      <p:sp>
+        <p:nvSpPr>
+          <p:cNvPr id="9" name="Text 5"/>
+          <p:cNvSpPr txBox="1"/>
+          <p:nvPr/>
+        </p:nvSpPr>
+        <p:spPr>
+          <a:xfrm>
+            <a:off x="1371600" y="2862072"/>
+            <a:ext cx="10241280" cy="411480"/>
+          </a:xfrm>
+          <a:prstGeom prst="rect">
+            <a:avLst/>
+          </a:prstGeom>
+          <a:noFill/>
+          <a:ln/>
+        </p:spPr>
+        <p:txBody>
+          <a:bodyPr wrap="square" lIns="0" tIns="0" rIns="0" bIns="0" rtlCol="0" anchor="ctr"/>
+          <a:lstStyle/>
+          <a:p>
+            <a:pPr indent="0" marL="0">
+              <a:buNone/>
+            </a:pPr>
+            <a:r>
+              <a:rPr lang="en-US" sz="1600" b="1" dirty="0">
+                <a:solidFill>
+                  <a:srgbClr val="2F3C7E"/>
+                </a:solidFill>
+                <a:latin typeface="Calibri" pitchFamily="34" charset="0"/>
+                <a:ea typeface="Calibri" pitchFamily="34" charset="-122"/>
+                <a:cs typeface="Calibri" pitchFamily="34" charset="-120"/>
+              </a:rPr>
+              <a:t>Nhóm TẦN SỐ (6)   </a:t>
+            </a:r>
+            <a:pPr indent="0" marL="0">
+              <a:buNone/>
+            </a:pPr>
+            <a:r>
+              <a:rPr lang="en-US" sz="1300" i="1" dirty="0">
+                <a:solidFill>
+                  <a:srgbClr val="990011"/>
+                </a:solidFill>
+                <a:latin typeface="Calibri" pitchFamily="34" charset="0"/>
+                <a:ea typeface="Calibri" pitchFamily="34" charset="-122"/>
+                <a:cs typeface="Calibri" pitchFamily="34" charset="-120"/>
+              </a:rPr>
+              <a:t>HF, Total Power... (LF bị LOẠI)</a:t>
+            </a:r>
+            <a:endParaRPr lang="en-US" sz="1600" dirty="0"/>
+          </a:p>
+        </p:txBody>
+      </p:sp>
+      <p:sp>
+        <p:nvSpPr>
+          <p:cNvPr id="10" name="Text 6"/>
+          <p:cNvSpPr txBox="1"/>
+          <p:nvPr/>
+        </p:nvSpPr>
+        <p:spPr>
+          <a:xfrm>
+            <a:off x="1371600" y="3300984"/>
+            <a:ext cx="10241280" cy="1051560"/>
+          </a:xfrm>
+          <a:prstGeom prst="rect">
+            <a:avLst/>
+          </a:prstGeom>
+          <a:noFill/>
+          <a:ln/>
+        </p:spPr>
+        <p:txBody>
+          <a:bodyPr wrap="square" lIns="0" tIns="0" rIns="0" bIns="0" rtlCol="0" anchor="ctr"/>
+          <a:lstStyle/>
+          <a:p>
+            <a:pPr indent="0" marL="0">
+              <a:buNone/>
+            </a:pPr>
+            <a:r>
+              <a:rPr lang="en-US" sz="1300" dirty="0">
+                <a:solidFill>
+                  <a:srgbClr val="444444"/>
+                </a:solidFill>
+                <a:latin typeface="Calibri" pitchFamily="34" charset="0"/>
+                <a:ea typeface="Calibri" pitchFamily="34" charset="-122"/>
+                <a:cs typeface="Calibri" pitchFamily="34" charset="-120"/>
+              </a:rPr>
+              <a:t>Máy phân tích nhạc: tách dao động theo nhịp thở, thần kinh. Nhóm LF cần bản ghi ≥2 phút mới tin được — cửa sổ 30s của ta quá ngắn → loại 3 đặc trưng LF, còn dùng 13.</a:t>
+            </a:r>
+            <a:endParaRPr lang="en-US" sz="1300" dirty="0"/>
+          </a:p>
+        </p:txBody>
+      </p:sp>
+      <p:sp>
+        <p:nvSpPr>
+          <p:cNvPr id="11" name="Shape 7"/>
+          <p:cNvSpPr/>
+          <p:nvPr/>
+        </p:nvSpPr>
+        <p:spPr>
+          <a:xfrm>
+            <a:off x="640080" y="4599432"/>
+            <a:ext cx="502920" cy="502920"/>
+          </a:xfrm>
+          <a:prstGeom prst="ellipse">
+            <a:avLst/>
+          </a:prstGeom>
+          <a:solidFill>
+            <a:srgbClr val="2F3C7E"/>
+          </a:solidFill>
+          <a:ln/>
+        </p:spPr>
+      </p:sp>
+      <p:pic>
+        <p:nvPicPr>
+          <p:cNvPr id="12" name="Image 2" descr="preencoded.png">    </p:cNvPr>
+          <p:cNvPicPr>
+            <a:picLocks noChangeAspect="1"/>
+          </p:cNvPicPr>
+          <p:nvPr/>
+        </p:nvPicPr>
+        <p:blipFill>
+          <a:blip r:embed="rId3"/>
+          <a:stretch>
+            <a:fillRect/>
+          </a:stretch>
+        </p:blipFill>
+        <p:spPr>
+          <a:xfrm>
+            <a:off x="750722" y="4710074"/>
+            <a:ext cx="281635" cy="281635"/>
+          </a:xfrm>
+          <a:prstGeom prst="rect">
+            <a:avLst/>
+          </a:prstGeom>
+        </p:spPr>
+      </p:pic>
+      <p:sp>
+        <p:nvSpPr>
+          <p:cNvPr id="13" name="Text 8"/>
+          <p:cNvSpPr txBox="1"/>
+          <p:nvPr/>
+        </p:nvSpPr>
+        <p:spPr>
+          <a:xfrm>
+            <a:off x="1371600" y="4489704"/>
+            <a:ext cx="10241280" cy="411480"/>
+          </a:xfrm>
+          <a:prstGeom prst="rect">
+            <a:avLst/>
+          </a:prstGeom>
+          <a:noFill/>
+          <a:ln/>
+        </p:spPr>
+        <p:txBody>
+          <a:bodyPr wrap="square" lIns="0" tIns="0" rIns="0" bIns="0" rtlCol="0" anchor="ctr"/>
+          <a:lstStyle/>
+          <a:p>
+            <a:pPr indent="0" marL="0">
+              <a:buNone/>
+            </a:pPr>
+            <a:r>
+              <a:rPr lang="en-US" sz="1600" b="1" dirty="0">
+                <a:solidFill>
+                  <a:srgbClr val="2F3C7E"/>
+                </a:solidFill>
+                <a:latin typeface="Calibri" pitchFamily="34" charset="0"/>
+                <a:ea typeface="Calibri" pitchFamily="34" charset="-122"/>
+                <a:cs typeface="Calibri" pitchFamily="34" charset="-120"/>
+              </a:rPr>
+              <a:t>Nhóm PHI TUYẾN (3)   </a:t>
+            </a:r>
+            <a:pPr indent="0" marL="0">
+              <a:buNone/>
+            </a:pPr>
+            <a:r>
+              <a:rPr lang="en-US" sz="1300" i="1" dirty="0">
+                <a:solidFill>
+                  <a:srgbClr val="990011"/>
+                </a:solidFill>
+                <a:latin typeface="Calibri" pitchFamily="34" charset="0"/>
+                <a:ea typeface="Calibri" pitchFamily="34" charset="-122"/>
+                <a:cs typeface="Calibri" pitchFamily="34" charset="-120"/>
+              </a:rPr>
+              <a:t>SampEn, SD1, SD2 (Poincaré)</a:t>
+            </a:r>
+            <a:endParaRPr lang="en-US" sz="1600" dirty="0"/>
+          </a:p>
+        </p:txBody>
+      </p:sp>
+      <p:sp>
+        <p:nvSpPr>
+          <p:cNvPr id="14" name="Text 9"/>
+          <p:cNvSpPr txBox="1"/>
+          <p:nvPr/>
+        </p:nvSpPr>
+        <p:spPr>
+          <a:xfrm>
+            <a:off x="1371600" y="4928616"/>
+            <a:ext cx="10241280" cy="1051560"/>
+          </a:xfrm>
+          <a:prstGeom prst="rect">
+            <a:avLst/>
+          </a:prstGeom>
+          <a:noFill/>
+          <a:ln/>
+        </p:spPr>
+        <p:txBody>
+          <a:bodyPr wrap="square" lIns="0" tIns="0" rIns="0" bIns="0" rtlCol="0" anchor="ctr"/>
+          <a:lstStyle/>
+          <a:p>
+            <a:pPr indent="0" marL="0">
+              <a:buNone/>
+            </a:pPr>
+            <a:r>
+              <a:rPr lang="en-US" sz="1300" dirty="0">
+                <a:solidFill>
+                  <a:srgbClr val="444444"/>
+                </a:solidFill>
+                <a:latin typeface="Calibri" pitchFamily="34" charset="0"/>
+                <a:ea typeface="Calibri" pitchFamily="34" charset="-122"/>
+                <a:cs typeface="Calibri" pitchFamily="34" charset="-120"/>
+              </a:rPr>
+              <a:t>Máy đo độ khó đoán: SampEn cao = chuỗi nhịp hỗn loạn khó dự đoán — đặc trưng 'sát thủ' với AFib. SD1/SD2 là hình dáng đám mây Poincaré (slide sau).</a:t>
+            </a:r>
+            <a:endParaRPr lang="en-US" sz="1300" dirty="0"/>
           </a:p>
         </p:txBody>
       </p:sp>
